--- a/static/ppts/G6_Sci_T5_Full_Revision.pptx
+++ b/static/ppts/G6_Sci_T5_Full_Revision.pptx
@@ -9,11 +9,9 @@
     <p:sldId id="257" r:id="rId3"/>
     <p:sldId id="258" r:id="rId4"/>
     <p:sldId id="259" r:id="rId5"/>
-    <p:sldId id="260" r:id="rId6"/>
-    <p:sldId id="261" r:id="rId7"/>
   </p:sldIdLst>
   <p:notesMasterIdLst>
-    <p:notesMasterId r:id="rId8"/>
+    <p:notesMasterId r:id="rId6"/>
   </p:notesMasterIdLst>
   <p:sldSz cx="9144000" cy="5143500"/>
   <p:notesSz cx="5143500" cy="9144000"/>
@@ -795,182 +793,6 @@
             <a:fld id="{F7021451-1387-4CA6-816F-3879F97B5CBC}" type="slidenum">
               <a:rPr lang="en-US"/>
               <a:t>4</a:t>
-            </a:fld>
-            <a:endParaRPr lang="en-US"/>
-          </a:p>
-        </p:txBody>
-      </p:sp>
-    </p:spTree>
-    <p:extLst>
-      <p:ext uri="{BB962C8B-B14F-4D97-AF65-F5344CB8AC3E}">
-        <p14:creationId xmlns:p14="http://schemas.microsoft.com/office/powerpoint/2010/main" val="1024086991"/>
-      </p:ext>
-    </p:extLst>
-  </p:cSld>
-  <p:clrMapOvr>
-    <a:masterClrMapping/>
-  </p:clrMapOvr>
-</p:notes>
-</file>
-
-<file path=ppt/notesSlides/notesSlide5.xml><?xml version="1.0" encoding="utf-8"?>
-<p:notes xmlns:a="http://schemas.openxmlformats.org/drawingml/2006/main" xmlns:r="http://schemas.openxmlformats.org/officeDocument/2006/relationships" xmlns:p="http://schemas.openxmlformats.org/presentationml/2006/main">
-  <p:cSld>
-    <p:spTree>
-      <p:nvGrpSpPr>
-        <p:cNvPr id="1" name=""/>
-        <p:cNvGrpSpPr/>
-        <p:nvPr/>
-      </p:nvGrpSpPr>
-      <p:grpSpPr>
-        <a:xfrm>
-          <a:off x="0" y="0"/>
-          <a:ext cx="0" cy="0"/>
-          <a:chOff x="0" y="0"/>
-          <a:chExt cx="0" cy="0"/>
-        </a:xfrm>
-      </p:grpSpPr>
-      <p:sp>
-        <p:nvSpPr>
-          <p:cNvPr id="2" name="Slide Image Placeholder 1"/>
-          <p:cNvSpPr>
-            <a:spLocks noGrp="1" noRot="1" noChangeAspect="1"/>
-          </p:cNvSpPr>
-          <p:nvPr>
-            <p:ph type="sldImg"/>
-          </p:nvPr>
-        </p:nvSpPr>
-        <p:spPr/>
-      </p:sp>
-      <p:sp>
-        <p:nvSpPr>
-          <p:cNvPr id="3" name="Notes Placeholder 2"/>
-          <p:cNvSpPr>
-            <a:spLocks noGrp="1"/>
-          </p:cNvSpPr>
-          <p:nvPr>
-            <p:ph type="body" idx="1"/>
-          </p:nvPr>
-        </p:nvSpPr>
-        <p:spPr/>
-        <p:txBody>
-          <a:bodyPr/>
-          <a:lstStyle/>
-          <a:p>
-            <a:r>
-              <a:rPr lang="en-US" dirty="0"/>
-              <a:t/>
-            </a:r>
-            <a:endParaRPr lang="en-US" dirty="0"/>
-          </a:p>
-        </p:txBody>
-      </p:sp>
-      <p:sp>
-        <p:nvSpPr>
-          <p:cNvPr id="4" name="Slide Number Placeholder 3"/>
-          <p:cNvSpPr>
-            <a:spLocks noGrp="1"/>
-          </p:cNvSpPr>
-          <p:nvPr>
-            <p:ph type="sldNum" sz="quarter" idx="10"/>
-          </p:nvPr>
-        </p:nvSpPr>
-        <p:spPr/>
-        <p:txBody>
-          <a:bodyPr/>
-          <a:lstStyle/>
-          <a:p>
-            <a:fld id="{F7021451-1387-4CA6-816F-3879F97B5CBC}" type="slidenum">
-              <a:rPr lang="en-US"/>
-              <a:t>5</a:t>
-            </a:fld>
-            <a:endParaRPr lang="en-US"/>
-          </a:p>
-        </p:txBody>
-      </p:sp>
-    </p:spTree>
-    <p:extLst>
-      <p:ext uri="{BB962C8B-B14F-4D97-AF65-F5344CB8AC3E}">
-        <p14:creationId xmlns:p14="http://schemas.microsoft.com/office/powerpoint/2010/main" val="1024086991"/>
-      </p:ext>
-    </p:extLst>
-  </p:cSld>
-  <p:clrMapOvr>
-    <a:masterClrMapping/>
-  </p:clrMapOvr>
-</p:notes>
-</file>
-
-<file path=ppt/notesSlides/notesSlide6.xml><?xml version="1.0" encoding="utf-8"?>
-<p:notes xmlns:a="http://schemas.openxmlformats.org/drawingml/2006/main" xmlns:r="http://schemas.openxmlformats.org/officeDocument/2006/relationships" xmlns:p="http://schemas.openxmlformats.org/presentationml/2006/main">
-  <p:cSld>
-    <p:spTree>
-      <p:nvGrpSpPr>
-        <p:cNvPr id="1" name=""/>
-        <p:cNvGrpSpPr/>
-        <p:nvPr/>
-      </p:nvGrpSpPr>
-      <p:grpSpPr>
-        <a:xfrm>
-          <a:off x="0" y="0"/>
-          <a:ext cx="0" cy="0"/>
-          <a:chOff x="0" y="0"/>
-          <a:chExt cx="0" cy="0"/>
-        </a:xfrm>
-      </p:grpSpPr>
-      <p:sp>
-        <p:nvSpPr>
-          <p:cNvPr id="2" name="Slide Image Placeholder 1"/>
-          <p:cNvSpPr>
-            <a:spLocks noGrp="1" noRot="1" noChangeAspect="1"/>
-          </p:cNvSpPr>
-          <p:nvPr>
-            <p:ph type="sldImg"/>
-          </p:nvPr>
-        </p:nvSpPr>
-        <p:spPr/>
-      </p:sp>
-      <p:sp>
-        <p:nvSpPr>
-          <p:cNvPr id="3" name="Notes Placeholder 2"/>
-          <p:cNvSpPr>
-            <a:spLocks noGrp="1"/>
-          </p:cNvSpPr>
-          <p:nvPr>
-            <p:ph type="body" idx="1"/>
-          </p:nvPr>
-        </p:nvSpPr>
-        <p:spPr/>
-        <p:txBody>
-          <a:bodyPr/>
-          <a:lstStyle/>
-          <a:p>
-            <a:r>
-              <a:rPr lang="en-US" dirty="0"/>
-              <a:t/>
-            </a:r>
-            <a:endParaRPr lang="en-US" dirty="0"/>
-          </a:p>
-        </p:txBody>
-      </p:sp>
-      <p:sp>
-        <p:nvSpPr>
-          <p:cNvPr id="4" name="Slide Number Placeholder 3"/>
-          <p:cNvSpPr>
-            <a:spLocks noGrp="1"/>
-          </p:cNvSpPr>
-          <p:nvPr>
-            <p:ph type="sldNum" sz="quarter" idx="10"/>
-          </p:nvPr>
-        </p:nvSpPr>
-        <p:spPr/>
-        <p:txBody>
-          <a:bodyPr/>
-          <a:lstStyle/>
-          <a:p>
-            <a:fld id="{F7021451-1387-4CA6-816F-3879F97B5CBC}" type="slidenum">
-              <a:rPr lang="en-US"/>
-              <a:t>6</a:t>
             </a:fld>
             <a:endParaRPr lang="en-US"/>
           </a:p>
@@ -1302,7 +1124,7 @@
     <p:bg>
       <p:bgPr>
         <a:solidFill>
-          <a:srgbClr val="1E3A5F"/>
+          <a:srgbClr val="1B2A4A"/>
         </a:solidFill>
       </p:bgPr>
     </p:bg>
@@ -1322,14 +1144,34 @@
       </p:grpSpPr>
       <p:sp>
         <p:nvSpPr>
-          <p:cNvPr id="2" name="Text 0"/>
+          <p:cNvPr id="2" name="Shape 0"/>
           <p:cNvSpPr/>
           <p:nvPr/>
         </p:nvSpPr>
         <p:spPr>
           <a:xfrm>
-            <a:off x="731520" y="1371600"/>
-            <a:ext cx="7680960" cy="1371600"/>
+            <a:off x="0" y="0"/>
+            <a:ext cx="109728" cy="5143500"/>
+          </a:xfrm>
+          <a:prstGeom prst="rect">
+            <a:avLst/>
+          </a:prstGeom>
+          <a:solidFill>
+            <a:srgbClr val="2A9D8F"/>
+          </a:solidFill>
+          <a:ln/>
+        </p:spPr>
+      </p:sp>
+      <p:sp>
+        <p:nvSpPr>
+          <p:cNvPr id="3" name="Text 1"/>
+          <p:cNvSpPr/>
+          <p:nvPr/>
+        </p:nvSpPr>
+        <p:spPr>
+          <a:xfrm>
+            <a:off x="731520" y="1280160"/>
+            <a:ext cx="7772400" cy="1371600"/>
           </a:xfrm>
           <a:prstGeom prst="rect">
             <a:avLst/>
@@ -1345,30 +1187,30 @@
               <a:buNone/>
             </a:pPr>
             <a:r>
-              <a:rPr lang="en-US" sz="4000" b="1" dirty="0">
+              <a:rPr lang="en-US" sz="3600" b="1" dirty="0">
                 <a:solidFill>
                   <a:srgbClr val="FFFFFF"/>
                 </a:solidFill>
-                <a:latin typeface="Calibri" pitchFamily="34" charset="0"/>
-                <a:ea typeface="Calibri" pitchFamily="34" charset="-122"/>
-                <a:cs typeface="Calibri" pitchFamily="34" charset="-120"/>
+                <a:latin typeface="Georgia" pitchFamily="34" charset="0"/>
+                <a:ea typeface="Georgia" pitchFamily="34" charset="-122"/>
+                <a:cs typeface="Georgia" pitchFamily="34" charset="-120"/>
               </a:rPr>
               <a:t>Space Science — Full Revision</a:t>
             </a:r>
-            <a:endParaRPr lang="en-US" sz="4000" dirty="0"/>
-          </a:p>
-        </p:txBody>
-      </p:sp>
-      <p:sp>
-        <p:nvSpPr>
-          <p:cNvPr id="3" name="Text 1"/>
+            <a:endParaRPr lang="en-US" sz="3600" dirty="0"/>
+          </a:p>
+        </p:txBody>
+      </p:sp>
+      <p:sp>
+        <p:nvSpPr>
+          <p:cNvPr id="4" name="Text 2"/>
           <p:cNvSpPr/>
           <p:nvPr/>
         </p:nvSpPr>
         <p:spPr>
           <a:xfrm>
-            <a:off x="731520" y="2926080"/>
-            <a:ext cx="7680960" cy="548640"/>
+            <a:off x="731520" y="2743200"/>
+            <a:ext cx="7772400" cy="548640"/>
           </a:xfrm>
           <a:prstGeom prst="rect">
             <a:avLst/>
@@ -1384,17 +1226,56 @@
               <a:buNone/>
             </a:pPr>
             <a:r>
-              <a:rPr lang="en-US" sz="1600" i="1" dirty="0">
+              <a:rPr lang="en-US" sz="1600" dirty="0">
                 <a:solidFill>
-                  <a:srgbClr val="FFFFFF"/>
+                  <a:srgbClr val="9B9690"/>
                 </a:solidFill>
                 <a:latin typeface="Calibri" pitchFamily="34" charset="0"/>
                 <a:ea typeface="Calibri" pitchFamily="34" charset="-122"/>
                 <a:cs typeface="Calibri" pitchFamily="34" charset="-120"/>
               </a:rPr>
-              <a:t>Grade 6 Science · Mr Zocchi</a:t>
+              <a:t>G6 Science · Term 5 Review</a:t>
             </a:r>
             <a:endParaRPr lang="en-US" sz="1600" dirty="0"/>
+          </a:p>
+        </p:txBody>
+      </p:sp>
+      <p:sp>
+        <p:nvSpPr>
+          <p:cNvPr id="5" name="Text 3"/>
+          <p:cNvSpPr/>
+          <p:nvPr/>
+        </p:nvSpPr>
+        <p:spPr>
+          <a:xfrm>
+            <a:off x="731520" y="4389120"/>
+            <a:ext cx="7772400" cy="457200"/>
+          </a:xfrm>
+          <a:prstGeom prst="rect">
+            <a:avLst/>
+          </a:prstGeom>
+          <a:noFill/>
+          <a:ln/>
+        </p:spPr>
+        <p:txBody>
+          <a:bodyPr wrap="square" rtlCol="0" anchor="ctr"/>
+          <a:lstStyle/>
+          <a:p>
+            <a:pPr indent="0" marL="0">
+              <a:buNone/>
+            </a:pPr>
+            <a:r>
+              <a:rPr lang="en-US" sz="1000" dirty="0">
+                <a:solidFill>
+                  <a:srgbClr val="6B6660"/>
+                </a:solidFill>
+                <a:latin typeface="Calibri" pitchFamily="34" charset="0"/>
+                <a:ea typeface="Calibri" pitchFamily="34" charset="-122"/>
+                <a:cs typeface="Calibri" pitchFamily="34" charset="-120"/>
+              </a:rPr>
+              <a:t>Mr Zocchi · mrzocchi.com</a:t>
+            </a:r>
+            <a:endParaRPr lang="en-US" sz="1000" dirty="0"/>
           </a:p>
         </p:txBody>
       </p:sp>
@@ -1409,6 +1290,13 @@
 <file path=ppt/slides/slide2.xml><?xml version="1.0" encoding="utf-8"?>
 <p:sld xmlns:a="http://schemas.openxmlformats.org/drawingml/2006/main" xmlns:r="http://schemas.openxmlformats.org/officeDocument/2006/relationships" xmlns:p="http://schemas.openxmlformats.org/presentationml/2006/main">
   <p:cSld name="Slide 2">
+    <p:bg>
+      <p:bgPr>
+        <a:solidFill>
+          <a:srgbClr val="FFFFFF"/>
+        </a:solidFill>
+      </p:bgPr>
+    </p:bg>
     <p:spTree>
       <p:nvGrpSpPr>
         <p:cNvPr id="1" name=""/>
@@ -1432,13 +1320,13 @@
         <p:spPr>
           <a:xfrm>
             <a:off x="0" y="0"/>
-            <a:ext cx="9144000" cy="548640"/>
+            <a:ext cx="9144000" cy="54864"/>
           </a:xfrm>
           <a:prstGeom prst="rect">
             <a:avLst/>
           </a:prstGeom>
           <a:solidFill>
-            <a:srgbClr val="1E3A5F"/>
+            <a:srgbClr val="2A9D8F"/>
           </a:solidFill>
           <a:ln/>
         </p:spPr>
@@ -1451,8 +1339,8 @@
         </p:nvSpPr>
         <p:spPr>
           <a:xfrm>
-            <a:off x="457200" y="45720"/>
-            <a:ext cx="8229600" cy="457200"/>
+            <a:off x="548640" y="274320"/>
+            <a:ext cx="8046720" cy="640080"/>
           </a:xfrm>
           <a:prstGeom prst="rect">
             <a:avLst/>
@@ -1461,24 +1349,24 @@
           <a:ln/>
         </p:spPr>
         <p:txBody>
-          <a:bodyPr wrap="square" rtlCol="0" anchor="ctr"/>
+          <a:bodyPr wrap="square" lIns="0" tIns="0" rIns="0" bIns="0" rtlCol="0" anchor="ctr"/>
           <a:lstStyle/>
           <a:p>
             <a:pPr indent="0" marL="0">
               <a:buNone/>
             </a:pPr>
             <a:r>
-              <a:rPr lang="en-US" sz="1800" b="1" dirty="0">
+              <a:rPr lang="en-US" sz="2600" b="1" dirty="0">
                 <a:solidFill>
-                  <a:srgbClr val="FFFFFF"/>
+                  <a:srgbClr val="1B2A4A"/>
                 </a:solidFill>
-                <a:latin typeface="Calibri" pitchFamily="34" charset="0"/>
-                <a:ea typeface="Calibri" pitchFamily="34" charset="-122"/>
-                <a:cs typeface="Calibri" pitchFamily="34" charset="-120"/>
+                <a:latin typeface="Georgia" pitchFamily="34" charset="0"/>
+                <a:ea typeface="Georgia" pitchFamily="34" charset="-122"/>
+                <a:cs typeface="Georgia" pitchFamily="34" charset="-120"/>
               </a:rPr>
-              <a:t>Solar system recap</a:t>
-            </a:r>
-            <a:endParaRPr lang="en-US" sz="1800" dirty="0"/>
+              <a:t>Solar System &amp; Earth-Moon-Sun</a:t>
+            </a:r>
+            <a:endParaRPr lang="en-US" sz="2600" dirty="0"/>
           </a:p>
         </p:txBody>
       </p:sp>
@@ -1490,8 +1378,8 @@
         </p:nvSpPr>
         <p:spPr>
           <a:xfrm>
-            <a:off x="731520" y="1097280"/>
-            <a:ext cx="7680960" cy="3200400"/>
+            <a:off x="548640" y="1097280"/>
+            <a:ext cx="8046720" cy="3474720"/>
           </a:xfrm>
           <a:prstGeom prst="rect">
             <a:avLst/>
@@ -1500,47 +1388,91 @@
           <a:ln/>
         </p:spPr>
         <p:txBody>
-          <a:bodyPr wrap="square" rtlCol="0" anchor="ctr"/>
+          <a:bodyPr wrap="square" rtlCol="0" anchor="t"/>
           <a:lstStyle/>
           <a:p>
-            <a:pPr indent="0" marL="0">
-              <a:buNone/>
+            <a:pPr marL="342900" indent="-342900">
+              <a:spcAft>
+                <a:spcPts val="800"/>
+              </a:spcAft>
+              <a:buSzPct val="100000"/>
+              <a:buChar char="•"/>
             </a:pPr>
             <a:r>
-              <a:rPr lang="en-US" sz="1600" dirty="0">
+              <a:rPr lang="en-US" sz="1500" dirty="0">
                 <a:solidFill>
-                  <a:srgbClr val="363636"/>
+                  <a:srgbClr val="3D3A36"/>
                 </a:solidFill>
                 <a:latin typeface="Calibri" pitchFamily="34" charset="0"/>
                 <a:ea typeface="Calibri" pitchFamily="34" charset="-122"/>
                 <a:cs typeface="Calibri" pitchFamily="34" charset="-120"/>
               </a:rPr>
-              <a:t>Content for: Solar system recap</a:t>
-            </a:r>
-            <a:endParaRPr lang="en-US" sz="1600" dirty="0"/>
-          </a:p>
-          <a:p>
-            <a:pPr indent="0" marL="0">
-              <a:buNone/>
+              <a:t>8 planets: 4 inner (rocky) + 4 outer (gas giants)</a:t>
+            </a:r>
+            <a:endParaRPr lang="en-US" sz="1500" dirty="0"/>
+          </a:p>
+          <a:p>
+            <a:pPr marL="342900" indent="-342900">
+              <a:spcAft>
+                <a:spcPts val="800"/>
+              </a:spcAft>
+              <a:buSzPct val="100000"/>
+              <a:buChar char="•"/>
             </a:pPr>
-            <a:endParaRPr lang="en-US" sz="1600" dirty="0"/>
-          </a:p>
-          <a:p>
-            <a:pPr indent="0" marL="0">
-              <a:buNone/>
-            </a:pPr>
-            <a:r>
-              <a:rPr lang="en-US" sz="1600" dirty="0">
+            <a:r>
+              <a:rPr lang="en-US" sz="1500" dirty="0">
                 <a:solidFill>
-                  <a:srgbClr val="363636"/>
+                  <a:srgbClr val="3D3A36"/>
                 </a:solidFill>
                 <a:latin typeface="Calibri" pitchFamily="34" charset="0"/>
                 <a:ea typeface="Calibri" pitchFamily="34" charset="-122"/>
                 <a:cs typeface="Calibri" pitchFamily="34" charset="-120"/>
               </a:rPr>
-              <a:t>Key points will be covered in class.</a:t>
-            </a:r>
-            <a:endParaRPr lang="en-US" sz="1600" dirty="0"/>
+              <a:t>Earth orbits Sun (1 year), Moon orbits Earth (~28 days)</a:t>
+            </a:r>
+            <a:endParaRPr lang="en-US" sz="1500" dirty="0"/>
+          </a:p>
+          <a:p>
+            <a:pPr marL="342900" indent="-342900">
+              <a:spcAft>
+                <a:spcPts val="800"/>
+              </a:spcAft>
+              <a:buSzPct val="100000"/>
+              <a:buChar char="•"/>
+            </a:pPr>
+            <a:r>
+              <a:rPr lang="en-US" sz="1500" dirty="0">
+                <a:solidFill>
+                  <a:srgbClr val="3D3A36"/>
+                </a:solidFill>
+                <a:latin typeface="Calibri" pitchFamily="34" charset="0"/>
+                <a:ea typeface="Calibri" pitchFamily="34" charset="-122"/>
+                <a:cs typeface="Calibri" pitchFamily="34" charset="-120"/>
+              </a:rPr>
+              <a:t>Moon phases from changing angle of reflected sunlight</a:t>
+            </a:r>
+            <a:endParaRPr lang="en-US" sz="1500" dirty="0"/>
+          </a:p>
+          <a:p>
+            <a:pPr marL="342900" indent="-342900">
+              <a:spcAft>
+                <a:spcPts val="800"/>
+              </a:spcAft>
+              <a:buSzPct val="100000"/>
+              <a:buChar char="•"/>
+            </a:pPr>
+            <a:r>
+              <a:rPr lang="en-US" sz="1500" dirty="0">
+                <a:solidFill>
+                  <a:srgbClr val="3D3A36"/>
+                </a:solidFill>
+                <a:latin typeface="Calibri" pitchFamily="34" charset="0"/>
+                <a:ea typeface="Calibri" pitchFamily="34" charset="-122"/>
+                <a:cs typeface="Calibri" pitchFamily="34" charset="-120"/>
+              </a:rPr>
+              <a:t>The Moon is a satellite — reflects light, doesn't make its own</a:t>
+            </a:r>
+            <a:endParaRPr lang="en-US" sz="1500" dirty="0"/>
           </a:p>
         </p:txBody>
       </p:sp>
@@ -1552,8 +1484,8 @@
         </p:nvSpPr>
         <p:spPr>
           <a:xfrm>
-            <a:off x="7772400" y="4663440"/>
-            <a:ext cx="1097280" cy="365760"/>
+            <a:off x="548640" y="4800600"/>
+            <a:ext cx="3657600" cy="274320"/>
           </a:xfrm>
           <a:prstGeom prst="rect">
             <a:avLst/>
@@ -1565,21 +1497,18 @@
           <a:bodyPr wrap="square" rtlCol="0" anchor="ctr"/>
           <a:lstStyle/>
           <a:p>
-            <a:pPr algn="r" indent="0" marL="0">
+            <a:pPr indent="0" marL="0">
               <a:buNone/>
             </a:pPr>
             <a:r>
-              <a:rPr lang="en-US" sz="1000" dirty="0">
+              <a:rPr lang="en-US" sz="800" dirty="0">
                 <a:solidFill>
-                  <a:srgbClr val="999999"/>
+                  <a:srgbClr val="9B9690"/>
                 </a:solidFill>
-                <a:latin typeface="Calibri" pitchFamily="34" charset="0"/>
-                <a:ea typeface="Calibri" pitchFamily="34" charset="-122"/>
-                <a:cs typeface="Calibri" pitchFamily="34" charset="-120"/>
               </a:rPr>
-              <a:t>2 / 6</a:t>
-            </a:r>
-            <a:endParaRPr lang="en-US" sz="1000" dirty="0"/>
+              <a:t>mrzocchi.com</a:t>
+            </a:r>
+            <a:endParaRPr lang="en-US" sz="800" dirty="0"/>
           </a:p>
         </p:txBody>
       </p:sp>
@@ -1594,6 +1523,13 @@
 <file path=ppt/slides/slide3.xml><?xml version="1.0" encoding="utf-8"?>
 <p:sld xmlns:a="http://schemas.openxmlformats.org/drawingml/2006/main" xmlns:r="http://schemas.openxmlformats.org/officeDocument/2006/relationships" xmlns:p="http://schemas.openxmlformats.org/presentationml/2006/main">
   <p:cSld name="Slide 3">
+    <p:bg>
+      <p:bgPr>
+        <a:solidFill>
+          <a:srgbClr val="FFFFFF"/>
+        </a:solidFill>
+      </p:bgPr>
+    </p:bg>
     <p:spTree>
       <p:nvGrpSpPr>
         <p:cNvPr id="1" name=""/>
@@ -1617,13 +1553,13 @@
         <p:spPr>
           <a:xfrm>
             <a:off x="0" y="0"/>
-            <a:ext cx="9144000" cy="548640"/>
+            <a:ext cx="9144000" cy="54864"/>
           </a:xfrm>
           <a:prstGeom prst="rect">
             <a:avLst/>
           </a:prstGeom>
           <a:solidFill>
-            <a:srgbClr val="1E3A5F"/>
+            <a:srgbClr val="2A9D8F"/>
           </a:solidFill>
           <a:ln/>
         </p:spPr>
@@ -1636,8 +1572,8 @@
         </p:nvSpPr>
         <p:spPr>
           <a:xfrm>
-            <a:off x="457200" y="45720"/>
-            <a:ext cx="8229600" cy="457200"/>
+            <a:off x="548640" y="274320"/>
+            <a:ext cx="8046720" cy="640080"/>
           </a:xfrm>
           <a:prstGeom prst="rect">
             <a:avLst/>
@@ -1646,24 +1582,24 @@
           <a:ln/>
         </p:spPr>
         <p:txBody>
-          <a:bodyPr wrap="square" rtlCol="0" anchor="ctr"/>
+          <a:bodyPr wrap="square" lIns="0" tIns="0" rIns="0" bIns="0" rtlCol="0" anchor="ctr"/>
           <a:lstStyle/>
           <a:p>
             <a:pPr indent="0" marL="0">
               <a:buNone/>
             </a:pPr>
             <a:r>
-              <a:rPr lang="en-US" sz="1800" b="1" dirty="0">
+              <a:rPr lang="en-US" sz="2600" b="1" dirty="0">
                 <a:solidFill>
-                  <a:srgbClr val="FFFFFF"/>
+                  <a:srgbClr val="1B2A4A"/>
                 </a:solidFill>
-                <a:latin typeface="Calibri" pitchFamily="34" charset="0"/>
-                <a:ea typeface="Calibri" pitchFamily="34" charset="-122"/>
-                <a:cs typeface="Calibri" pitchFamily="34" charset="-120"/>
+                <a:latin typeface="Georgia" pitchFamily="34" charset="0"/>
+                <a:ea typeface="Georgia" pitchFamily="34" charset="-122"/>
+                <a:cs typeface="Georgia" pitchFamily="34" charset="-120"/>
               </a:rPr>
-              <a:t>Earth-Sun-Moon recap</a:t>
-            </a:r>
-            <a:endParaRPr lang="en-US" sz="1800" dirty="0"/>
+              <a:t>Seasons, Day &amp; Night</a:t>
+            </a:r>
+            <a:endParaRPr lang="en-US" sz="2600" dirty="0"/>
           </a:p>
         </p:txBody>
       </p:sp>
@@ -1675,8 +1611,8 @@
         </p:nvSpPr>
         <p:spPr>
           <a:xfrm>
-            <a:off x="731520" y="1097280"/>
-            <a:ext cx="7680960" cy="3200400"/>
+            <a:off x="548640" y="1097280"/>
+            <a:ext cx="8046720" cy="3474720"/>
           </a:xfrm>
           <a:prstGeom prst="rect">
             <a:avLst/>
@@ -1685,47 +1621,91 @@
           <a:ln/>
         </p:spPr>
         <p:txBody>
-          <a:bodyPr wrap="square" rtlCol="0" anchor="ctr"/>
+          <a:bodyPr wrap="square" rtlCol="0" anchor="t"/>
           <a:lstStyle/>
           <a:p>
-            <a:pPr indent="0" marL="0">
-              <a:buNone/>
+            <a:pPr marL="342900" indent="-342900">
+              <a:spcAft>
+                <a:spcPts val="800"/>
+              </a:spcAft>
+              <a:buSzPct val="100000"/>
+              <a:buChar char="•"/>
             </a:pPr>
             <a:r>
-              <a:rPr lang="en-US" sz="1600" dirty="0">
+              <a:rPr lang="en-US" sz="1500" dirty="0">
                 <a:solidFill>
-                  <a:srgbClr val="363636"/>
+                  <a:srgbClr val="3D3A36"/>
                 </a:solidFill>
                 <a:latin typeface="Calibri" pitchFamily="34" charset="0"/>
                 <a:ea typeface="Calibri" pitchFamily="34" charset="-122"/>
                 <a:cs typeface="Calibri" pitchFamily="34" charset="-120"/>
               </a:rPr>
-              <a:t>Content for: Earth-Sun-Moon recap</a:t>
-            </a:r>
-            <a:endParaRPr lang="en-US" sz="1600" dirty="0"/>
-          </a:p>
-          <a:p>
-            <a:pPr indent="0" marL="0">
-              <a:buNone/>
+              <a:t>Seasons caused by Earth's 23.5° axial tilt (NOT distance from Sun)</a:t>
+            </a:r>
+            <a:endParaRPr lang="en-US" sz="1500" dirty="0"/>
+          </a:p>
+          <a:p>
+            <a:pPr marL="342900" indent="-342900">
+              <a:spcAft>
+                <a:spcPts val="800"/>
+              </a:spcAft>
+              <a:buSzPct val="100000"/>
+              <a:buChar char="•"/>
             </a:pPr>
-            <a:endParaRPr lang="en-US" sz="1600" dirty="0"/>
-          </a:p>
-          <a:p>
-            <a:pPr indent="0" marL="0">
-              <a:buNone/>
-            </a:pPr>
-            <a:r>
-              <a:rPr lang="en-US" sz="1600" dirty="0">
+            <a:r>
+              <a:rPr lang="en-US" sz="1500" dirty="0">
                 <a:solidFill>
-                  <a:srgbClr val="363636"/>
+                  <a:srgbClr val="3D3A36"/>
                 </a:solidFill>
                 <a:latin typeface="Calibri" pitchFamily="34" charset="0"/>
                 <a:ea typeface="Calibri" pitchFamily="34" charset="-122"/>
                 <a:cs typeface="Calibri" pitchFamily="34" charset="-120"/>
               </a:rPr>
-              <a:t>Key points will be covered in class.</a:t>
-            </a:r>
-            <a:endParaRPr lang="en-US" sz="1600" dirty="0"/>
+              <a:t>Day/night caused by Earth rotating every 24 hours</a:t>
+            </a:r>
+            <a:endParaRPr lang="en-US" sz="1500" dirty="0"/>
+          </a:p>
+          <a:p>
+            <a:pPr marL="342900" indent="-342900">
+              <a:spcAft>
+                <a:spcPts val="800"/>
+              </a:spcAft>
+              <a:buSzPct val="100000"/>
+              <a:buChar char="•"/>
+            </a:pPr>
+            <a:r>
+              <a:rPr lang="en-US" sz="1500" dirty="0">
+                <a:solidFill>
+                  <a:srgbClr val="3D3A36"/>
+                </a:solidFill>
+                <a:latin typeface="Calibri" pitchFamily="34" charset="0"/>
+                <a:ea typeface="Calibri" pitchFamily="34" charset="-122"/>
+                <a:cs typeface="Calibri" pitchFamily="34" charset="-120"/>
+              </a:rPr>
+              <a:t>Summer: hemisphere tilts toward Sun, longer days, more direct light</a:t>
+            </a:r>
+            <a:endParaRPr lang="en-US" sz="1500" dirty="0"/>
+          </a:p>
+          <a:p>
+            <a:pPr marL="342900" indent="-342900">
+              <a:spcAft>
+                <a:spcPts val="800"/>
+              </a:spcAft>
+              <a:buSzPct val="100000"/>
+              <a:buChar char="•"/>
+            </a:pPr>
+            <a:r>
+              <a:rPr lang="en-US" sz="1500" dirty="0">
+                <a:solidFill>
+                  <a:srgbClr val="3D3A36"/>
+                </a:solidFill>
+                <a:latin typeface="Calibri" pitchFamily="34" charset="0"/>
+                <a:ea typeface="Calibri" pitchFamily="34" charset="-122"/>
+                <a:cs typeface="Calibri" pitchFamily="34" charset="-120"/>
+              </a:rPr>
+              <a:t>Time zones exist because Earth rotates and places face Sun at different times</a:t>
+            </a:r>
+            <a:endParaRPr lang="en-US" sz="1500" dirty="0"/>
           </a:p>
         </p:txBody>
       </p:sp>
@@ -1737,8 +1717,8 @@
         </p:nvSpPr>
         <p:spPr>
           <a:xfrm>
-            <a:off x="7772400" y="4663440"/>
-            <a:ext cx="1097280" cy="365760"/>
+            <a:off x="548640" y="4800600"/>
+            <a:ext cx="3657600" cy="274320"/>
           </a:xfrm>
           <a:prstGeom prst="rect">
             <a:avLst/>
@@ -1750,21 +1730,18 @@
           <a:bodyPr wrap="square" rtlCol="0" anchor="ctr"/>
           <a:lstStyle/>
           <a:p>
-            <a:pPr algn="r" indent="0" marL="0">
+            <a:pPr indent="0" marL="0">
               <a:buNone/>
             </a:pPr>
             <a:r>
-              <a:rPr lang="en-US" sz="1000" dirty="0">
+              <a:rPr lang="en-US" sz="800" dirty="0">
                 <a:solidFill>
-                  <a:srgbClr val="999999"/>
+                  <a:srgbClr val="9B9690"/>
                 </a:solidFill>
-                <a:latin typeface="Calibri" pitchFamily="34" charset="0"/>
-                <a:ea typeface="Calibri" pitchFamily="34" charset="-122"/>
-                <a:cs typeface="Calibri" pitchFamily="34" charset="-120"/>
               </a:rPr>
-              <a:t>3 / 6</a:t>
-            </a:r>
-            <a:endParaRPr lang="en-US" sz="1000" dirty="0"/>
+              <a:t>mrzocchi.com</a:t>
+            </a:r>
+            <a:endParaRPr lang="en-US" sz="800" dirty="0"/>
           </a:p>
         </p:txBody>
       </p:sp>
@@ -1779,6 +1756,13 @@
 <file path=ppt/slides/slide4.xml><?xml version="1.0" encoding="utf-8"?>
 <p:sld xmlns:a="http://schemas.openxmlformats.org/drawingml/2006/main" xmlns:r="http://schemas.openxmlformats.org/officeDocument/2006/relationships" xmlns:p="http://schemas.openxmlformats.org/presentationml/2006/main">
   <p:cSld name="Slide 4">
+    <p:bg>
+      <p:bgPr>
+        <a:solidFill>
+          <a:srgbClr val="1B2A4A"/>
+        </a:solidFill>
+      </p:bgPr>
+    </p:bg>
     <p:spTree>
       <p:nvGrpSpPr>
         <p:cNvPr id="1" name=""/>
@@ -1802,13 +1786,13 @@
         <p:spPr>
           <a:xfrm>
             <a:off x="0" y="0"/>
-            <a:ext cx="9144000" cy="548640"/>
+            <a:ext cx="9144000" cy="54864"/>
           </a:xfrm>
           <a:prstGeom prst="rect">
             <a:avLst/>
           </a:prstGeom>
           <a:solidFill>
-            <a:srgbClr val="1E3A5F"/>
+            <a:srgbClr val="2A9D8F"/>
           </a:solidFill>
           <a:ln/>
         </p:spPr>
@@ -1821,8 +1805,8 @@
         </p:nvSpPr>
         <p:spPr>
           <a:xfrm>
-            <a:off x="457200" y="45720"/>
-            <a:ext cx="8229600" cy="457200"/>
+            <a:off x="548640" y="457200"/>
+            <a:ext cx="8046720" cy="640080"/>
           </a:xfrm>
           <a:prstGeom prst="rect">
             <a:avLst/>
@@ -1838,17 +1822,17 @@
               <a:buNone/>
             </a:pPr>
             <a:r>
-              <a:rPr lang="en-US" sz="1800" b="1" dirty="0">
+              <a:rPr lang="en-US" sz="2800" b="1" dirty="0">
                 <a:solidFill>
                   <a:srgbClr val="FFFFFF"/>
                 </a:solidFill>
-                <a:latin typeface="Calibri" pitchFamily="34" charset="0"/>
-                <a:ea typeface="Calibri" pitchFamily="34" charset="-122"/>
-                <a:cs typeface="Calibri" pitchFamily="34" charset="-120"/>
+                <a:latin typeface="Georgia" pitchFamily="34" charset="0"/>
+                <a:ea typeface="Georgia" pitchFamily="34" charset="-122"/>
+                <a:cs typeface="Georgia" pitchFamily="34" charset="-120"/>
               </a:rPr>
-              <a:t>Seasons recap</a:t>
-            </a:r>
-            <a:endParaRPr lang="en-US" sz="1800" dirty="0"/>
+              <a:t>Key Takeaways</a:t>
+            </a:r>
+            <a:endParaRPr lang="en-US" sz="2800" dirty="0"/>
           </a:p>
         </p:txBody>
       </p:sp>
@@ -1860,7 +1844,7 @@
         </p:nvSpPr>
         <p:spPr>
           <a:xfrm>
-            <a:off x="731520" y="1097280"/>
+            <a:off x="731520" y="1371600"/>
             <a:ext cx="7680960" cy="3200400"/>
           </a:xfrm>
           <a:prstGeom prst="rect">
@@ -1870,45 +1854,89 @@
           <a:ln/>
         </p:spPr>
         <p:txBody>
-          <a:bodyPr wrap="square" rtlCol="0" anchor="ctr"/>
+          <a:bodyPr wrap="square" rtlCol="0" anchor="t"/>
           <a:lstStyle/>
           <a:p>
-            <a:pPr indent="0" marL="0">
-              <a:buNone/>
+            <a:pPr marL="342900" indent="-342900">
+              <a:spcAft>
+                <a:spcPts val="1000"/>
+              </a:spcAft>
+              <a:buSzPct val="100000"/>
+              <a:buChar char="•"/>
             </a:pPr>
             <a:r>
               <a:rPr lang="en-US" sz="1600" dirty="0">
                 <a:solidFill>
-                  <a:srgbClr val="363636"/>
+                  <a:srgbClr val="CADCFC"/>
                 </a:solidFill>
                 <a:latin typeface="Calibri" pitchFamily="34" charset="0"/>
                 <a:ea typeface="Calibri" pitchFamily="34" charset="-122"/>
                 <a:cs typeface="Calibri" pitchFamily="34" charset="-120"/>
               </a:rPr>
-              <a:t>Content for: Seasons recap</a:t>
+              <a:t>Solar system: 8 planets orbiting the Sun</a:t>
             </a:r>
             <a:endParaRPr lang="en-US" sz="1600" dirty="0"/>
           </a:p>
           <a:p>
-            <a:pPr indent="0" marL="0">
-              <a:buNone/>
-            </a:pPr>
-            <a:endParaRPr lang="en-US" sz="1600" dirty="0"/>
-          </a:p>
-          <a:p>
-            <a:pPr indent="0" marL="0">
-              <a:buNone/>
+            <a:pPr marL="342900" indent="-342900">
+              <a:spcAft>
+                <a:spcPts val="1000"/>
+              </a:spcAft>
+              <a:buSzPct val="100000"/>
+              <a:buChar char="•"/>
             </a:pPr>
             <a:r>
               <a:rPr lang="en-US" sz="1600" dirty="0">
                 <a:solidFill>
-                  <a:srgbClr val="363636"/>
+                  <a:srgbClr val="CADCFC"/>
                 </a:solidFill>
                 <a:latin typeface="Calibri" pitchFamily="34" charset="0"/>
                 <a:ea typeface="Calibri" pitchFamily="34" charset="-122"/>
                 <a:cs typeface="Calibri" pitchFamily="34" charset="-120"/>
               </a:rPr>
-              <a:t>Key points will be covered in class.</a:t>
+              <a:t>Axial tilt → seasons; rotation → day/night</a:t>
+            </a:r>
+            <a:endParaRPr lang="en-US" sz="1600" dirty="0"/>
+          </a:p>
+          <a:p>
+            <a:pPr marL="342900" indent="-342900">
+              <a:spcAft>
+                <a:spcPts val="1000"/>
+              </a:spcAft>
+              <a:buSzPct val="100000"/>
+              <a:buChar char="•"/>
+            </a:pPr>
+            <a:r>
+              <a:rPr lang="en-US" sz="1600" dirty="0">
+                <a:solidFill>
+                  <a:srgbClr val="CADCFC"/>
+                </a:solidFill>
+                <a:latin typeface="Calibri" pitchFamily="34" charset="0"/>
+                <a:ea typeface="Calibri" pitchFamily="34" charset="-122"/>
+                <a:cs typeface="Calibri" pitchFamily="34" charset="-120"/>
+              </a:rPr>
+              <a:t>Space exploration: telescopes, satellites, probes, rovers</a:t>
+            </a:r>
+            <a:endParaRPr lang="en-US" sz="1600" dirty="0"/>
+          </a:p>
+          <a:p>
+            <a:pPr marL="342900" indent="-342900">
+              <a:spcAft>
+                <a:spcPts val="1000"/>
+              </a:spcAft>
+              <a:buSzPct val="100000"/>
+              <a:buChar char="•"/>
+            </a:pPr>
+            <a:r>
+              <a:rPr lang="en-US" sz="1600" dirty="0">
+                <a:solidFill>
+                  <a:srgbClr val="CADCFC"/>
+                </a:solidFill>
+                <a:latin typeface="Calibri" pitchFamily="34" charset="0"/>
+                <a:ea typeface="Calibri" pitchFamily="34" charset="-122"/>
+                <a:cs typeface="Calibri" pitchFamily="34" charset="-120"/>
+              </a:rPr>
+              <a:t>Key milestones: Sputnik, Moon landing, ISS, Mars rovers</a:t>
             </a:r>
             <a:endParaRPr lang="en-US" sz="1600" dirty="0"/>
           </a:p>
@@ -1922,8 +1950,8 @@
         </p:nvSpPr>
         <p:spPr>
           <a:xfrm>
-            <a:off x="7772400" y="4663440"/>
-            <a:ext cx="1097280" cy="365760"/>
+            <a:off x="548640" y="4572000"/>
+            <a:ext cx="3657600" cy="274320"/>
           </a:xfrm>
           <a:prstGeom prst="rect">
             <a:avLst/>
@@ -1935,389 +1963,16 @@
           <a:bodyPr wrap="square" rtlCol="0" anchor="ctr"/>
           <a:lstStyle/>
           <a:p>
-            <a:pPr algn="r" indent="0" marL="0">
-              <a:buNone/>
-            </a:pPr>
-            <a:r>
-              <a:rPr lang="en-US" sz="1000" dirty="0">
-                <a:solidFill>
-                  <a:srgbClr val="999999"/>
-                </a:solidFill>
-                <a:latin typeface="Calibri" pitchFamily="34" charset="0"/>
-                <a:ea typeface="Calibri" pitchFamily="34" charset="-122"/>
-                <a:cs typeface="Calibri" pitchFamily="34" charset="-120"/>
-              </a:rPr>
-              <a:t>4 / 6</a:t>
-            </a:r>
-            <a:endParaRPr lang="en-US" sz="1000" dirty="0"/>
-          </a:p>
-        </p:txBody>
-      </p:sp>
-    </p:spTree>
-  </p:cSld>
-  <p:clrMapOvr>
-    <a:masterClrMapping/>
-  </p:clrMapOvr>
-</p:sld>
-</file>
-
-<file path=ppt/slides/slide5.xml><?xml version="1.0" encoding="utf-8"?>
-<p:sld xmlns:a="http://schemas.openxmlformats.org/drawingml/2006/main" xmlns:r="http://schemas.openxmlformats.org/officeDocument/2006/relationships" xmlns:p="http://schemas.openxmlformats.org/presentationml/2006/main">
-  <p:cSld name="Slide 5">
-    <p:spTree>
-      <p:nvGrpSpPr>
-        <p:cNvPr id="1" name=""/>
-        <p:cNvGrpSpPr/>
-        <p:nvPr/>
-      </p:nvGrpSpPr>
-      <p:grpSpPr>
-        <a:xfrm>
-          <a:off x="0" y="0"/>
-          <a:ext cx="0" cy="0"/>
-          <a:chOff x="0" y="0"/>
-          <a:chExt cx="0" cy="0"/>
-        </a:xfrm>
-      </p:grpSpPr>
-      <p:sp>
-        <p:nvSpPr>
-          <p:cNvPr id="2" name="Shape 0"/>
-          <p:cNvSpPr/>
-          <p:nvPr/>
-        </p:nvSpPr>
-        <p:spPr>
-          <a:xfrm>
-            <a:off x="0" y="0"/>
-            <a:ext cx="9144000" cy="548640"/>
-          </a:xfrm>
-          <a:prstGeom prst="rect">
-            <a:avLst/>
-          </a:prstGeom>
-          <a:solidFill>
-            <a:srgbClr val="1E3A5F"/>
-          </a:solidFill>
-          <a:ln/>
-        </p:spPr>
-      </p:sp>
-      <p:sp>
-        <p:nvSpPr>
-          <p:cNvPr id="3" name="Text 1"/>
-          <p:cNvSpPr/>
-          <p:nvPr/>
-        </p:nvSpPr>
-        <p:spPr>
-          <a:xfrm>
-            <a:off x="457200" y="45720"/>
-            <a:ext cx="8229600" cy="457200"/>
-          </a:xfrm>
-          <a:prstGeom prst="rect">
-            <a:avLst/>
-          </a:prstGeom>
-          <a:noFill/>
-          <a:ln/>
-        </p:spPr>
-        <p:txBody>
-          <a:bodyPr wrap="square" rtlCol="0" anchor="ctr"/>
-          <a:lstStyle/>
-          <a:p>
             <a:pPr indent="0" marL="0">
               <a:buNone/>
             </a:pPr>
             <a:r>
-              <a:rPr lang="en-US" sz="1800" b="1" dirty="0">
-                <a:solidFill>
-                  <a:srgbClr val="FFFFFF"/>
-                </a:solidFill>
-                <a:latin typeface="Calibri" pitchFamily="34" charset="0"/>
-                <a:ea typeface="Calibri" pitchFamily="34" charset="-122"/>
-                <a:cs typeface="Calibri" pitchFamily="34" charset="-120"/>
-              </a:rPr>
-              <a:t>Day &amp; night recap</a:t>
-            </a:r>
-            <a:endParaRPr lang="en-US" sz="1800" dirty="0"/>
-          </a:p>
-        </p:txBody>
-      </p:sp>
-      <p:sp>
-        <p:nvSpPr>
-          <p:cNvPr id="4" name="Text 2"/>
-          <p:cNvSpPr/>
-          <p:nvPr/>
-        </p:nvSpPr>
-        <p:spPr>
-          <a:xfrm>
-            <a:off x="731520" y="1097280"/>
-            <a:ext cx="7680960" cy="3200400"/>
-          </a:xfrm>
-          <a:prstGeom prst="rect">
-            <a:avLst/>
-          </a:prstGeom>
-          <a:noFill/>
-          <a:ln/>
-        </p:spPr>
-        <p:txBody>
-          <a:bodyPr wrap="square" rtlCol="0" anchor="ctr"/>
-          <a:lstStyle/>
-          <a:p>
-            <a:pPr indent="0" marL="0">
-              <a:buNone/>
-            </a:pPr>
-            <a:r>
-              <a:rPr lang="en-US" sz="1600" dirty="0">
-                <a:solidFill>
-                  <a:srgbClr val="363636"/>
-                </a:solidFill>
-                <a:latin typeface="Calibri" pitchFamily="34" charset="0"/>
-                <a:ea typeface="Calibri" pitchFamily="34" charset="-122"/>
-                <a:cs typeface="Calibri" pitchFamily="34" charset="-120"/>
-              </a:rPr>
-              <a:t>Content for: Day &amp; night recap</a:t>
-            </a:r>
-            <a:endParaRPr lang="en-US" sz="1600" dirty="0"/>
-          </a:p>
-          <a:p>
-            <a:pPr indent="0" marL="0">
-              <a:buNone/>
-            </a:pPr>
-            <a:endParaRPr lang="en-US" sz="1600" dirty="0"/>
-          </a:p>
-          <a:p>
-            <a:pPr indent="0" marL="0">
-              <a:buNone/>
-            </a:pPr>
-            <a:r>
-              <a:rPr lang="en-US" sz="1600" dirty="0">
-                <a:solidFill>
-                  <a:srgbClr val="363636"/>
-                </a:solidFill>
-                <a:latin typeface="Calibri" pitchFamily="34" charset="0"/>
-                <a:ea typeface="Calibri" pitchFamily="34" charset="-122"/>
-                <a:cs typeface="Calibri" pitchFamily="34" charset="-120"/>
-              </a:rPr>
-              <a:t>Key points will be covered in class.</a:t>
-            </a:r>
-            <a:endParaRPr lang="en-US" sz="1600" dirty="0"/>
-          </a:p>
-        </p:txBody>
-      </p:sp>
-      <p:sp>
-        <p:nvSpPr>
-          <p:cNvPr id="5" name="Text 3"/>
-          <p:cNvSpPr/>
-          <p:nvPr/>
-        </p:nvSpPr>
-        <p:spPr>
-          <a:xfrm>
-            <a:off x="7772400" y="4663440"/>
-            <a:ext cx="1097280" cy="365760"/>
-          </a:xfrm>
-          <a:prstGeom prst="rect">
-            <a:avLst/>
-          </a:prstGeom>
-          <a:noFill/>
-          <a:ln/>
-        </p:spPr>
-        <p:txBody>
-          <a:bodyPr wrap="square" rtlCol="0" anchor="ctr"/>
-          <a:lstStyle/>
-          <a:p>
-            <a:pPr algn="r" indent="0" marL="0">
-              <a:buNone/>
-            </a:pPr>
-            <a:r>
               <a:rPr lang="en-US" sz="1000" dirty="0">
                 <a:solidFill>
-                  <a:srgbClr val="999999"/>
+                  <a:srgbClr val="6B6660"/>
                 </a:solidFill>
-                <a:latin typeface="Calibri" pitchFamily="34" charset="0"/>
-                <a:ea typeface="Calibri" pitchFamily="34" charset="-122"/>
-                <a:cs typeface="Calibri" pitchFamily="34" charset="-120"/>
               </a:rPr>
-              <a:t>5 / 6</a:t>
-            </a:r>
-            <a:endParaRPr lang="en-US" sz="1000" dirty="0"/>
-          </a:p>
-        </p:txBody>
-      </p:sp>
-    </p:spTree>
-  </p:cSld>
-  <p:clrMapOvr>
-    <a:masterClrMapping/>
-  </p:clrMapOvr>
-</p:sld>
-</file>
-
-<file path=ppt/slides/slide6.xml><?xml version="1.0" encoding="utf-8"?>
-<p:sld xmlns:a="http://schemas.openxmlformats.org/drawingml/2006/main" xmlns:r="http://schemas.openxmlformats.org/officeDocument/2006/relationships" xmlns:p="http://schemas.openxmlformats.org/presentationml/2006/main">
-  <p:cSld name="Slide 6">
-    <p:spTree>
-      <p:nvGrpSpPr>
-        <p:cNvPr id="1" name=""/>
-        <p:cNvGrpSpPr/>
-        <p:nvPr/>
-      </p:nvGrpSpPr>
-      <p:grpSpPr>
-        <a:xfrm>
-          <a:off x="0" y="0"/>
-          <a:ext cx="0" cy="0"/>
-          <a:chOff x="0" y="0"/>
-          <a:chExt cx="0" cy="0"/>
-        </a:xfrm>
-      </p:grpSpPr>
-      <p:sp>
-        <p:nvSpPr>
-          <p:cNvPr id="2" name="Shape 0"/>
-          <p:cNvSpPr/>
-          <p:nvPr/>
-        </p:nvSpPr>
-        <p:spPr>
-          <a:xfrm>
-            <a:off x="0" y="0"/>
-            <a:ext cx="9144000" cy="548640"/>
-          </a:xfrm>
-          <a:prstGeom prst="rect">
-            <a:avLst/>
-          </a:prstGeom>
-          <a:solidFill>
-            <a:srgbClr val="1E3A5F"/>
-          </a:solidFill>
-          <a:ln/>
-        </p:spPr>
-      </p:sp>
-      <p:sp>
-        <p:nvSpPr>
-          <p:cNvPr id="3" name="Text 1"/>
-          <p:cNvSpPr/>
-          <p:nvPr/>
-        </p:nvSpPr>
-        <p:spPr>
-          <a:xfrm>
-            <a:off x="457200" y="45720"/>
-            <a:ext cx="8229600" cy="457200"/>
-          </a:xfrm>
-          <a:prstGeom prst="rect">
-            <a:avLst/>
-          </a:prstGeom>
-          <a:noFill/>
-          <a:ln/>
-        </p:spPr>
-        <p:txBody>
-          <a:bodyPr wrap="square" rtlCol="0" anchor="ctr"/>
-          <a:lstStyle/>
-          <a:p>
-            <a:pPr indent="0" marL="0">
-              <a:buNone/>
-            </a:pPr>
-            <a:r>
-              <a:rPr lang="en-US" sz="1800" b="1" dirty="0">
-                <a:solidFill>
-                  <a:srgbClr val="FFFFFF"/>
-                </a:solidFill>
-                <a:latin typeface="Calibri" pitchFamily="34" charset="0"/>
-                <a:ea typeface="Calibri" pitchFamily="34" charset="-122"/>
-                <a:cs typeface="Calibri" pitchFamily="34" charset="-120"/>
-              </a:rPr>
-              <a:t>Space exploration recap</a:t>
-            </a:r>
-            <a:endParaRPr lang="en-US" sz="1800" dirty="0"/>
-          </a:p>
-        </p:txBody>
-      </p:sp>
-      <p:sp>
-        <p:nvSpPr>
-          <p:cNvPr id="4" name="Text 2"/>
-          <p:cNvSpPr/>
-          <p:nvPr/>
-        </p:nvSpPr>
-        <p:spPr>
-          <a:xfrm>
-            <a:off x="731520" y="1097280"/>
-            <a:ext cx="7680960" cy="3200400"/>
-          </a:xfrm>
-          <a:prstGeom prst="rect">
-            <a:avLst/>
-          </a:prstGeom>
-          <a:noFill/>
-          <a:ln/>
-        </p:spPr>
-        <p:txBody>
-          <a:bodyPr wrap="square" rtlCol="0" anchor="ctr"/>
-          <a:lstStyle/>
-          <a:p>
-            <a:pPr indent="0" marL="0">
-              <a:buNone/>
-            </a:pPr>
-            <a:r>
-              <a:rPr lang="en-US" sz="1600" dirty="0">
-                <a:solidFill>
-                  <a:srgbClr val="363636"/>
-                </a:solidFill>
-                <a:latin typeface="Calibri" pitchFamily="34" charset="0"/>
-                <a:ea typeface="Calibri" pitchFamily="34" charset="-122"/>
-                <a:cs typeface="Calibri" pitchFamily="34" charset="-120"/>
-              </a:rPr>
-              <a:t>Content for: Space exploration recap</a:t>
-            </a:r>
-            <a:endParaRPr lang="en-US" sz="1600" dirty="0"/>
-          </a:p>
-          <a:p>
-            <a:pPr indent="0" marL="0">
-              <a:buNone/>
-            </a:pPr>
-            <a:endParaRPr lang="en-US" sz="1600" dirty="0"/>
-          </a:p>
-          <a:p>
-            <a:pPr indent="0" marL="0">
-              <a:buNone/>
-            </a:pPr>
-            <a:r>
-              <a:rPr lang="en-US" sz="1600" dirty="0">
-                <a:solidFill>
-                  <a:srgbClr val="363636"/>
-                </a:solidFill>
-                <a:latin typeface="Calibri" pitchFamily="34" charset="0"/>
-                <a:ea typeface="Calibri" pitchFamily="34" charset="-122"/>
-                <a:cs typeface="Calibri" pitchFamily="34" charset="-120"/>
-              </a:rPr>
-              <a:t>Key points will be covered in class.</a:t>
-            </a:r>
-            <a:endParaRPr lang="en-US" sz="1600" dirty="0"/>
-          </a:p>
-        </p:txBody>
-      </p:sp>
-      <p:sp>
-        <p:nvSpPr>
-          <p:cNvPr id="5" name="Text 3"/>
-          <p:cNvSpPr/>
-          <p:nvPr/>
-        </p:nvSpPr>
-        <p:spPr>
-          <a:xfrm>
-            <a:off x="7772400" y="4663440"/>
-            <a:ext cx="1097280" cy="365760"/>
-          </a:xfrm>
-          <a:prstGeom prst="rect">
-            <a:avLst/>
-          </a:prstGeom>
-          <a:noFill/>
-          <a:ln/>
-        </p:spPr>
-        <p:txBody>
-          <a:bodyPr wrap="square" rtlCol="0" anchor="ctr"/>
-          <a:lstStyle/>
-          <a:p>
-            <a:pPr algn="r" indent="0" marL="0">
-              <a:buNone/>
-            </a:pPr>
-            <a:r>
-              <a:rPr lang="en-US" sz="1000" dirty="0">
-                <a:solidFill>
-                  <a:srgbClr val="999999"/>
-                </a:solidFill>
-                <a:latin typeface="Calibri" pitchFamily="34" charset="0"/>
-                <a:ea typeface="Calibri" pitchFamily="34" charset="-122"/>
-                <a:cs typeface="Calibri" pitchFamily="34" charset="-120"/>
-              </a:rPr>
-              <a:t>6 / 6</a:t>
+              <a:t>mrzocchi.com</a:t>
             </a:r>
             <a:endParaRPr lang="en-US" sz="1000" dirty="0"/>
           </a:p>

--- a/static/ppts/G6_Sci_T5_Full_Revision.pptx
+++ b/static/ppts/G6_Sci_T5_Full_Revision.pptx
@@ -1170,7 +1170,7 @@
         </p:nvSpPr>
         <p:spPr>
           <a:xfrm>
-            <a:off x="731520" y="1280160"/>
+            <a:off x="731520" y="1097280"/>
             <a:ext cx="7772400" cy="1371600"/>
           </a:xfrm>
           <a:prstGeom prst="rect">
@@ -1187,7 +1187,7 @@
               <a:buNone/>
             </a:pPr>
             <a:r>
-              <a:rPr lang="en-US" sz="3600" b="1" dirty="0">
+              <a:rPr lang="en-US" sz="4000" b="1" dirty="0">
                 <a:solidFill>
                   <a:srgbClr val="FFFFFF"/>
                 </a:solidFill>
@@ -1197,7 +1197,7 @@
               </a:rPr>
               <a:t>Space Science — Full Revision</a:t>
             </a:r>
-            <a:endParaRPr lang="en-US" sz="3600" dirty="0"/>
+            <a:endParaRPr lang="en-US" sz="4000" dirty="0"/>
           </a:p>
         </p:txBody>
       </p:sp>
@@ -1209,7 +1209,7 @@
         </p:nvSpPr>
         <p:spPr>
           <a:xfrm>
-            <a:off x="731520" y="2743200"/>
+            <a:off x="731520" y="2560320"/>
             <a:ext cx="7772400" cy="548640"/>
           </a:xfrm>
           <a:prstGeom prst="rect">
@@ -1228,13 +1228,13 @@
             <a:r>
               <a:rPr lang="en-US" sz="1600" dirty="0">
                 <a:solidFill>
-                  <a:srgbClr val="9B9690"/>
+                  <a:srgbClr val="E9C46A"/>
                 </a:solidFill>
                 <a:latin typeface="Calibri" pitchFamily="34" charset="0"/>
                 <a:ea typeface="Calibri" pitchFamily="34" charset="-122"/>
                 <a:cs typeface="Calibri" pitchFamily="34" charset="-120"/>
               </a:rPr>
-              <a:t>G6 Science · Term 5 Review</a:t>
+              <a:t>Grade 6 Science · Mr Zocchi</a:t>
             </a:r>
             <a:endParaRPr lang="en-US" sz="1600" dirty="0"/>
           </a:p>
@@ -1242,14 +1242,36 @@
       </p:sp>
       <p:sp>
         <p:nvSpPr>
-          <p:cNvPr id="5" name="Text 3"/>
-          <p:cNvSpPr/>
-          <p:nvPr/>
-        </p:nvSpPr>
-        <p:spPr>
-          <a:xfrm>
-            <a:off x="731520" y="4389120"/>
-            <a:ext cx="7772400" cy="457200"/>
+          <p:cNvPr id="5" name="Shape 3"/>
+          <p:cNvSpPr/>
+          <p:nvPr/>
+        </p:nvSpPr>
+        <p:spPr>
+          <a:xfrm>
+            <a:off x="731520" y="3474720"/>
+            <a:ext cx="2011680" cy="411480"/>
+          </a:xfrm>
+          <a:prstGeom prst="roundRect">
+            <a:avLst>
+              <a:gd name="adj" fmla="val 17778"/>
+            </a:avLst>
+          </a:prstGeom>
+          <a:solidFill>
+            <a:srgbClr val="2A9D8F"/>
+          </a:solidFill>
+          <a:ln/>
+        </p:spPr>
+      </p:sp>
+      <p:sp>
+        <p:nvSpPr>
+          <p:cNvPr id="6" name="Text 4"/>
+          <p:cNvSpPr/>
+          <p:nvPr/>
+        </p:nvSpPr>
+        <p:spPr>
+          <a:xfrm>
+            <a:off x="731520" y="3474720"/>
+            <a:ext cx="2011680" cy="411480"/>
           </a:xfrm>
           <a:prstGeom prst="rect">
             <a:avLst/>
@@ -1261,21 +1283,21 @@
           <a:bodyPr wrap="square" rtlCol="0" anchor="ctr"/>
           <a:lstStyle/>
           <a:p>
-            <a:pPr indent="0" marL="0">
+            <a:pPr algn="ctr" indent="0" marL="0">
               <a:buNone/>
             </a:pPr>
             <a:r>
-              <a:rPr lang="en-US" sz="1000" dirty="0">
+              <a:rPr lang="en-US" sz="1200" b="1" dirty="0">
                 <a:solidFill>
-                  <a:srgbClr val="6B6660"/>
+                  <a:srgbClr val="FFFFFF"/>
                 </a:solidFill>
                 <a:latin typeface="Calibri" pitchFamily="34" charset="0"/>
                 <a:ea typeface="Calibri" pitchFamily="34" charset="-122"/>
                 <a:cs typeface="Calibri" pitchFamily="34" charset="-120"/>
               </a:rPr>
-              <a:t>Mr Zocchi · mrzocchi.com</a:t>
-            </a:r>
-            <a:endParaRPr lang="en-US" sz="1000" dirty="0"/>
+              <a:t>Term 5 · Space Science</a:t>
+            </a:r>
+            <a:endParaRPr lang="en-US" sz="1200" dirty="0"/>
           </a:p>
         </p:txBody>
       </p:sp>
@@ -1293,7 +1315,7 @@
     <p:bg>
       <p:bgPr>
         <a:solidFill>
-          <a:srgbClr val="FFFFFF"/>
+          <a:srgbClr val="FAF8F5"/>
         </a:solidFill>
       </p:bgPr>
     </p:bg>
@@ -1339,8 +1361,8 @@
         </p:nvSpPr>
         <p:spPr>
           <a:xfrm>
-            <a:off x="548640" y="274320"/>
-            <a:ext cx="8046720" cy="640080"/>
+            <a:off x="7772400" y="4709160"/>
+            <a:ext cx="1097280" cy="320040"/>
           </a:xfrm>
           <a:prstGeom prst="rect">
             <a:avLst/>
@@ -1349,7 +1371,46 @@
           <a:ln/>
         </p:spPr>
         <p:txBody>
-          <a:bodyPr wrap="square" lIns="0" tIns="0" rIns="0" bIns="0" rtlCol="0" anchor="ctr"/>
+          <a:bodyPr wrap="square" rtlCol="0" anchor="ctr"/>
+          <a:lstStyle/>
+          <a:p>
+            <a:pPr algn="r" indent="0" marL="0">
+              <a:buNone/>
+            </a:pPr>
+            <a:r>
+              <a:rPr lang="en-US" sz="900" dirty="0">
+                <a:solidFill>
+                  <a:srgbClr val="6B6660"/>
+                </a:solidFill>
+                <a:latin typeface="Calibri" pitchFamily="34" charset="0"/>
+                <a:ea typeface="Calibri" pitchFamily="34" charset="-122"/>
+                <a:cs typeface="Calibri" pitchFamily="34" charset="-120"/>
+              </a:rPr>
+              <a:t>2 / 4</a:t>
+            </a:r>
+            <a:endParaRPr lang="en-US" sz="900" dirty="0"/>
+          </a:p>
+        </p:txBody>
+      </p:sp>
+      <p:sp>
+        <p:nvSpPr>
+          <p:cNvPr id="4" name="Text 2"/>
+          <p:cNvSpPr/>
+          <p:nvPr/>
+        </p:nvSpPr>
+        <p:spPr>
+          <a:xfrm>
+            <a:off x="457200" y="274320"/>
+            <a:ext cx="8229600" cy="640080"/>
+          </a:xfrm>
+          <a:prstGeom prst="rect">
+            <a:avLst/>
+          </a:prstGeom>
+          <a:noFill/>
+          <a:ln/>
+        </p:spPr>
+        <p:txBody>
+          <a:bodyPr wrap="square" rtlCol="0" anchor="ctr"/>
           <a:lstStyle/>
           <a:p>
             <a:pPr indent="0" marL="0">
@@ -1364,7 +1425,7 @@
                 <a:ea typeface="Georgia" pitchFamily="34" charset="-122"/>
                 <a:cs typeface="Georgia" pitchFamily="34" charset="-120"/>
               </a:rPr>
-              <a:t>Solar System &amp; Earth-Moon-Sun</a:t>
+              <a:t>Solar System</a:t>
             </a:r>
             <a:endParaRPr lang="en-US" sz="2600" dirty="0"/>
           </a:p>
@@ -1372,14 +1433,66 @@
       </p:sp>
       <p:sp>
         <p:nvSpPr>
-          <p:cNvPr id="4" name="Text 2"/>
-          <p:cNvSpPr/>
-          <p:nvPr/>
-        </p:nvSpPr>
-        <p:spPr>
-          <a:xfrm>
-            <a:off x="548640" y="1097280"/>
-            <a:ext cx="8046720" cy="3474720"/>
+          <p:cNvPr id="5" name="Shape 3"/>
+          <p:cNvSpPr/>
+          <p:nvPr/>
+        </p:nvSpPr>
+        <p:spPr>
+          <a:xfrm>
+            <a:off x="457200" y="1188720"/>
+            <a:ext cx="2560320" cy="1828800"/>
+          </a:xfrm>
+          <a:prstGeom prst="rect">
+            <a:avLst/>
+          </a:prstGeom>
+          <a:solidFill>
+            <a:srgbClr val="FFFFFF"/>
+          </a:solidFill>
+          <a:ln w="12700">
+            <a:solidFill>
+              <a:srgbClr val="E5E2DC"/>
+            </a:solidFill>
+            <a:prstDash val="solid"/>
+          </a:ln>
+          <a:effectLst>
+            <a:outerShdw sx="100000" sy="100000" kx="0" ky="0" algn="bl" rotWithShape="0" blurRad="50800" dist="25400" dir="8100000">
+              <a:srgbClr val="000000">
+                <a:alpha val="10000"/>
+              </a:srgbClr>
+            </a:outerShdw>
+          </a:effectLst>
+        </p:spPr>
+      </p:sp>
+      <p:sp>
+        <p:nvSpPr>
+          <p:cNvPr id="6" name="Shape 4"/>
+          <p:cNvSpPr/>
+          <p:nvPr/>
+        </p:nvSpPr>
+        <p:spPr>
+          <a:xfrm>
+            <a:off x="457200" y="1188720"/>
+            <a:ext cx="2560320" cy="54864"/>
+          </a:xfrm>
+          <a:prstGeom prst="rect">
+            <a:avLst/>
+          </a:prstGeom>
+          <a:solidFill>
+            <a:srgbClr val="2A9D8F"/>
+          </a:solidFill>
+          <a:ln/>
+        </p:spPr>
+      </p:sp>
+      <p:sp>
+        <p:nvSpPr>
+          <p:cNvPr id="7" name="Text 5"/>
+          <p:cNvSpPr/>
+          <p:nvPr/>
+        </p:nvSpPr>
+        <p:spPr>
+          <a:xfrm>
+            <a:off x="594360" y="1325880"/>
+            <a:ext cx="2286000" cy="365760"/>
           </a:xfrm>
           <a:prstGeom prst="rect">
             <a:avLst/>
@@ -1388,18 +1501,53 @@
           <a:ln/>
         </p:spPr>
         <p:txBody>
+          <a:bodyPr wrap="square" rtlCol="0" anchor="ctr"/>
+          <a:lstStyle/>
+          <a:p>
+            <a:pPr indent="0" marL="0">
+              <a:buNone/>
+            </a:pPr>
+            <a:r>
+              <a:rPr lang="en-US" sz="1400" b="1" dirty="0">
+                <a:solidFill>
+                  <a:srgbClr val="1B2A4A"/>
+                </a:solidFill>
+                <a:latin typeface="Calibri" pitchFamily="34" charset="0"/>
+                <a:ea typeface="Calibri" pitchFamily="34" charset="-122"/>
+                <a:cs typeface="Calibri" pitchFamily="34" charset="-120"/>
+              </a:rPr>
+              <a:t>8 Planets</a:t>
+            </a:r>
+            <a:endParaRPr lang="en-US" sz="1400" dirty="0"/>
+          </a:p>
+        </p:txBody>
+      </p:sp>
+      <p:sp>
+        <p:nvSpPr>
+          <p:cNvPr id="8" name="Text 6"/>
+          <p:cNvSpPr/>
+          <p:nvPr/>
+        </p:nvSpPr>
+        <p:spPr>
+          <a:xfrm>
+            <a:off x="594360" y="1737360"/>
+            <a:ext cx="2286000" cy="1097280"/>
+          </a:xfrm>
+          <a:prstGeom prst="rect">
+            <a:avLst/>
+          </a:prstGeom>
+          <a:noFill/>
+          <a:ln/>
+        </p:spPr>
+        <p:txBody>
           <a:bodyPr wrap="square" rtlCol="0" anchor="t"/>
           <a:lstStyle/>
           <a:p>
-            <a:pPr marL="342900" indent="-342900">
-              <a:spcAft>
-                <a:spcPts val="800"/>
-              </a:spcAft>
-              <a:buSzPct val="100000"/>
-              <a:buChar char="•"/>
+            <a:pPr indent="0" marL="0">
+              <a:buNone/>
             </a:pPr>
             <a:r>
-              <a:rPr lang="en-US" sz="1500" dirty="0">
+              <a:rPr lang="en-US" sz="1100" dirty="0">
                 <a:solidFill>
                   <a:srgbClr val="3D3A36"/>
                 </a:solidFill>
@@ -1407,20 +1555,129 @@
                 <a:ea typeface="Calibri" pitchFamily="34" charset="-122"/>
                 <a:cs typeface="Calibri" pitchFamily="34" charset="-120"/>
               </a:rPr>
-              <a:t>8 planets: 4 inner (rocky) + 4 outer (gas giants)</a:t>
-            </a:r>
-            <a:endParaRPr lang="en-US" sz="1500" dirty="0"/>
-          </a:p>
-          <a:p>
-            <a:pPr marL="342900" indent="-342900">
-              <a:spcAft>
-                <a:spcPts val="800"/>
-              </a:spcAft>
-              <a:buSzPct val="100000"/>
-              <a:buChar char="•"/>
+              <a:t>Inner rocky: Mercury, Venus, Earth, Mars. Outer gas/ice: Jupiter, Saturn, Uranus, Neptune. Sun = 99.8% mass.</a:t>
+            </a:r>
+            <a:endParaRPr lang="en-US" sz="1100" dirty="0"/>
+          </a:p>
+        </p:txBody>
+      </p:sp>
+      <p:sp>
+        <p:nvSpPr>
+          <p:cNvPr id="9" name="Shape 7"/>
+          <p:cNvSpPr/>
+          <p:nvPr/>
+        </p:nvSpPr>
+        <p:spPr>
+          <a:xfrm>
+            <a:off x="3291840" y="1188720"/>
+            <a:ext cx="2560320" cy="1828800"/>
+          </a:xfrm>
+          <a:prstGeom prst="rect">
+            <a:avLst/>
+          </a:prstGeom>
+          <a:solidFill>
+            <a:srgbClr val="FFFFFF"/>
+          </a:solidFill>
+          <a:ln w="12700">
+            <a:solidFill>
+              <a:srgbClr val="E5E2DC"/>
+            </a:solidFill>
+            <a:prstDash val="solid"/>
+          </a:ln>
+          <a:effectLst>
+            <a:outerShdw sx="100000" sy="100000" kx="0" ky="0" algn="bl" rotWithShape="0" blurRad="50800" dist="25400" dir="8100000">
+              <a:srgbClr val="000000">
+                <a:alpha val="10000"/>
+              </a:srgbClr>
+            </a:outerShdw>
+          </a:effectLst>
+        </p:spPr>
+      </p:sp>
+      <p:sp>
+        <p:nvSpPr>
+          <p:cNvPr id="10" name="Shape 8"/>
+          <p:cNvSpPr/>
+          <p:nvPr/>
+        </p:nvSpPr>
+        <p:spPr>
+          <a:xfrm>
+            <a:off x="3291840" y="1188720"/>
+            <a:ext cx="2560320" cy="54864"/>
+          </a:xfrm>
+          <a:prstGeom prst="rect">
+            <a:avLst/>
+          </a:prstGeom>
+          <a:solidFill>
+            <a:srgbClr val="2A9D8F"/>
+          </a:solidFill>
+          <a:ln/>
+        </p:spPr>
+      </p:sp>
+      <p:sp>
+        <p:nvSpPr>
+          <p:cNvPr id="11" name="Text 9"/>
+          <p:cNvSpPr/>
+          <p:nvPr/>
+        </p:nvSpPr>
+        <p:spPr>
+          <a:xfrm>
+            <a:off x="3429000" y="1325880"/>
+            <a:ext cx="2286000" cy="365760"/>
+          </a:xfrm>
+          <a:prstGeom prst="rect">
+            <a:avLst/>
+          </a:prstGeom>
+          <a:noFill/>
+          <a:ln/>
+        </p:spPr>
+        <p:txBody>
+          <a:bodyPr wrap="square" rtlCol="0" anchor="ctr"/>
+          <a:lstStyle/>
+          <a:p>
+            <a:pPr indent="0" marL="0">
+              <a:buNone/>
             </a:pPr>
             <a:r>
-              <a:rPr lang="en-US" sz="1500" dirty="0">
+              <a:rPr lang="en-US" sz="1400" b="1" dirty="0">
+                <a:solidFill>
+                  <a:srgbClr val="1B2A4A"/>
+                </a:solidFill>
+                <a:latin typeface="Calibri" pitchFamily="34" charset="0"/>
+                <a:ea typeface="Calibri" pitchFamily="34" charset="-122"/>
+                <a:cs typeface="Calibri" pitchFamily="34" charset="-120"/>
+              </a:rPr>
+              <a:t>Earth-Sun-Moon</a:t>
+            </a:r>
+            <a:endParaRPr lang="en-US" sz="1400" dirty="0"/>
+          </a:p>
+        </p:txBody>
+      </p:sp>
+      <p:sp>
+        <p:nvSpPr>
+          <p:cNvPr id="12" name="Text 10"/>
+          <p:cNvSpPr/>
+          <p:nvPr/>
+        </p:nvSpPr>
+        <p:spPr>
+          <a:xfrm>
+            <a:off x="3429000" y="1737360"/>
+            <a:ext cx="2286000" cy="1097280"/>
+          </a:xfrm>
+          <a:prstGeom prst="rect">
+            <a:avLst/>
+          </a:prstGeom>
+          <a:noFill/>
+          <a:ln/>
+        </p:spPr>
+        <p:txBody>
+          <a:bodyPr wrap="square" rtlCol="0" anchor="t"/>
+          <a:lstStyle/>
+          <a:p>
+            <a:pPr indent="0" marL="0">
+              <a:buNone/>
+            </a:pPr>
+            <a:r>
+              <a:rPr lang="en-US" sz="1100" dirty="0">
                 <a:solidFill>
                   <a:srgbClr val="3D3A36"/>
                 </a:solidFill>
@@ -1428,20 +1685,129 @@
                 <a:ea typeface="Calibri" pitchFamily="34" charset="-122"/>
                 <a:cs typeface="Calibri" pitchFamily="34" charset="-120"/>
               </a:rPr>
-              <a:t>Earth orbits Sun (1 year), Moon orbits Earth (~28 days)</a:t>
-            </a:r>
-            <a:endParaRPr lang="en-US" sz="1500" dirty="0"/>
-          </a:p>
-          <a:p>
-            <a:pPr marL="342900" indent="-342900">
-              <a:spcAft>
-                <a:spcPts val="800"/>
-              </a:spcAft>
-              <a:buSzPct val="100000"/>
-              <a:buChar char="•"/>
+              <a:t>Earth orbits Sun (365.25 days). Moon orbits Earth (27.3 days). Moon phases: new→quarter→full→quarter (29.5 days).</a:t>
+            </a:r>
+            <a:endParaRPr lang="en-US" sz="1100" dirty="0"/>
+          </a:p>
+        </p:txBody>
+      </p:sp>
+      <p:sp>
+        <p:nvSpPr>
+          <p:cNvPr id="13" name="Shape 11"/>
+          <p:cNvSpPr/>
+          <p:nvPr/>
+        </p:nvSpPr>
+        <p:spPr>
+          <a:xfrm>
+            <a:off x="6126480" y="1188720"/>
+            <a:ext cx="2560320" cy="1828800"/>
+          </a:xfrm>
+          <a:prstGeom prst="rect">
+            <a:avLst/>
+          </a:prstGeom>
+          <a:solidFill>
+            <a:srgbClr val="FFFFFF"/>
+          </a:solidFill>
+          <a:ln w="12700">
+            <a:solidFill>
+              <a:srgbClr val="E5E2DC"/>
+            </a:solidFill>
+            <a:prstDash val="solid"/>
+          </a:ln>
+          <a:effectLst>
+            <a:outerShdw sx="100000" sy="100000" kx="0" ky="0" algn="bl" rotWithShape="0" blurRad="50800" dist="25400" dir="8100000">
+              <a:srgbClr val="000000">
+                <a:alpha val="10000"/>
+              </a:srgbClr>
+            </a:outerShdw>
+          </a:effectLst>
+        </p:spPr>
+      </p:sp>
+      <p:sp>
+        <p:nvSpPr>
+          <p:cNvPr id="14" name="Shape 12"/>
+          <p:cNvSpPr/>
+          <p:nvPr/>
+        </p:nvSpPr>
+        <p:spPr>
+          <a:xfrm>
+            <a:off x="6126480" y="1188720"/>
+            <a:ext cx="2560320" cy="54864"/>
+          </a:xfrm>
+          <a:prstGeom prst="rect">
+            <a:avLst/>
+          </a:prstGeom>
+          <a:solidFill>
+            <a:srgbClr val="2A9D8F"/>
+          </a:solidFill>
+          <a:ln/>
+        </p:spPr>
+      </p:sp>
+      <p:sp>
+        <p:nvSpPr>
+          <p:cNvPr id="15" name="Text 13"/>
+          <p:cNvSpPr/>
+          <p:nvPr/>
+        </p:nvSpPr>
+        <p:spPr>
+          <a:xfrm>
+            <a:off x="6263640" y="1325880"/>
+            <a:ext cx="2286000" cy="365760"/>
+          </a:xfrm>
+          <a:prstGeom prst="rect">
+            <a:avLst/>
+          </a:prstGeom>
+          <a:noFill/>
+          <a:ln/>
+        </p:spPr>
+        <p:txBody>
+          <a:bodyPr wrap="square" rtlCol="0" anchor="ctr"/>
+          <a:lstStyle/>
+          <a:p>
+            <a:pPr indent="0" marL="0">
+              <a:buNone/>
             </a:pPr>
             <a:r>
-              <a:rPr lang="en-US" sz="1500" dirty="0">
+              <a:rPr lang="en-US" sz="1400" b="1" dirty="0">
+                <a:solidFill>
+                  <a:srgbClr val="1B2A4A"/>
+                </a:solidFill>
+                <a:latin typeface="Calibri" pitchFamily="34" charset="0"/>
+                <a:ea typeface="Calibri" pitchFamily="34" charset="-122"/>
+                <a:cs typeface="Calibri" pitchFamily="34" charset="-120"/>
+              </a:rPr>
+              <a:t>Day, Night &amp; Seasons</a:t>
+            </a:r>
+            <a:endParaRPr lang="en-US" sz="1400" dirty="0"/>
+          </a:p>
+        </p:txBody>
+      </p:sp>
+      <p:sp>
+        <p:nvSpPr>
+          <p:cNvPr id="16" name="Text 14"/>
+          <p:cNvSpPr/>
+          <p:nvPr/>
+        </p:nvSpPr>
+        <p:spPr>
+          <a:xfrm>
+            <a:off x="6263640" y="1737360"/>
+            <a:ext cx="2286000" cy="1097280"/>
+          </a:xfrm>
+          <a:prstGeom prst="rect">
+            <a:avLst/>
+          </a:prstGeom>
+          <a:noFill/>
+          <a:ln/>
+        </p:spPr>
+        <p:txBody>
+          <a:bodyPr wrap="square" rtlCol="0" anchor="t"/>
+          <a:lstStyle/>
+          <a:p>
+            <a:pPr indent="0" marL="0">
+              <a:buNone/>
+            </a:pPr>
+            <a:r>
+              <a:rPr lang="en-US" sz="1100" dirty="0">
                 <a:solidFill>
                   <a:srgbClr val="3D3A36"/>
                 </a:solidFill>
@@ -1449,66 +1815,9 @@
                 <a:ea typeface="Calibri" pitchFamily="34" charset="-122"/>
                 <a:cs typeface="Calibri" pitchFamily="34" charset="-120"/>
               </a:rPr>
-              <a:t>Moon phases from changing angle of reflected sunlight</a:t>
-            </a:r>
-            <a:endParaRPr lang="en-US" sz="1500" dirty="0"/>
-          </a:p>
-          <a:p>
-            <a:pPr marL="342900" indent="-342900">
-              <a:spcAft>
-                <a:spcPts val="800"/>
-              </a:spcAft>
-              <a:buSzPct val="100000"/>
-              <a:buChar char="•"/>
-            </a:pPr>
-            <a:r>
-              <a:rPr lang="en-US" sz="1500" dirty="0">
-                <a:solidFill>
-                  <a:srgbClr val="3D3A36"/>
-                </a:solidFill>
-                <a:latin typeface="Calibri" pitchFamily="34" charset="0"/>
-                <a:ea typeface="Calibri" pitchFamily="34" charset="-122"/>
-                <a:cs typeface="Calibri" pitchFamily="34" charset="-120"/>
-              </a:rPr>
-              <a:t>The Moon is a satellite — reflects light, doesn't make its own</a:t>
-            </a:r>
-            <a:endParaRPr lang="en-US" sz="1500" dirty="0"/>
-          </a:p>
-        </p:txBody>
-      </p:sp>
-      <p:sp>
-        <p:nvSpPr>
-          <p:cNvPr id="5" name="Text 3"/>
-          <p:cNvSpPr/>
-          <p:nvPr/>
-        </p:nvSpPr>
-        <p:spPr>
-          <a:xfrm>
-            <a:off x="548640" y="4800600"/>
-            <a:ext cx="3657600" cy="274320"/>
-          </a:xfrm>
-          <a:prstGeom prst="rect">
-            <a:avLst/>
-          </a:prstGeom>
-          <a:noFill/>
-          <a:ln/>
-        </p:spPr>
-        <p:txBody>
-          <a:bodyPr wrap="square" rtlCol="0" anchor="ctr"/>
-          <a:lstStyle/>
-          <a:p>
-            <a:pPr indent="0" marL="0">
-              <a:buNone/>
-            </a:pPr>
-            <a:r>
-              <a:rPr lang="en-US" sz="800" dirty="0">
-                <a:solidFill>
-                  <a:srgbClr val="9B9690"/>
-                </a:solidFill>
-              </a:rPr>
-              <a:t>mrzocchi.com</a:t>
-            </a:r>
-            <a:endParaRPr lang="en-US" sz="800" dirty="0"/>
+              <a:t>Day/night: Earth rotates (24 hrs). Seasons: 23.5° tilt (NOT distance). Summer: tilt towards Sun. Opposite in each hemisphere.</a:t>
+            </a:r>
+            <a:endParaRPr lang="en-US" sz="1100" dirty="0"/>
           </a:p>
         </p:txBody>
       </p:sp>
@@ -1526,7 +1835,7 @@
     <p:bg>
       <p:bgPr>
         <a:solidFill>
-          <a:srgbClr val="FFFFFF"/>
+          <a:srgbClr val="FAF8F5"/>
         </a:solidFill>
       </p:bgPr>
     </p:bg>
@@ -1572,8 +1881,8 @@
         </p:nvSpPr>
         <p:spPr>
           <a:xfrm>
-            <a:off x="548640" y="274320"/>
-            <a:ext cx="8046720" cy="640080"/>
+            <a:off x="7772400" y="4709160"/>
+            <a:ext cx="1097280" cy="320040"/>
           </a:xfrm>
           <a:prstGeom prst="rect">
             <a:avLst/>
@@ -1582,7 +1891,46 @@
           <a:ln/>
         </p:spPr>
         <p:txBody>
-          <a:bodyPr wrap="square" lIns="0" tIns="0" rIns="0" bIns="0" rtlCol="0" anchor="ctr"/>
+          <a:bodyPr wrap="square" rtlCol="0" anchor="ctr"/>
+          <a:lstStyle/>
+          <a:p>
+            <a:pPr algn="r" indent="0" marL="0">
+              <a:buNone/>
+            </a:pPr>
+            <a:r>
+              <a:rPr lang="en-US" sz="900" dirty="0">
+                <a:solidFill>
+                  <a:srgbClr val="6B6660"/>
+                </a:solidFill>
+                <a:latin typeface="Calibri" pitchFamily="34" charset="0"/>
+                <a:ea typeface="Calibri" pitchFamily="34" charset="-122"/>
+                <a:cs typeface="Calibri" pitchFamily="34" charset="-120"/>
+              </a:rPr>
+              <a:t>3 / 4</a:t>
+            </a:r>
+            <a:endParaRPr lang="en-US" sz="900" dirty="0"/>
+          </a:p>
+        </p:txBody>
+      </p:sp>
+      <p:sp>
+        <p:nvSpPr>
+          <p:cNvPr id="4" name="Text 2"/>
+          <p:cNvSpPr/>
+          <p:nvPr/>
+        </p:nvSpPr>
+        <p:spPr>
+          <a:xfrm>
+            <a:off x="457200" y="274320"/>
+            <a:ext cx="8229600" cy="640080"/>
+          </a:xfrm>
+          <a:prstGeom prst="rect">
+            <a:avLst/>
+          </a:prstGeom>
+          <a:noFill/>
+          <a:ln/>
+        </p:spPr>
+        <p:txBody>
+          <a:bodyPr wrap="square" rtlCol="0" anchor="ctr"/>
           <a:lstStyle/>
           <a:p>
             <a:pPr indent="0" marL="0">
@@ -1597,7 +1945,7 @@
                 <a:ea typeface="Georgia" pitchFamily="34" charset="-122"/>
                 <a:cs typeface="Georgia" pitchFamily="34" charset="-120"/>
               </a:rPr>
-              <a:t>Seasons, Day &amp; Night</a:t>
+              <a:t>Space Exploration</a:t>
             </a:r>
             <a:endParaRPr lang="en-US" sz="2600" dirty="0"/>
           </a:p>
@@ -1605,14 +1953,66 @@
       </p:sp>
       <p:sp>
         <p:nvSpPr>
-          <p:cNvPr id="4" name="Text 2"/>
-          <p:cNvSpPr/>
-          <p:nvPr/>
-        </p:nvSpPr>
-        <p:spPr>
-          <a:xfrm>
-            <a:off x="548640" y="1097280"/>
-            <a:ext cx="8046720" cy="3474720"/>
+          <p:cNvPr id="5" name="Shape 3"/>
+          <p:cNvSpPr/>
+          <p:nvPr/>
+        </p:nvSpPr>
+        <p:spPr>
+          <a:xfrm>
+            <a:off x="457200" y="1188720"/>
+            <a:ext cx="2560320" cy="1828800"/>
+          </a:xfrm>
+          <a:prstGeom prst="rect">
+            <a:avLst/>
+          </a:prstGeom>
+          <a:solidFill>
+            <a:srgbClr val="FFFFFF"/>
+          </a:solidFill>
+          <a:ln w="12700">
+            <a:solidFill>
+              <a:srgbClr val="E5E2DC"/>
+            </a:solidFill>
+            <a:prstDash val="solid"/>
+          </a:ln>
+          <a:effectLst>
+            <a:outerShdw sx="100000" sy="100000" kx="0" ky="0" algn="bl" rotWithShape="0" blurRad="50800" dist="25400" dir="8100000">
+              <a:srgbClr val="000000">
+                <a:alpha val="10000"/>
+              </a:srgbClr>
+            </a:outerShdw>
+          </a:effectLst>
+        </p:spPr>
+      </p:sp>
+      <p:sp>
+        <p:nvSpPr>
+          <p:cNvPr id="6" name="Shape 4"/>
+          <p:cNvSpPr/>
+          <p:nvPr/>
+        </p:nvSpPr>
+        <p:spPr>
+          <a:xfrm>
+            <a:off x="457200" y="1188720"/>
+            <a:ext cx="2560320" cy="54864"/>
+          </a:xfrm>
+          <a:prstGeom prst="rect">
+            <a:avLst/>
+          </a:prstGeom>
+          <a:solidFill>
+            <a:srgbClr val="2A9D8F"/>
+          </a:solidFill>
+          <a:ln/>
+        </p:spPr>
+      </p:sp>
+      <p:sp>
+        <p:nvSpPr>
+          <p:cNvPr id="7" name="Text 5"/>
+          <p:cNvSpPr/>
+          <p:nvPr/>
+        </p:nvSpPr>
+        <p:spPr>
+          <a:xfrm>
+            <a:off x="594360" y="1325880"/>
+            <a:ext cx="2286000" cy="365760"/>
           </a:xfrm>
           <a:prstGeom prst="rect">
             <a:avLst/>
@@ -1621,18 +2021,53 @@
           <a:ln/>
         </p:spPr>
         <p:txBody>
+          <a:bodyPr wrap="square" rtlCol="0" anchor="ctr"/>
+          <a:lstStyle/>
+          <a:p>
+            <a:pPr indent="0" marL="0">
+              <a:buNone/>
+            </a:pPr>
+            <a:r>
+              <a:rPr lang="en-US" sz="1400" b="1" dirty="0">
+                <a:solidFill>
+                  <a:srgbClr val="1B2A4A"/>
+                </a:solidFill>
+                <a:latin typeface="Calibri" pitchFamily="34" charset="0"/>
+                <a:ea typeface="Calibri" pitchFamily="34" charset="-122"/>
+                <a:cs typeface="Calibri" pitchFamily="34" charset="-120"/>
+              </a:rPr>
+              <a:t>Milestones</a:t>
+            </a:r>
+            <a:endParaRPr lang="en-US" sz="1400" dirty="0"/>
+          </a:p>
+        </p:txBody>
+      </p:sp>
+      <p:sp>
+        <p:nvSpPr>
+          <p:cNvPr id="8" name="Text 6"/>
+          <p:cNvSpPr/>
+          <p:nvPr/>
+        </p:nvSpPr>
+        <p:spPr>
+          <a:xfrm>
+            <a:off x="594360" y="1737360"/>
+            <a:ext cx="2286000" cy="1097280"/>
+          </a:xfrm>
+          <a:prstGeom prst="rect">
+            <a:avLst/>
+          </a:prstGeom>
+          <a:noFill/>
+          <a:ln/>
+        </p:spPr>
+        <p:txBody>
           <a:bodyPr wrap="square" rtlCol="0" anchor="t"/>
           <a:lstStyle/>
           <a:p>
-            <a:pPr marL="342900" indent="-342900">
-              <a:spcAft>
-                <a:spcPts val="800"/>
-              </a:spcAft>
-              <a:buSzPct val="100000"/>
-              <a:buChar char="•"/>
+            <a:pPr indent="0" marL="0">
+              <a:buNone/>
             </a:pPr>
             <a:r>
-              <a:rPr lang="en-US" sz="1500" dirty="0">
+              <a:rPr lang="en-US" sz="1100" dirty="0">
                 <a:solidFill>
                   <a:srgbClr val="3D3A36"/>
                 </a:solidFill>
@@ -1640,20 +2075,129 @@
                 <a:ea typeface="Calibri" pitchFamily="34" charset="-122"/>
                 <a:cs typeface="Calibri" pitchFamily="34" charset="-120"/>
               </a:rPr>
-              <a:t>Seasons caused by Earth's 23.5° axial tilt (NOT distance from Sun)</a:t>
-            </a:r>
-            <a:endParaRPr lang="en-US" sz="1500" dirty="0"/>
-          </a:p>
-          <a:p>
-            <a:pPr marL="342900" indent="-342900">
-              <a:spcAft>
-                <a:spcPts val="800"/>
-              </a:spcAft>
-              <a:buSzPct val="100000"/>
-              <a:buChar char="•"/>
+              <a:t>Sputnik 1957. Moon landing 1969. ISS 1998–present. James Webb telescope 2022.</a:t>
+            </a:r>
+            <a:endParaRPr lang="en-US" sz="1100" dirty="0"/>
+          </a:p>
+        </p:txBody>
+      </p:sp>
+      <p:sp>
+        <p:nvSpPr>
+          <p:cNvPr id="9" name="Shape 7"/>
+          <p:cNvSpPr/>
+          <p:nvPr/>
+        </p:nvSpPr>
+        <p:spPr>
+          <a:xfrm>
+            <a:off x="3291840" y="1188720"/>
+            <a:ext cx="2560320" cy="1828800"/>
+          </a:xfrm>
+          <a:prstGeom prst="rect">
+            <a:avLst/>
+          </a:prstGeom>
+          <a:solidFill>
+            <a:srgbClr val="FFFFFF"/>
+          </a:solidFill>
+          <a:ln w="12700">
+            <a:solidFill>
+              <a:srgbClr val="E5E2DC"/>
+            </a:solidFill>
+            <a:prstDash val="solid"/>
+          </a:ln>
+          <a:effectLst>
+            <a:outerShdw sx="100000" sy="100000" kx="0" ky="0" algn="bl" rotWithShape="0" blurRad="50800" dist="25400" dir="8100000">
+              <a:srgbClr val="000000">
+                <a:alpha val="10000"/>
+              </a:srgbClr>
+            </a:outerShdw>
+          </a:effectLst>
+        </p:spPr>
+      </p:sp>
+      <p:sp>
+        <p:nvSpPr>
+          <p:cNvPr id="10" name="Shape 8"/>
+          <p:cNvSpPr/>
+          <p:nvPr/>
+        </p:nvSpPr>
+        <p:spPr>
+          <a:xfrm>
+            <a:off x="3291840" y="1188720"/>
+            <a:ext cx="2560320" cy="54864"/>
+          </a:xfrm>
+          <a:prstGeom prst="rect">
+            <a:avLst/>
+          </a:prstGeom>
+          <a:solidFill>
+            <a:srgbClr val="2A9D8F"/>
+          </a:solidFill>
+          <a:ln/>
+        </p:spPr>
+      </p:sp>
+      <p:sp>
+        <p:nvSpPr>
+          <p:cNvPr id="11" name="Text 9"/>
+          <p:cNvSpPr/>
+          <p:nvPr/>
+        </p:nvSpPr>
+        <p:spPr>
+          <a:xfrm>
+            <a:off x="3429000" y="1325880"/>
+            <a:ext cx="2286000" cy="365760"/>
+          </a:xfrm>
+          <a:prstGeom prst="rect">
+            <a:avLst/>
+          </a:prstGeom>
+          <a:noFill/>
+          <a:ln/>
+        </p:spPr>
+        <p:txBody>
+          <a:bodyPr wrap="square" rtlCol="0" anchor="ctr"/>
+          <a:lstStyle/>
+          <a:p>
+            <a:pPr indent="0" marL="0">
+              <a:buNone/>
             </a:pPr>
             <a:r>
-              <a:rPr lang="en-US" sz="1500" dirty="0">
+              <a:rPr lang="en-US" sz="1400" b="1" dirty="0">
+                <a:solidFill>
+                  <a:srgbClr val="1B2A4A"/>
+                </a:solidFill>
+                <a:latin typeface="Calibri" pitchFamily="34" charset="0"/>
+                <a:ea typeface="Calibri" pitchFamily="34" charset="-122"/>
+                <a:cs typeface="Calibri" pitchFamily="34" charset="-120"/>
+              </a:rPr>
+              <a:t>How We Explore</a:t>
+            </a:r>
+            <a:endParaRPr lang="en-US" sz="1400" dirty="0"/>
+          </a:p>
+        </p:txBody>
+      </p:sp>
+      <p:sp>
+        <p:nvSpPr>
+          <p:cNvPr id="12" name="Text 10"/>
+          <p:cNvSpPr/>
+          <p:nvPr/>
+        </p:nvSpPr>
+        <p:spPr>
+          <a:xfrm>
+            <a:off x="3429000" y="1737360"/>
+            <a:ext cx="2286000" cy="1097280"/>
+          </a:xfrm>
+          <a:prstGeom prst="rect">
+            <a:avLst/>
+          </a:prstGeom>
+          <a:noFill/>
+          <a:ln/>
+        </p:spPr>
+        <p:txBody>
+          <a:bodyPr wrap="square" rtlCol="0" anchor="t"/>
+          <a:lstStyle/>
+          <a:p>
+            <a:pPr indent="0" marL="0">
+              <a:buNone/>
+            </a:pPr>
+            <a:r>
+              <a:rPr lang="en-US" sz="1100" dirty="0">
                 <a:solidFill>
                   <a:srgbClr val="3D3A36"/>
                 </a:solidFill>
@@ -1661,20 +2205,129 @@
                 <a:ea typeface="Calibri" pitchFamily="34" charset="-122"/>
                 <a:cs typeface="Calibri" pitchFamily="34" charset="-120"/>
               </a:rPr>
-              <a:t>Day/night caused by Earth rotating every 24 hours</a:t>
-            </a:r>
-            <a:endParaRPr lang="en-US" sz="1500" dirty="0"/>
-          </a:p>
-          <a:p>
-            <a:pPr marL="342900" indent="-342900">
-              <a:spcAft>
-                <a:spcPts val="800"/>
-              </a:spcAft>
-              <a:buSzPct val="100000"/>
-              <a:buChar char="•"/>
+              <a:t>Telescopes, probes, rovers, satellites, crewed missions. Each has different capabilities and limitations.</a:t>
+            </a:r>
+            <a:endParaRPr lang="en-US" sz="1100" dirty="0"/>
+          </a:p>
+        </p:txBody>
+      </p:sp>
+      <p:sp>
+        <p:nvSpPr>
+          <p:cNvPr id="13" name="Shape 11"/>
+          <p:cNvSpPr/>
+          <p:nvPr/>
+        </p:nvSpPr>
+        <p:spPr>
+          <a:xfrm>
+            <a:off x="6126480" y="1188720"/>
+            <a:ext cx="2560320" cy="1828800"/>
+          </a:xfrm>
+          <a:prstGeom prst="rect">
+            <a:avLst/>
+          </a:prstGeom>
+          <a:solidFill>
+            <a:srgbClr val="FFFFFF"/>
+          </a:solidFill>
+          <a:ln w="12700">
+            <a:solidFill>
+              <a:srgbClr val="E5E2DC"/>
+            </a:solidFill>
+            <a:prstDash val="solid"/>
+          </a:ln>
+          <a:effectLst>
+            <a:outerShdw sx="100000" sy="100000" kx="0" ky="0" algn="bl" rotWithShape="0" blurRad="50800" dist="25400" dir="8100000">
+              <a:srgbClr val="000000">
+                <a:alpha val="10000"/>
+              </a:srgbClr>
+            </a:outerShdw>
+          </a:effectLst>
+        </p:spPr>
+      </p:sp>
+      <p:sp>
+        <p:nvSpPr>
+          <p:cNvPr id="14" name="Shape 12"/>
+          <p:cNvSpPr/>
+          <p:nvPr/>
+        </p:nvSpPr>
+        <p:spPr>
+          <a:xfrm>
+            <a:off x="6126480" y="1188720"/>
+            <a:ext cx="2560320" cy="54864"/>
+          </a:xfrm>
+          <a:prstGeom prst="rect">
+            <a:avLst/>
+          </a:prstGeom>
+          <a:solidFill>
+            <a:srgbClr val="2A9D8F"/>
+          </a:solidFill>
+          <a:ln/>
+        </p:spPr>
+      </p:sp>
+      <p:sp>
+        <p:nvSpPr>
+          <p:cNvPr id="15" name="Text 13"/>
+          <p:cNvSpPr/>
+          <p:nvPr/>
+        </p:nvSpPr>
+        <p:spPr>
+          <a:xfrm>
+            <a:off x="6263640" y="1325880"/>
+            <a:ext cx="2286000" cy="365760"/>
+          </a:xfrm>
+          <a:prstGeom prst="rect">
+            <a:avLst/>
+          </a:prstGeom>
+          <a:noFill/>
+          <a:ln/>
+        </p:spPr>
+        <p:txBody>
+          <a:bodyPr wrap="square" rtlCol="0" anchor="ctr"/>
+          <a:lstStyle/>
+          <a:p>
+            <a:pPr indent="0" marL="0">
+              <a:buNone/>
             </a:pPr>
             <a:r>
-              <a:rPr lang="en-US" sz="1500" dirty="0">
+              <a:rPr lang="en-US" sz="1400" b="1" dirty="0">
+                <a:solidFill>
+                  <a:srgbClr val="1B2A4A"/>
+                </a:solidFill>
+                <a:latin typeface="Calibri" pitchFamily="34" charset="0"/>
+                <a:ea typeface="Calibri" pitchFamily="34" charset="-122"/>
+                <a:cs typeface="Calibri" pitchFamily="34" charset="-120"/>
+              </a:rPr>
+              <a:t>Future</a:t>
+            </a:r>
+            <a:endParaRPr lang="en-US" sz="1400" dirty="0"/>
+          </a:p>
+        </p:txBody>
+      </p:sp>
+      <p:sp>
+        <p:nvSpPr>
+          <p:cNvPr id="16" name="Text 14"/>
+          <p:cNvSpPr/>
+          <p:nvPr/>
+        </p:nvSpPr>
+        <p:spPr>
+          <a:xfrm>
+            <a:off x="6263640" y="1737360"/>
+            <a:ext cx="2286000" cy="1097280"/>
+          </a:xfrm>
+          <a:prstGeom prst="rect">
+            <a:avLst/>
+          </a:prstGeom>
+          <a:noFill/>
+          <a:ln/>
+        </p:spPr>
+        <p:txBody>
+          <a:bodyPr wrap="square" rtlCol="0" anchor="t"/>
+          <a:lstStyle/>
+          <a:p>
+            <a:pPr indent="0" marL="0">
+              <a:buNone/>
+            </a:pPr>
+            <a:r>
+              <a:rPr lang="en-US" sz="1100" dirty="0">
                 <a:solidFill>
                   <a:srgbClr val="3D3A36"/>
                 </a:solidFill>
@@ -1682,66 +2335,9 @@
                 <a:ea typeface="Calibri" pitchFamily="34" charset="-122"/>
                 <a:cs typeface="Calibri" pitchFamily="34" charset="-120"/>
               </a:rPr>
-              <a:t>Summer: hemisphere tilts toward Sun, longer days, more direct light</a:t>
-            </a:r>
-            <a:endParaRPr lang="en-US" sz="1500" dirty="0"/>
-          </a:p>
-          <a:p>
-            <a:pPr marL="342900" indent="-342900">
-              <a:spcAft>
-                <a:spcPts val="800"/>
-              </a:spcAft>
-              <a:buSzPct val="100000"/>
-              <a:buChar char="•"/>
-            </a:pPr>
-            <a:r>
-              <a:rPr lang="en-US" sz="1500" dirty="0">
-                <a:solidFill>
-                  <a:srgbClr val="3D3A36"/>
-                </a:solidFill>
-                <a:latin typeface="Calibri" pitchFamily="34" charset="0"/>
-                <a:ea typeface="Calibri" pitchFamily="34" charset="-122"/>
-                <a:cs typeface="Calibri" pitchFamily="34" charset="-120"/>
-              </a:rPr>
-              <a:t>Time zones exist because Earth rotates and places face Sun at different times</a:t>
-            </a:r>
-            <a:endParaRPr lang="en-US" sz="1500" dirty="0"/>
-          </a:p>
-        </p:txBody>
-      </p:sp>
-      <p:sp>
-        <p:nvSpPr>
-          <p:cNvPr id="5" name="Text 3"/>
-          <p:cNvSpPr/>
-          <p:nvPr/>
-        </p:nvSpPr>
-        <p:spPr>
-          <a:xfrm>
-            <a:off x="548640" y="4800600"/>
-            <a:ext cx="3657600" cy="274320"/>
-          </a:xfrm>
-          <a:prstGeom prst="rect">
-            <a:avLst/>
-          </a:prstGeom>
-          <a:noFill/>
-          <a:ln/>
-        </p:spPr>
-        <p:txBody>
-          <a:bodyPr wrap="square" rtlCol="0" anchor="ctr"/>
-          <a:lstStyle/>
-          <a:p>
-            <a:pPr indent="0" marL="0">
-              <a:buNone/>
-            </a:pPr>
-            <a:r>
-              <a:rPr lang="en-US" sz="800" dirty="0">
-                <a:solidFill>
-                  <a:srgbClr val="9B9690"/>
-                </a:solidFill>
-              </a:rPr>
-              <a:t>mrzocchi.com</a:t>
-            </a:r>
-            <a:endParaRPr lang="en-US" sz="800" dirty="0"/>
+              <a:t>Artemis: Moon return. Mars missions 2030s. Reusable rockets. Search for extraterrestrial life.</a:t>
+            </a:r>
+            <a:endParaRPr lang="en-US" sz="1100" dirty="0"/>
           </a:p>
         </p:txBody>
       </p:sp>
@@ -1786,13 +2382,13 @@
         <p:spPr>
           <a:xfrm>
             <a:off x="0" y="0"/>
-            <a:ext cx="9144000" cy="54864"/>
-          </a:xfrm>
-          <a:prstGeom prst="rect">
-            <a:avLst/>
-          </a:prstGeom>
-          <a:solidFill>
-            <a:srgbClr val="2A9D8F"/>
+            <a:ext cx="109728" cy="5143500"/>
+          </a:xfrm>
+          <a:prstGeom prst="rect">
+            <a:avLst/>
+          </a:prstGeom>
+          <a:solidFill>
+            <a:srgbClr val="E9C46A"/>
           </a:solidFill>
           <a:ln/>
         </p:spPr>
@@ -1805,8 +2401,8 @@
         </p:nvSpPr>
         <p:spPr>
           <a:xfrm>
-            <a:off x="548640" y="457200"/>
-            <a:ext cx="8046720" cy="640080"/>
+            <a:off x="731520" y="457200"/>
+            <a:ext cx="7772400" cy="731520"/>
           </a:xfrm>
           <a:prstGeom prst="rect">
             <a:avLst/>
@@ -1822,7 +2418,7 @@
               <a:buNone/>
             </a:pPr>
             <a:r>
-              <a:rPr lang="en-US" sz="2800" b="1" dirty="0">
+              <a:rPr lang="en-US" sz="3200" b="1" dirty="0">
                 <a:solidFill>
                   <a:srgbClr val="FFFFFF"/>
                 </a:solidFill>
@@ -1832,7 +2428,7 @@
               </a:rPr>
               <a:t>Key Takeaways</a:t>
             </a:r>
-            <a:endParaRPr lang="en-US" sz="2800" dirty="0"/>
+            <a:endParaRPr lang="en-US" sz="3200" dirty="0"/>
           </a:p>
         </p:txBody>
       </p:sp>
@@ -1844,8 +2440,8 @@
         </p:nvSpPr>
         <p:spPr>
           <a:xfrm>
-            <a:off x="731520" y="1371600"/>
-            <a:ext cx="7680960" cy="3200400"/>
+            <a:off x="731520" y="1463040"/>
+            <a:ext cx="7772400" cy="3200400"/>
           </a:xfrm>
           <a:prstGeom prst="rect">
             <a:avLst/>
@@ -1865,7 +2461,7 @@
               <a:buChar char="•"/>
             </a:pPr>
             <a:r>
-              <a:rPr lang="en-US" sz="1600" dirty="0">
+              <a:rPr lang="en-US" sz="1500" dirty="0">
                 <a:solidFill>
                   <a:srgbClr val="CADCFC"/>
                 </a:solidFill>
@@ -1873,9 +2469,9 @@
                 <a:ea typeface="Calibri" pitchFamily="34" charset="-122"/>
                 <a:cs typeface="Calibri" pitchFamily="34" charset="-120"/>
               </a:rPr>
-              <a:t>Solar system: 8 planets orbiting the Sun</a:t>
-            </a:r>
-            <a:endParaRPr lang="en-US" sz="1600" dirty="0"/>
+              <a:t>8 planets: 4 inner rocky, 4 outer gas/ice giants</a:t>
+            </a:r>
+            <a:endParaRPr lang="en-US" sz="1500" dirty="0"/>
           </a:p>
           <a:p>
             <a:pPr marL="342900" indent="-342900">
@@ -1886,7 +2482,7 @@
               <a:buChar char="•"/>
             </a:pPr>
             <a:r>
-              <a:rPr lang="en-US" sz="1600" dirty="0">
+              <a:rPr lang="en-US" sz="1500" dirty="0">
                 <a:solidFill>
                   <a:srgbClr val="CADCFC"/>
                 </a:solidFill>
@@ -1894,9 +2490,9 @@
                 <a:ea typeface="Calibri" pitchFamily="34" charset="-122"/>
                 <a:cs typeface="Calibri" pitchFamily="34" charset="-120"/>
               </a:rPr>
-              <a:t>Axial tilt → seasons; rotation → day/night</a:t>
-            </a:r>
-            <a:endParaRPr lang="en-US" sz="1600" dirty="0"/>
+              <a:t>Day/night = rotation (24h); seasons = tilt (23.5°), NOT distance</a:t>
+            </a:r>
+            <a:endParaRPr lang="en-US" sz="1500" dirty="0"/>
           </a:p>
           <a:p>
             <a:pPr marL="342900" indent="-342900">
@@ -1907,7 +2503,7 @@
               <a:buChar char="•"/>
             </a:pPr>
             <a:r>
-              <a:rPr lang="en-US" sz="1600" dirty="0">
+              <a:rPr lang="en-US" sz="1500" dirty="0">
                 <a:solidFill>
                   <a:srgbClr val="CADCFC"/>
                 </a:solidFill>
@@ -1915,9 +2511,9 @@
                 <a:ea typeface="Calibri" pitchFamily="34" charset="-122"/>
                 <a:cs typeface="Calibri" pitchFamily="34" charset="-120"/>
               </a:rPr>
-              <a:t>Space exploration: telescopes, satellites, probes, rovers</a:t>
-            </a:r>
-            <a:endParaRPr lang="en-US" sz="1600" dirty="0"/>
+              <a:t>Moon phases cycle every 29.5 days</a:t>
+            </a:r>
+            <a:endParaRPr lang="en-US" sz="1500" dirty="0"/>
           </a:p>
           <a:p>
             <a:pPr marL="342900" indent="-342900">
@@ -1928,7 +2524,7 @@
               <a:buChar char="•"/>
             </a:pPr>
             <a:r>
-              <a:rPr lang="en-US" sz="1600" dirty="0">
+              <a:rPr lang="en-US" sz="1500" dirty="0">
                 <a:solidFill>
                   <a:srgbClr val="CADCFC"/>
                 </a:solidFill>
@@ -1936,9 +2532,30 @@
                 <a:ea typeface="Calibri" pitchFamily="34" charset="-122"/>
                 <a:cs typeface="Calibri" pitchFamily="34" charset="-120"/>
               </a:rPr>
-              <a:t>Key milestones: Sputnik, Moon landing, ISS, Mars rovers</a:t>
-            </a:r>
-            <a:endParaRPr lang="en-US" sz="1600" dirty="0"/>
+              <a:t>Space milestones: Sputnik, Apollo 11, ISS, JWST</a:t>
+            </a:r>
+            <a:endParaRPr lang="en-US" sz="1500" dirty="0"/>
+          </a:p>
+          <a:p>
+            <a:pPr marL="342900" indent="-342900">
+              <a:spcAft>
+                <a:spcPts val="1000"/>
+              </a:spcAft>
+              <a:buSzPct val="100000"/>
+              <a:buChar char="•"/>
+            </a:pPr>
+            <a:r>
+              <a:rPr lang="en-US" sz="1500" dirty="0">
+                <a:solidFill>
+                  <a:srgbClr val="CADCFC"/>
+                </a:solidFill>
+                <a:latin typeface="Calibri" pitchFamily="34" charset="0"/>
+                <a:ea typeface="Calibri" pitchFamily="34" charset="-122"/>
+                <a:cs typeface="Calibri" pitchFamily="34" charset="-120"/>
+              </a:rPr>
+              <a:t>Future: Artemis Moon missions, Mars in 2030s, search for life</a:t>
+            </a:r>
+            <a:endParaRPr lang="en-US" sz="1500" dirty="0"/>
           </a:p>
         </p:txBody>
       </p:sp>
@@ -1950,8 +2567,8 @@
         </p:nvSpPr>
         <p:spPr>
           <a:xfrm>
-            <a:off x="548640" y="4572000"/>
-            <a:ext cx="3657600" cy="274320"/>
+            <a:off x="731520" y="4572000"/>
+            <a:ext cx="7772400" cy="365760"/>
           </a:xfrm>
           <a:prstGeom prst="rect">
             <a:avLst/>
@@ -1967,14 +2584,17 @@
               <a:buNone/>
             </a:pPr>
             <a:r>
-              <a:rPr lang="en-US" sz="1000" dirty="0">
+              <a:rPr lang="en-US" sz="1100" dirty="0">
                 <a:solidFill>
-                  <a:srgbClr val="6B6660"/>
+                  <a:srgbClr val="E9C46A"/>
                 </a:solidFill>
+                <a:latin typeface="Calibri" pitchFamily="34" charset="0"/>
+                <a:ea typeface="Calibri" pitchFamily="34" charset="-122"/>
+                <a:cs typeface="Calibri" pitchFamily="34" charset="-120"/>
               </a:rPr>
               <a:t>mrzocchi.com</a:t>
             </a:r>
-            <a:endParaRPr lang="en-US" sz="1000" dirty="0"/>
+            <a:endParaRPr lang="en-US" sz="1100" dirty="0"/>
           </a:p>
         </p:txBody>
       </p:sp>

--- a/static/ppts/G6_Sci_T5_Full_Revision.pptx
+++ b/static/ppts/G6_Sci_T5_Full_Revision.pptx
@@ -9,9 +9,14 @@
     <p:sldId id="257" r:id="rId3"/>
     <p:sldId id="258" r:id="rId4"/>
     <p:sldId id="259" r:id="rId5"/>
+    <p:sldId id="260" r:id="rId6"/>
+    <p:sldId id="261" r:id="rId7"/>
+    <p:sldId id="262" r:id="rId8"/>
+    <p:sldId id="263" r:id="rId9"/>
+    <p:sldId id="264" r:id="rId10"/>
   </p:sldIdLst>
   <p:notesMasterIdLst>
-    <p:notesMasterId r:id="rId6"/>
+    <p:notesMasterId r:id="rId11"/>
   </p:notesMasterIdLst>
   <p:sldSz cx="9144000" cy="5143500"/>
   <p:notesSz cx="5143500" cy="9144000"/>
@@ -811,6 +816,446 @@
 </p:notes>
 </file>
 
+<file path=ppt/notesSlides/notesSlide5.xml><?xml version="1.0" encoding="utf-8"?>
+<p:notes xmlns:a="http://schemas.openxmlformats.org/drawingml/2006/main" xmlns:r="http://schemas.openxmlformats.org/officeDocument/2006/relationships" xmlns:p="http://schemas.openxmlformats.org/presentationml/2006/main">
+  <p:cSld>
+    <p:spTree>
+      <p:nvGrpSpPr>
+        <p:cNvPr id="1" name=""/>
+        <p:cNvGrpSpPr/>
+        <p:nvPr/>
+      </p:nvGrpSpPr>
+      <p:grpSpPr>
+        <a:xfrm>
+          <a:off x="0" y="0"/>
+          <a:ext cx="0" cy="0"/>
+          <a:chOff x="0" y="0"/>
+          <a:chExt cx="0" cy="0"/>
+        </a:xfrm>
+      </p:grpSpPr>
+      <p:sp>
+        <p:nvSpPr>
+          <p:cNvPr id="2" name="Slide Image Placeholder 1"/>
+          <p:cNvSpPr>
+            <a:spLocks noGrp="1" noRot="1" noChangeAspect="1"/>
+          </p:cNvSpPr>
+          <p:nvPr>
+            <p:ph type="sldImg"/>
+          </p:nvPr>
+        </p:nvSpPr>
+        <p:spPr/>
+      </p:sp>
+      <p:sp>
+        <p:nvSpPr>
+          <p:cNvPr id="3" name="Notes Placeholder 2"/>
+          <p:cNvSpPr>
+            <a:spLocks noGrp="1"/>
+          </p:cNvSpPr>
+          <p:nvPr>
+            <p:ph type="body" idx="1"/>
+          </p:nvPr>
+        </p:nvSpPr>
+        <p:spPr/>
+        <p:txBody>
+          <a:bodyPr/>
+          <a:lstStyle/>
+          <a:p>
+            <a:r>
+              <a:rPr lang="en-US" dirty="0"/>
+              <a:t/>
+            </a:r>
+            <a:endParaRPr lang="en-US" dirty="0"/>
+          </a:p>
+        </p:txBody>
+      </p:sp>
+      <p:sp>
+        <p:nvSpPr>
+          <p:cNvPr id="4" name="Slide Number Placeholder 3"/>
+          <p:cNvSpPr>
+            <a:spLocks noGrp="1"/>
+          </p:cNvSpPr>
+          <p:nvPr>
+            <p:ph type="sldNum" sz="quarter" idx="10"/>
+          </p:nvPr>
+        </p:nvSpPr>
+        <p:spPr/>
+        <p:txBody>
+          <a:bodyPr/>
+          <a:lstStyle/>
+          <a:p>
+            <a:fld id="{F7021451-1387-4CA6-816F-3879F97B5CBC}" type="slidenum">
+              <a:rPr lang="en-US"/>
+              <a:t>5</a:t>
+            </a:fld>
+            <a:endParaRPr lang="en-US"/>
+          </a:p>
+        </p:txBody>
+      </p:sp>
+    </p:spTree>
+    <p:extLst>
+      <p:ext uri="{BB962C8B-B14F-4D97-AF65-F5344CB8AC3E}">
+        <p14:creationId xmlns:p14="http://schemas.microsoft.com/office/powerpoint/2010/main" val="1024086991"/>
+      </p:ext>
+    </p:extLst>
+  </p:cSld>
+  <p:clrMapOvr>
+    <a:masterClrMapping/>
+  </p:clrMapOvr>
+</p:notes>
+</file>
+
+<file path=ppt/notesSlides/notesSlide6.xml><?xml version="1.0" encoding="utf-8"?>
+<p:notes xmlns:a="http://schemas.openxmlformats.org/drawingml/2006/main" xmlns:r="http://schemas.openxmlformats.org/officeDocument/2006/relationships" xmlns:p="http://schemas.openxmlformats.org/presentationml/2006/main">
+  <p:cSld>
+    <p:spTree>
+      <p:nvGrpSpPr>
+        <p:cNvPr id="1" name=""/>
+        <p:cNvGrpSpPr/>
+        <p:nvPr/>
+      </p:nvGrpSpPr>
+      <p:grpSpPr>
+        <a:xfrm>
+          <a:off x="0" y="0"/>
+          <a:ext cx="0" cy="0"/>
+          <a:chOff x="0" y="0"/>
+          <a:chExt cx="0" cy="0"/>
+        </a:xfrm>
+      </p:grpSpPr>
+      <p:sp>
+        <p:nvSpPr>
+          <p:cNvPr id="2" name="Slide Image Placeholder 1"/>
+          <p:cNvSpPr>
+            <a:spLocks noGrp="1" noRot="1" noChangeAspect="1"/>
+          </p:cNvSpPr>
+          <p:nvPr>
+            <p:ph type="sldImg"/>
+          </p:nvPr>
+        </p:nvSpPr>
+        <p:spPr/>
+      </p:sp>
+      <p:sp>
+        <p:nvSpPr>
+          <p:cNvPr id="3" name="Notes Placeholder 2"/>
+          <p:cNvSpPr>
+            <a:spLocks noGrp="1"/>
+          </p:cNvSpPr>
+          <p:nvPr>
+            <p:ph type="body" idx="1"/>
+          </p:nvPr>
+        </p:nvSpPr>
+        <p:spPr/>
+        <p:txBody>
+          <a:bodyPr/>
+          <a:lstStyle/>
+          <a:p>
+            <a:r>
+              <a:rPr lang="en-US" dirty="0"/>
+              <a:t/>
+            </a:r>
+            <a:endParaRPr lang="en-US" dirty="0"/>
+          </a:p>
+        </p:txBody>
+      </p:sp>
+      <p:sp>
+        <p:nvSpPr>
+          <p:cNvPr id="4" name="Slide Number Placeholder 3"/>
+          <p:cNvSpPr>
+            <a:spLocks noGrp="1"/>
+          </p:cNvSpPr>
+          <p:nvPr>
+            <p:ph type="sldNum" sz="quarter" idx="10"/>
+          </p:nvPr>
+        </p:nvSpPr>
+        <p:spPr/>
+        <p:txBody>
+          <a:bodyPr/>
+          <a:lstStyle/>
+          <a:p>
+            <a:fld id="{F7021451-1387-4CA6-816F-3879F97B5CBC}" type="slidenum">
+              <a:rPr lang="en-US"/>
+              <a:t>6</a:t>
+            </a:fld>
+            <a:endParaRPr lang="en-US"/>
+          </a:p>
+        </p:txBody>
+      </p:sp>
+    </p:spTree>
+    <p:extLst>
+      <p:ext uri="{BB962C8B-B14F-4D97-AF65-F5344CB8AC3E}">
+        <p14:creationId xmlns:p14="http://schemas.microsoft.com/office/powerpoint/2010/main" val="1024086991"/>
+      </p:ext>
+    </p:extLst>
+  </p:cSld>
+  <p:clrMapOvr>
+    <a:masterClrMapping/>
+  </p:clrMapOvr>
+</p:notes>
+</file>
+
+<file path=ppt/notesSlides/notesSlide7.xml><?xml version="1.0" encoding="utf-8"?>
+<p:notes xmlns:a="http://schemas.openxmlformats.org/drawingml/2006/main" xmlns:r="http://schemas.openxmlformats.org/officeDocument/2006/relationships" xmlns:p="http://schemas.openxmlformats.org/presentationml/2006/main">
+  <p:cSld>
+    <p:spTree>
+      <p:nvGrpSpPr>
+        <p:cNvPr id="1" name=""/>
+        <p:cNvGrpSpPr/>
+        <p:nvPr/>
+      </p:nvGrpSpPr>
+      <p:grpSpPr>
+        <a:xfrm>
+          <a:off x="0" y="0"/>
+          <a:ext cx="0" cy="0"/>
+          <a:chOff x="0" y="0"/>
+          <a:chExt cx="0" cy="0"/>
+        </a:xfrm>
+      </p:grpSpPr>
+      <p:sp>
+        <p:nvSpPr>
+          <p:cNvPr id="2" name="Slide Image Placeholder 1"/>
+          <p:cNvSpPr>
+            <a:spLocks noGrp="1" noRot="1" noChangeAspect="1"/>
+          </p:cNvSpPr>
+          <p:nvPr>
+            <p:ph type="sldImg"/>
+          </p:nvPr>
+        </p:nvSpPr>
+        <p:spPr/>
+      </p:sp>
+      <p:sp>
+        <p:nvSpPr>
+          <p:cNvPr id="3" name="Notes Placeholder 2"/>
+          <p:cNvSpPr>
+            <a:spLocks noGrp="1"/>
+          </p:cNvSpPr>
+          <p:nvPr>
+            <p:ph type="body" idx="1"/>
+          </p:nvPr>
+        </p:nvSpPr>
+        <p:spPr/>
+        <p:txBody>
+          <a:bodyPr/>
+          <a:lstStyle/>
+          <a:p>
+            <a:r>
+              <a:rPr lang="en-US" dirty="0"/>
+              <a:t/>
+            </a:r>
+            <a:endParaRPr lang="en-US" dirty="0"/>
+          </a:p>
+        </p:txBody>
+      </p:sp>
+      <p:sp>
+        <p:nvSpPr>
+          <p:cNvPr id="4" name="Slide Number Placeholder 3"/>
+          <p:cNvSpPr>
+            <a:spLocks noGrp="1"/>
+          </p:cNvSpPr>
+          <p:nvPr>
+            <p:ph type="sldNum" sz="quarter" idx="10"/>
+          </p:nvPr>
+        </p:nvSpPr>
+        <p:spPr/>
+        <p:txBody>
+          <a:bodyPr/>
+          <a:lstStyle/>
+          <a:p>
+            <a:fld id="{F7021451-1387-4CA6-816F-3879F97B5CBC}" type="slidenum">
+              <a:rPr lang="en-US"/>
+              <a:t>7</a:t>
+            </a:fld>
+            <a:endParaRPr lang="en-US"/>
+          </a:p>
+        </p:txBody>
+      </p:sp>
+    </p:spTree>
+    <p:extLst>
+      <p:ext uri="{BB962C8B-B14F-4D97-AF65-F5344CB8AC3E}">
+        <p14:creationId xmlns:p14="http://schemas.microsoft.com/office/powerpoint/2010/main" val="1024086991"/>
+      </p:ext>
+    </p:extLst>
+  </p:cSld>
+  <p:clrMapOvr>
+    <a:masterClrMapping/>
+  </p:clrMapOvr>
+</p:notes>
+</file>
+
+<file path=ppt/notesSlides/notesSlide8.xml><?xml version="1.0" encoding="utf-8"?>
+<p:notes xmlns:a="http://schemas.openxmlformats.org/drawingml/2006/main" xmlns:r="http://schemas.openxmlformats.org/officeDocument/2006/relationships" xmlns:p="http://schemas.openxmlformats.org/presentationml/2006/main">
+  <p:cSld>
+    <p:spTree>
+      <p:nvGrpSpPr>
+        <p:cNvPr id="1" name=""/>
+        <p:cNvGrpSpPr/>
+        <p:nvPr/>
+      </p:nvGrpSpPr>
+      <p:grpSpPr>
+        <a:xfrm>
+          <a:off x="0" y="0"/>
+          <a:ext cx="0" cy="0"/>
+          <a:chOff x="0" y="0"/>
+          <a:chExt cx="0" cy="0"/>
+        </a:xfrm>
+      </p:grpSpPr>
+      <p:sp>
+        <p:nvSpPr>
+          <p:cNvPr id="2" name="Slide Image Placeholder 1"/>
+          <p:cNvSpPr>
+            <a:spLocks noGrp="1" noRot="1" noChangeAspect="1"/>
+          </p:cNvSpPr>
+          <p:nvPr>
+            <p:ph type="sldImg"/>
+          </p:nvPr>
+        </p:nvSpPr>
+        <p:spPr/>
+      </p:sp>
+      <p:sp>
+        <p:nvSpPr>
+          <p:cNvPr id="3" name="Notes Placeholder 2"/>
+          <p:cNvSpPr>
+            <a:spLocks noGrp="1"/>
+          </p:cNvSpPr>
+          <p:nvPr>
+            <p:ph type="body" idx="1"/>
+          </p:nvPr>
+        </p:nvSpPr>
+        <p:spPr/>
+        <p:txBody>
+          <a:bodyPr/>
+          <a:lstStyle/>
+          <a:p>
+            <a:r>
+              <a:rPr lang="en-US" dirty="0"/>
+              <a:t/>
+            </a:r>
+            <a:endParaRPr lang="en-US" dirty="0"/>
+          </a:p>
+        </p:txBody>
+      </p:sp>
+      <p:sp>
+        <p:nvSpPr>
+          <p:cNvPr id="4" name="Slide Number Placeholder 3"/>
+          <p:cNvSpPr>
+            <a:spLocks noGrp="1"/>
+          </p:cNvSpPr>
+          <p:nvPr>
+            <p:ph type="sldNum" sz="quarter" idx="10"/>
+          </p:nvPr>
+        </p:nvSpPr>
+        <p:spPr/>
+        <p:txBody>
+          <a:bodyPr/>
+          <a:lstStyle/>
+          <a:p>
+            <a:fld id="{F7021451-1387-4CA6-816F-3879F97B5CBC}" type="slidenum">
+              <a:rPr lang="en-US"/>
+              <a:t>8</a:t>
+            </a:fld>
+            <a:endParaRPr lang="en-US"/>
+          </a:p>
+        </p:txBody>
+      </p:sp>
+    </p:spTree>
+    <p:extLst>
+      <p:ext uri="{BB962C8B-B14F-4D97-AF65-F5344CB8AC3E}">
+        <p14:creationId xmlns:p14="http://schemas.microsoft.com/office/powerpoint/2010/main" val="1024086991"/>
+      </p:ext>
+    </p:extLst>
+  </p:cSld>
+  <p:clrMapOvr>
+    <a:masterClrMapping/>
+  </p:clrMapOvr>
+</p:notes>
+</file>
+
+<file path=ppt/notesSlides/notesSlide9.xml><?xml version="1.0" encoding="utf-8"?>
+<p:notes xmlns:a="http://schemas.openxmlformats.org/drawingml/2006/main" xmlns:r="http://schemas.openxmlformats.org/officeDocument/2006/relationships" xmlns:p="http://schemas.openxmlformats.org/presentationml/2006/main">
+  <p:cSld>
+    <p:spTree>
+      <p:nvGrpSpPr>
+        <p:cNvPr id="1" name=""/>
+        <p:cNvGrpSpPr/>
+        <p:nvPr/>
+      </p:nvGrpSpPr>
+      <p:grpSpPr>
+        <a:xfrm>
+          <a:off x="0" y="0"/>
+          <a:ext cx="0" cy="0"/>
+          <a:chOff x="0" y="0"/>
+          <a:chExt cx="0" cy="0"/>
+        </a:xfrm>
+      </p:grpSpPr>
+      <p:sp>
+        <p:nvSpPr>
+          <p:cNvPr id="2" name="Slide Image Placeholder 1"/>
+          <p:cNvSpPr>
+            <a:spLocks noGrp="1" noRot="1" noChangeAspect="1"/>
+          </p:cNvSpPr>
+          <p:nvPr>
+            <p:ph type="sldImg"/>
+          </p:nvPr>
+        </p:nvSpPr>
+        <p:spPr/>
+      </p:sp>
+      <p:sp>
+        <p:nvSpPr>
+          <p:cNvPr id="3" name="Notes Placeholder 2"/>
+          <p:cNvSpPr>
+            <a:spLocks noGrp="1"/>
+          </p:cNvSpPr>
+          <p:nvPr>
+            <p:ph type="body" idx="1"/>
+          </p:nvPr>
+        </p:nvSpPr>
+        <p:spPr/>
+        <p:txBody>
+          <a:bodyPr/>
+          <a:lstStyle/>
+          <a:p>
+            <a:r>
+              <a:rPr lang="en-US" dirty="0"/>
+              <a:t/>
+            </a:r>
+            <a:endParaRPr lang="en-US" dirty="0"/>
+          </a:p>
+        </p:txBody>
+      </p:sp>
+      <p:sp>
+        <p:nvSpPr>
+          <p:cNvPr id="4" name="Slide Number Placeholder 3"/>
+          <p:cNvSpPr>
+            <a:spLocks noGrp="1"/>
+          </p:cNvSpPr>
+          <p:nvPr>
+            <p:ph type="sldNum" sz="quarter" idx="10"/>
+          </p:nvPr>
+        </p:nvSpPr>
+        <p:spPr/>
+        <p:txBody>
+          <a:bodyPr/>
+          <a:lstStyle/>
+          <a:p>
+            <a:fld id="{F7021451-1387-4CA6-816F-3879F97B5CBC}" type="slidenum">
+              <a:rPr lang="en-US"/>
+              <a:t>9</a:t>
+            </a:fld>
+            <a:endParaRPr lang="en-US"/>
+          </a:p>
+        </p:txBody>
+      </p:sp>
+    </p:spTree>
+    <p:extLst>
+      <p:ext uri="{BB962C8B-B14F-4D97-AF65-F5344CB8AC3E}">
+        <p14:creationId xmlns:p14="http://schemas.microsoft.com/office/powerpoint/2010/main" val="1024086991"/>
+      </p:ext>
+    </p:extLst>
+  </p:cSld>
+  <p:clrMapOvr>
+    <a:masterClrMapping/>
+  </p:clrMapOvr>
+</p:notes>
+</file>
+
 <file path=ppt/slideLayouts/slideLayout1.xml><?xml version="1.0" encoding="utf-8"?>
 <p:sldLayout xmlns:a="http://schemas.openxmlformats.org/drawingml/2006/main" xmlns:r="http://schemas.openxmlformats.org/officeDocument/2006/relationships" xmlns:p="http://schemas.openxmlformats.org/presentationml/2006/main" preserve="1">
   <p:cSld name="DEFAULT">
@@ -1121,13 +1566,6 @@
 <file path=ppt/slides/slide1.xml><?xml version="1.0" encoding="utf-8"?>
 <p:sld xmlns:a="http://schemas.openxmlformats.org/drawingml/2006/main" xmlns:r="http://schemas.openxmlformats.org/officeDocument/2006/relationships" xmlns:p="http://schemas.openxmlformats.org/presentationml/2006/main">
   <p:cSld name="Slide 1">
-    <p:bg>
-      <p:bgPr>
-        <a:solidFill>
-          <a:srgbClr val="1B2A4A"/>
-        </a:solidFill>
-      </p:bgPr>
-    </p:bg>
     <p:spTree>
       <p:nvGrpSpPr>
         <p:cNvPr id="1" name=""/>
@@ -1151,7 +1589,27 @@
         <p:spPr>
           <a:xfrm>
             <a:off x="0" y="0"/>
-            <a:ext cx="109728" cy="5143500"/>
+            <a:ext cx="9144000" cy="5143500"/>
+          </a:xfrm>
+          <a:prstGeom prst="rect">
+            <a:avLst/>
+          </a:prstGeom>
+          <a:solidFill>
+            <a:srgbClr val="1B2A4A"/>
+          </a:solidFill>
+          <a:ln/>
+        </p:spPr>
+      </p:sp>
+      <p:sp>
+        <p:nvSpPr>
+          <p:cNvPr id="3" name="Shape 1"/>
+          <p:cNvSpPr/>
+          <p:nvPr/>
+        </p:nvSpPr>
+        <p:spPr>
+          <a:xfrm>
+            <a:off x="0" y="4777740"/>
+            <a:ext cx="9144000" cy="365760"/>
           </a:xfrm>
           <a:prstGeom prst="rect">
             <a:avLst/>
@@ -1164,14 +1622,36 @@
       </p:sp>
       <p:sp>
         <p:nvSpPr>
-          <p:cNvPr id="3" name="Text 1"/>
-          <p:cNvSpPr/>
-          <p:nvPr/>
-        </p:nvSpPr>
-        <p:spPr>
-          <a:xfrm>
-            <a:off x="731520" y="1097280"/>
-            <a:ext cx="7772400" cy="1371600"/>
+          <p:cNvPr id="4" name="Shape 2"/>
+          <p:cNvSpPr/>
+          <p:nvPr/>
+        </p:nvSpPr>
+        <p:spPr>
+          <a:xfrm>
+            <a:off x="6858000" y="-1371600"/>
+            <a:ext cx="4572000" cy="4572000"/>
+          </a:xfrm>
+          <a:prstGeom prst="ellipse">
+            <a:avLst/>
+          </a:prstGeom>
+          <a:solidFill>
+            <a:srgbClr val="2A9D8F">
+              <a:alpha val="12000"/>
+            </a:srgbClr>
+          </a:solidFill>
+          <a:ln/>
+        </p:spPr>
+      </p:sp>
+      <p:sp>
+        <p:nvSpPr>
+          <p:cNvPr id="5" name="Text 3"/>
+          <p:cNvSpPr/>
+          <p:nvPr/>
+        </p:nvSpPr>
+        <p:spPr>
+          <a:xfrm>
+            <a:off x="731520" y="914400"/>
+            <a:ext cx="7680960" cy="457200"/>
           </a:xfrm>
           <a:prstGeom prst="rect">
             <a:avLst/>
@@ -1187,7 +1667,46 @@
               <a:buNone/>
             </a:pPr>
             <a:r>
-              <a:rPr lang="en-US" sz="4000" b="1" dirty="0">
+              <a:rPr lang="en-US" sz="1300" b="1" spc="500" kern="0" dirty="0">
+                <a:solidFill>
+                  <a:srgbClr val="2A9D8F"/>
+                </a:solidFill>
+                <a:latin typeface="Calibri" pitchFamily="34" charset="0"/>
+                <a:ea typeface="Calibri" pitchFamily="34" charset="-122"/>
+                <a:cs typeface="Calibri" pitchFamily="34" charset="-120"/>
+              </a:rPr>
+              <a:t>GRADE 6 SCIENCE</a:t>
+            </a:r>
+            <a:endParaRPr lang="en-US" sz="1300" dirty="0"/>
+          </a:p>
+        </p:txBody>
+      </p:sp>
+      <p:sp>
+        <p:nvSpPr>
+          <p:cNvPr id="6" name="Text 4"/>
+          <p:cNvSpPr/>
+          <p:nvPr/>
+        </p:nvSpPr>
+        <p:spPr>
+          <a:xfrm>
+            <a:off x="731520" y="1463040"/>
+            <a:ext cx="6858000" cy="1645920"/>
+          </a:xfrm>
+          <a:prstGeom prst="rect">
+            <a:avLst/>
+          </a:prstGeom>
+          <a:noFill/>
+          <a:ln/>
+        </p:spPr>
+        <p:txBody>
+          <a:bodyPr wrap="square" rtlCol="0" anchor="t"/>
+          <a:lstStyle/>
+          <a:p>
+            <a:pPr indent="0" marL="0">
+              <a:buNone/>
+            </a:pPr>
+            <a:r>
+              <a:rPr lang="en-US" sz="3800" b="1" dirty="0">
                 <a:solidFill>
                   <a:srgbClr val="FFFFFF"/>
                 </a:solidFill>
@@ -1195,46 +1714,63 @@
                 <a:ea typeface="Georgia" pitchFamily="34" charset="-122"/>
                 <a:cs typeface="Georgia" pitchFamily="34" charset="-120"/>
               </a:rPr>
-              <a:t>Space Science — Full Revision</a:t>
-            </a:r>
-            <a:endParaRPr lang="en-US" sz="4000" dirty="0"/>
-          </a:p>
-        </p:txBody>
-      </p:sp>
-      <p:sp>
-        <p:nvSpPr>
-          <p:cNvPr id="4" name="Text 2"/>
-          <p:cNvSpPr/>
-          <p:nvPr/>
-        </p:nvSpPr>
-        <p:spPr>
-          <a:xfrm>
-            <a:off x="731520" y="2560320"/>
-            <a:ext cx="7772400" cy="548640"/>
-          </a:xfrm>
-          <a:prstGeom prst="rect">
-            <a:avLst/>
-          </a:prstGeom>
-          <a:noFill/>
-          <a:ln/>
-        </p:spPr>
-        <p:txBody>
-          <a:bodyPr wrap="square" rtlCol="0" anchor="ctr"/>
-          <a:lstStyle/>
+              <a:t>Space</a:t>
+            </a:r>
+            <a:endParaRPr lang="en-US" sz="3800" dirty="0"/>
+          </a:p>
           <a:p>
             <a:pPr indent="0" marL="0">
               <a:buNone/>
             </a:pPr>
             <a:r>
-              <a:rPr lang="en-US" sz="1600" dirty="0">
-                <a:solidFill>
-                  <a:srgbClr val="E9C46A"/>
+              <a:rPr lang="en-US" sz="3800" b="1" dirty="0">
+                <a:solidFill>
+                  <a:srgbClr val="FFFFFF"/>
+                </a:solidFill>
+                <a:latin typeface="Georgia" pitchFamily="34" charset="0"/>
+                <a:ea typeface="Georgia" pitchFamily="34" charset="-122"/>
+                <a:cs typeface="Georgia" pitchFamily="34" charset="-120"/>
+              </a:rPr>
+              <a:t>Full Revision</a:t>
+            </a:r>
+            <a:endParaRPr lang="en-US" sz="3800" dirty="0"/>
+          </a:p>
+        </p:txBody>
+      </p:sp>
+      <p:sp>
+        <p:nvSpPr>
+          <p:cNvPr id="7" name="Text 5"/>
+          <p:cNvSpPr/>
+          <p:nvPr/>
+        </p:nvSpPr>
+        <p:spPr>
+          <a:xfrm>
+            <a:off x="731520" y="3200400"/>
+            <a:ext cx="6400800" cy="548640"/>
+          </a:xfrm>
+          <a:prstGeom prst="rect">
+            <a:avLst/>
+          </a:prstGeom>
+          <a:noFill/>
+          <a:ln/>
+        </p:spPr>
+        <p:txBody>
+          <a:bodyPr wrap="square" rtlCol="0" anchor="ctr"/>
+          <a:lstStyle/>
+          <a:p>
+            <a:pPr indent="0" marL="0">
+              <a:buNone/>
+            </a:pPr>
+            <a:r>
+              <a:rPr lang="en-US" sz="1600" i="1" dirty="0">
+                <a:solidFill>
+                  <a:srgbClr val="9B9690"/>
                 </a:solidFill>
                 <a:latin typeface="Calibri" pitchFamily="34" charset="0"/>
                 <a:ea typeface="Calibri" pitchFamily="34" charset="-122"/>
                 <a:cs typeface="Calibri" pitchFamily="34" charset="-120"/>
               </a:rPr>
-              <a:t>Grade 6 Science · Mr Zocchi</a:t>
+              <a:t>Solar system, Earth–Sun–Moon, seasons, and exploration</a:t>
             </a:r>
             <a:endParaRPr lang="en-US" sz="1600" dirty="0"/>
           </a:p>
@@ -1242,36 +1778,14 @@
       </p:sp>
       <p:sp>
         <p:nvSpPr>
-          <p:cNvPr id="5" name="Shape 3"/>
-          <p:cNvSpPr/>
-          <p:nvPr/>
-        </p:nvSpPr>
-        <p:spPr>
-          <a:xfrm>
-            <a:off x="731520" y="3474720"/>
-            <a:ext cx="2011680" cy="411480"/>
-          </a:xfrm>
-          <a:prstGeom prst="roundRect">
-            <a:avLst>
-              <a:gd name="adj" fmla="val 17778"/>
-            </a:avLst>
-          </a:prstGeom>
-          <a:solidFill>
-            <a:srgbClr val="2A9D8F"/>
-          </a:solidFill>
-          <a:ln/>
-        </p:spPr>
-      </p:sp>
-      <p:sp>
-        <p:nvSpPr>
-          <p:cNvPr id="6" name="Text 4"/>
-          <p:cNvSpPr/>
-          <p:nvPr/>
-        </p:nvSpPr>
-        <p:spPr>
-          <a:xfrm>
-            <a:off x="731520" y="3474720"/>
-            <a:ext cx="2011680" cy="411480"/>
+          <p:cNvPr id="8" name="Text 6"/>
+          <p:cNvSpPr/>
+          <p:nvPr/>
+        </p:nvSpPr>
+        <p:spPr>
+          <a:xfrm>
+            <a:off x="731520" y="4297680"/>
+            <a:ext cx="2743200" cy="365760"/>
           </a:xfrm>
           <a:prstGeom prst="rect">
             <a:avLst/>
@@ -1283,21 +1797,21 @@
           <a:bodyPr wrap="square" rtlCol="0" anchor="ctr"/>
           <a:lstStyle/>
           <a:p>
-            <a:pPr algn="ctr" indent="0" marL="0">
+            <a:pPr indent="0" marL="0">
               <a:buNone/>
             </a:pPr>
             <a:r>
-              <a:rPr lang="en-US" sz="1200" b="1" dirty="0">
-                <a:solidFill>
-                  <a:srgbClr val="FFFFFF"/>
+              <a:rPr lang="en-US" sz="1100" dirty="0">
+                <a:solidFill>
+                  <a:srgbClr val="9B9690"/>
                 </a:solidFill>
                 <a:latin typeface="Calibri" pitchFamily="34" charset="0"/>
                 <a:ea typeface="Calibri" pitchFamily="34" charset="-122"/>
                 <a:cs typeface="Calibri" pitchFamily="34" charset="-120"/>
               </a:rPr>
-              <a:t>Term 5 · Space Science</a:t>
-            </a:r>
-            <a:endParaRPr lang="en-US" sz="1200" dirty="0"/>
+              <a:t>mrzocchi.com</a:t>
+            </a:r>
+            <a:endParaRPr lang="en-US" sz="1100" dirty="0"/>
           </a:p>
         </p:txBody>
       </p:sp>
@@ -1312,13 +1826,6 @@
 <file path=ppt/slides/slide2.xml><?xml version="1.0" encoding="utf-8"?>
 <p:sld xmlns:a="http://schemas.openxmlformats.org/drawingml/2006/main" xmlns:r="http://schemas.openxmlformats.org/officeDocument/2006/relationships" xmlns:p="http://schemas.openxmlformats.org/presentationml/2006/main">
   <p:cSld name="Slide 2">
-    <p:bg>
-      <p:bgPr>
-        <a:solidFill>
-          <a:srgbClr val="FAF8F5"/>
-        </a:solidFill>
-      </p:bgPr>
-    </p:bg>
     <p:spTree>
       <p:nvGrpSpPr>
         <p:cNvPr id="1" name=""/>
@@ -1342,7 +1849,27 @@
         <p:spPr>
           <a:xfrm>
             <a:off x="0" y="0"/>
-            <a:ext cx="9144000" cy="54864"/>
+            <a:ext cx="9144000" cy="5143500"/>
+          </a:xfrm>
+          <a:prstGeom prst="rect">
+            <a:avLst/>
+          </a:prstGeom>
+          <a:solidFill>
+            <a:srgbClr val="1B2A4A"/>
+          </a:solidFill>
+          <a:ln/>
+        </p:spPr>
+      </p:sp>
+      <p:sp>
+        <p:nvSpPr>
+          <p:cNvPr id="3" name="Shape 1"/>
+          <p:cNvSpPr/>
+          <p:nvPr/>
+        </p:nvSpPr>
+        <p:spPr>
+          <a:xfrm>
+            <a:off x="731520" y="1828800"/>
+            <a:ext cx="73152" cy="1463040"/>
           </a:xfrm>
           <a:prstGeom prst="rect">
             <a:avLst/>
@@ -1355,14 +1882,14 @@
       </p:sp>
       <p:sp>
         <p:nvSpPr>
-          <p:cNvPr id="3" name="Text 1"/>
-          <p:cNvSpPr/>
-          <p:nvPr/>
-        </p:nvSpPr>
-        <p:spPr>
-          <a:xfrm>
-            <a:off x="7772400" y="4709160"/>
-            <a:ext cx="1097280" cy="320040"/>
+          <p:cNvPr id="4" name="Text 2"/>
+          <p:cNvSpPr/>
+          <p:nvPr/>
+        </p:nvSpPr>
+        <p:spPr>
+          <a:xfrm>
+            <a:off x="1097280" y="1463040"/>
+            <a:ext cx="1097280" cy="1097280"/>
           </a:xfrm>
           <a:prstGeom prst="rect">
             <a:avLst/>
@@ -1374,125 +1901,34 @@
           <a:bodyPr wrap="square" rtlCol="0" anchor="ctr"/>
           <a:lstStyle/>
           <a:p>
-            <a:pPr algn="r" indent="0" marL="0">
+            <a:pPr algn="l" indent="0" marL="0">
               <a:buNone/>
             </a:pPr>
             <a:r>
-              <a:rPr lang="en-US" sz="900" dirty="0">
-                <a:solidFill>
-                  <a:srgbClr val="6B6660"/>
-                </a:solidFill>
-                <a:latin typeface="Calibri" pitchFamily="34" charset="0"/>
-                <a:ea typeface="Calibri" pitchFamily="34" charset="-122"/>
-                <a:cs typeface="Calibri" pitchFamily="34" charset="-120"/>
-              </a:rPr>
-              <a:t>2 / 4</a:t>
-            </a:r>
-            <a:endParaRPr lang="en-US" sz="900" dirty="0"/>
-          </a:p>
-        </p:txBody>
-      </p:sp>
-      <p:sp>
-        <p:nvSpPr>
-          <p:cNvPr id="4" name="Text 2"/>
-          <p:cNvSpPr/>
-          <p:nvPr/>
-        </p:nvSpPr>
-        <p:spPr>
-          <a:xfrm>
-            <a:off x="457200" y="274320"/>
-            <a:ext cx="8229600" cy="640080"/>
-          </a:xfrm>
-          <a:prstGeom prst="rect">
-            <a:avLst/>
-          </a:prstGeom>
-          <a:noFill/>
-          <a:ln/>
-        </p:spPr>
-        <p:txBody>
-          <a:bodyPr wrap="square" rtlCol="0" anchor="ctr"/>
-          <a:lstStyle/>
-          <a:p>
-            <a:pPr indent="0" marL="0">
-              <a:buNone/>
-            </a:pPr>
-            <a:r>
-              <a:rPr lang="en-US" sz="2600" b="1" dirty="0">
-                <a:solidFill>
-                  <a:srgbClr val="1B2A4A"/>
+              <a:rPr lang="en-US" sz="4800" b="1" dirty="0">
+                <a:solidFill>
+                  <a:srgbClr val="2A9D8F"/>
                 </a:solidFill>
                 <a:latin typeface="Georgia" pitchFamily="34" charset="0"/>
                 <a:ea typeface="Georgia" pitchFamily="34" charset="-122"/>
                 <a:cs typeface="Georgia" pitchFamily="34" charset="-120"/>
               </a:rPr>
-              <a:t>Solar System</a:t>
-            </a:r>
-            <a:endParaRPr lang="en-US" sz="2600" dirty="0"/>
-          </a:p>
-        </p:txBody>
-      </p:sp>
-      <p:sp>
-        <p:nvSpPr>
-          <p:cNvPr id="5" name="Shape 3"/>
-          <p:cNvSpPr/>
-          <p:nvPr/>
-        </p:nvSpPr>
-        <p:spPr>
-          <a:xfrm>
-            <a:off x="457200" y="1188720"/>
-            <a:ext cx="2560320" cy="1828800"/>
-          </a:xfrm>
-          <a:prstGeom prst="rect">
-            <a:avLst/>
-          </a:prstGeom>
-          <a:solidFill>
-            <a:srgbClr val="FFFFFF"/>
-          </a:solidFill>
-          <a:ln w="12700">
-            <a:solidFill>
-              <a:srgbClr val="E5E2DC"/>
-            </a:solidFill>
-            <a:prstDash val="solid"/>
-          </a:ln>
-          <a:effectLst>
-            <a:outerShdw sx="100000" sy="100000" kx="0" ky="0" algn="bl" rotWithShape="0" blurRad="50800" dist="25400" dir="8100000">
-              <a:srgbClr val="000000">
-                <a:alpha val="10000"/>
-              </a:srgbClr>
-            </a:outerShdw>
-          </a:effectLst>
-        </p:spPr>
-      </p:sp>
-      <p:sp>
-        <p:nvSpPr>
-          <p:cNvPr id="6" name="Shape 4"/>
-          <p:cNvSpPr/>
-          <p:nvPr/>
-        </p:nvSpPr>
-        <p:spPr>
-          <a:xfrm>
-            <a:off x="457200" y="1188720"/>
-            <a:ext cx="2560320" cy="54864"/>
-          </a:xfrm>
-          <a:prstGeom prst="rect">
-            <a:avLst/>
-          </a:prstGeom>
-          <a:solidFill>
-            <a:srgbClr val="2A9D8F"/>
-          </a:solidFill>
-          <a:ln/>
-        </p:spPr>
-      </p:sp>
-      <p:sp>
-        <p:nvSpPr>
-          <p:cNvPr id="7" name="Text 5"/>
-          <p:cNvSpPr/>
-          <p:nvPr/>
-        </p:nvSpPr>
-        <p:spPr>
-          <a:xfrm>
-            <a:off x="594360" y="1325880"/>
-            <a:ext cx="2286000" cy="365760"/>
+              <a:t>1</a:t>
+            </a:r>
+            <a:endParaRPr lang="en-US" sz="4800" dirty="0"/>
+          </a:p>
+        </p:txBody>
+      </p:sp>
+      <p:sp>
+        <p:nvSpPr>
+          <p:cNvPr id="5" name="Text 3"/>
+          <p:cNvSpPr/>
+          <p:nvPr/>
+        </p:nvSpPr>
+        <p:spPr>
+          <a:xfrm>
+            <a:off x="2194560" y="1920240"/>
+            <a:ext cx="5943600" cy="1097280"/>
           </a:xfrm>
           <a:prstGeom prst="rect">
             <a:avLst/>
@@ -1508,316 +1944,17 @@
               <a:buNone/>
             </a:pPr>
             <a:r>
-              <a:rPr lang="en-US" sz="1400" b="1" dirty="0">
-                <a:solidFill>
-                  <a:srgbClr val="1B2A4A"/>
-                </a:solidFill>
-                <a:latin typeface="Calibri" pitchFamily="34" charset="0"/>
-                <a:ea typeface="Calibri" pitchFamily="34" charset="-122"/>
-                <a:cs typeface="Calibri" pitchFamily="34" charset="-120"/>
-              </a:rPr>
-              <a:t>8 Planets</a:t>
-            </a:r>
-            <a:endParaRPr lang="en-US" sz="1400" dirty="0"/>
-          </a:p>
-        </p:txBody>
-      </p:sp>
-      <p:sp>
-        <p:nvSpPr>
-          <p:cNvPr id="8" name="Text 6"/>
-          <p:cNvSpPr/>
-          <p:nvPr/>
-        </p:nvSpPr>
-        <p:spPr>
-          <a:xfrm>
-            <a:off x="594360" y="1737360"/>
-            <a:ext cx="2286000" cy="1097280"/>
-          </a:xfrm>
-          <a:prstGeom prst="rect">
-            <a:avLst/>
-          </a:prstGeom>
-          <a:noFill/>
-          <a:ln/>
-        </p:spPr>
-        <p:txBody>
-          <a:bodyPr wrap="square" rtlCol="0" anchor="t"/>
-          <a:lstStyle/>
-          <a:p>
-            <a:pPr indent="0" marL="0">
-              <a:buNone/>
-            </a:pPr>
-            <a:r>
-              <a:rPr lang="en-US" sz="1100" dirty="0">
-                <a:solidFill>
-                  <a:srgbClr val="3D3A36"/>
-                </a:solidFill>
-                <a:latin typeface="Calibri" pitchFamily="34" charset="0"/>
-                <a:ea typeface="Calibri" pitchFamily="34" charset="-122"/>
-                <a:cs typeface="Calibri" pitchFamily="34" charset="-120"/>
-              </a:rPr>
-              <a:t>Inner rocky: Mercury, Venus, Earth, Mars. Outer gas/ice: Jupiter, Saturn, Uranus, Neptune. Sun = 99.8% mass.</a:t>
-            </a:r>
-            <a:endParaRPr lang="en-US" sz="1100" dirty="0"/>
-          </a:p>
-        </p:txBody>
-      </p:sp>
-      <p:sp>
-        <p:nvSpPr>
-          <p:cNvPr id="9" name="Shape 7"/>
-          <p:cNvSpPr/>
-          <p:nvPr/>
-        </p:nvSpPr>
-        <p:spPr>
-          <a:xfrm>
-            <a:off x="3291840" y="1188720"/>
-            <a:ext cx="2560320" cy="1828800"/>
-          </a:xfrm>
-          <a:prstGeom prst="rect">
-            <a:avLst/>
-          </a:prstGeom>
-          <a:solidFill>
-            <a:srgbClr val="FFFFFF"/>
-          </a:solidFill>
-          <a:ln w="12700">
-            <a:solidFill>
-              <a:srgbClr val="E5E2DC"/>
-            </a:solidFill>
-            <a:prstDash val="solid"/>
-          </a:ln>
-          <a:effectLst>
-            <a:outerShdw sx="100000" sy="100000" kx="0" ky="0" algn="bl" rotWithShape="0" blurRad="50800" dist="25400" dir="8100000">
-              <a:srgbClr val="000000">
-                <a:alpha val="10000"/>
-              </a:srgbClr>
-            </a:outerShdw>
-          </a:effectLst>
-        </p:spPr>
-      </p:sp>
-      <p:sp>
-        <p:nvSpPr>
-          <p:cNvPr id="10" name="Shape 8"/>
-          <p:cNvSpPr/>
-          <p:nvPr/>
-        </p:nvSpPr>
-        <p:spPr>
-          <a:xfrm>
-            <a:off x="3291840" y="1188720"/>
-            <a:ext cx="2560320" cy="54864"/>
-          </a:xfrm>
-          <a:prstGeom prst="rect">
-            <a:avLst/>
-          </a:prstGeom>
-          <a:solidFill>
-            <a:srgbClr val="2A9D8F"/>
-          </a:solidFill>
-          <a:ln/>
-        </p:spPr>
-      </p:sp>
-      <p:sp>
-        <p:nvSpPr>
-          <p:cNvPr id="11" name="Text 9"/>
-          <p:cNvSpPr/>
-          <p:nvPr/>
-        </p:nvSpPr>
-        <p:spPr>
-          <a:xfrm>
-            <a:off x="3429000" y="1325880"/>
-            <a:ext cx="2286000" cy="365760"/>
-          </a:xfrm>
-          <a:prstGeom prst="rect">
-            <a:avLst/>
-          </a:prstGeom>
-          <a:noFill/>
-          <a:ln/>
-        </p:spPr>
-        <p:txBody>
-          <a:bodyPr wrap="square" rtlCol="0" anchor="ctr"/>
-          <a:lstStyle/>
-          <a:p>
-            <a:pPr indent="0" marL="0">
-              <a:buNone/>
-            </a:pPr>
-            <a:r>
-              <a:rPr lang="en-US" sz="1400" b="1" dirty="0">
-                <a:solidFill>
-                  <a:srgbClr val="1B2A4A"/>
-                </a:solidFill>
-                <a:latin typeface="Calibri" pitchFamily="34" charset="0"/>
-                <a:ea typeface="Calibri" pitchFamily="34" charset="-122"/>
-                <a:cs typeface="Calibri" pitchFamily="34" charset="-120"/>
-              </a:rPr>
-              <a:t>Earth-Sun-Moon</a:t>
-            </a:r>
-            <a:endParaRPr lang="en-US" sz="1400" dirty="0"/>
-          </a:p>
-        </p:txBody>
-      </p:sp>
-      <p:sp>
-        <p:nvSpPr>
-          <p:cNvPr id="12" name="Text 10"/>
-          <p:cNvSpPr/>
-          <p:nvPr/>
-        </p:nvSpPr>
-        <p:spPr>
-          <a:xfrm>
-            <a:off x="3429000" y="1737360"/>
-            <a:ext cx="2286000" cy="1097280"/>
-          </a:xfrm>
-          <a:prstGeom prst="rect">
-            <a:avLst/>
-          </a:prstGeom>
-          <a:noFill/>
-          <a:ln/>
-        </p:spPr>
-        <p:txBody>
-          <a:bodyPr wrap="square" rtlCol="0" anchor="t"/>
-          <a:lstStyle/>
-          <a:p>
-            <a:pPr indent="0" marL="0">
-              <a:buNone/>
-            </a:pPr>
-            <a:r>
-              <a:rPr lang="en-US" sz="1100" dirty="0">
-                <a:solidFill>
-                  <a:srgbClr val="3D3A36"/>
-                </a:solidFill>
-                <a:latin typeface="Calibri" pitchFamily="34" charset="0"/>
-                <a:ea typeface="Calibri" pitchFamily="34" charset="-122"/>
-                <a:cs typeface="Calibri" pitchFamily="34" charset="-120"/>
-              </a:rPr>
-              <a:t>Earth orbits Sun (365.25 days). Moon orbits Earth (27.3 days). Moon phases: new→quarter→full→quarter (29.5 days).</a:t>
-            </a:r>
-            <a:endParaRPr lang="en-US" sz="1100" dirty="0"/>
-          </a:p>
-        </p:txBody>
-      </p:sp>
-      <p:sp>
-        <p:nvSpPr>
-          <p:cNvPr id="13" name="Shape 11"/>
-          <p:cNvSpPr/>
-          <p:nvPr/>
-        </p:nvSpPr>
-        <p:spPr>
-          <a:xfrm>
-            <a:off x="6126480" y="1188720"/>
-            <a:ext cx="2560320" cy="1828800"/>
-          </a:xfrm>
-          <a:prstGeom prst="rect">
-            <a:avLst/>
-          </a:prstGeom>
-          <a:solidFill>
-            <a:srgbClr val="FFFFFF"/>
-          </a:solidFill>
-          <a:ln w="12700">
-            <a:solidFill>
-              <a:srgbClr val="E5E2DC"/>
-            </a:solidFill>
-            <a:prstDash val="solid"/>
-          </a:ln>
-          <a:effectLst>
-            <a:outerShdw sx="100000" sy="100000" kx="0" ky="0" algn="bl" rotWithShape="0" blurRad="50800" dist="25400" dir="8100000">
-              <a:srgbClr val="000000">
-                <a:alpha val="10000"/>
-              </a:srgbClr>
-            </a:outerShdw>
-          </a:effectLst>
-        </p:spPr>
-      </p:sp>
-      <p:sp>
-        <p:nvSpPr>
-          <p:cNvPr id="14" name="Shape 12"/>
-          <p:cNvSpPr/>
-          <p:nvPr/>
-        </p:nvSpPr>
-        <p:spPr>
-          <a:xfrm>
-            <a:off x="6126480" y="1188720"/>
-            <a:ext cx="2560320" cy="54864"/>
-          </a:xfrm>
-          <a:prstGeom prst="rect">
-            <a:avLst/>
-          </a:prstGeom>
-          <a:solidFill>
-            <a:srgbClr val="2A9D8F"/>
-          </a:solidFill>
-          <a:ln/>
-        </p:spPr>
-      </p:sp>
-      <p:sp>
-        <p:nvSpPr>
-          <p:cNvPr id="15" name="Text 13"/>
-          <p:cNvSpPr/>
-          <p:nvPr/>
-        </p:nvSpPr>
-        <p:spPr>
-          <a:xfrm>
-            <a:off x="6263640" y="1325880"/>
-            <a:ext cx="2286000" cy="365760"/>
-          </a:xfrm>
-          <a:prstGeom prst="rect">
-            <a:avLst/>
-          </a:prstGeom>
-          <a:noFill/>
-          <a:ln/>
-        </p:spPr>
-        <p:txBody>
-          <a:bodyPr wrap="square" rtlCol="0" anchor="ctr"/>
-          <a:lstStyle/>
-          <a:p>
-            <a:pPr indent="0" marL="0">
-              <a:buNone/>
-            </a:pPr>
-            <a:r>
-              <a:rPr lang="en-US" sz="1400" b="1" dirty="0">
-                <a:solidFill>
-                  <a:srgbClr val="1B2A4A"/>
-                </a:solidFill>
-                <a:latin typeface="Calibri" pitchFamily="34" charset="0"/>
-                <a:ea typeface="Calibri" pitchFamily="34" charset="-122"/>
-                <a:cs typeface="Calibri" pitchFamily="34" charset="-120"/>
-              </a:rPr>
-              <a:t>Day, Night &amp; Seasons</a:t>
-            </a:r>
-            <a:endParaRPr lang="en-US" sz="1400" dirty="0"/>
-          </a:p>
-        </p:txBody>
-      </p:sp>
-      <p:sp>
-        <p:nvSpPr>
-          <p:cNvPr id="16" name="Text 14"/>
-          <p:cNvSpPr/>
-          <p:nvPr/>
-        </p:nvSpPr>
-        <p:spPr>
-          <a:xfrm>
-            <a:off x="6263640" y="1737360"/>
-            <a:ext cx="2286000" cy="1097280"/>
-          </a:xfrm>
-          <a:prstGeom prst="rect">
-            <a:avLst/>
-          </a:prstGeom>
-          <a:noFill/>
-          <a:ln/>
-        </p:spPr>
-        <p:txBody>
-          <a:bodyPr wrap="square" rtlCol="0" anchor="t"/>
-          <a:lstStyle/>
-          <a:p>
-            <a:pPr indent="0" marL="0">
-              <a:buNone/>
-            </a:pPr>
-            <a:r>
-              <a:rPr lang="en-US" sz="1100" dirty="0">
-                <a:solidFill>
-                  <a:srgbClr val="3D3A36"/>
-                </a:solidFill>
-                <a:latin typeface="Calibri" pitchFamily="34" charset="0"/>
-                <a:ea typeface="Calibri" pitchFamily="34" charset="-122"/>
-                <a:cs typeface="Calibri" pitchFamily="34" charset="-120"/>
-              </a:rPr>
-              <a:t>Day/night: Earth rotates (24 hrs). Seasons: 23.5° tilt (NOT distance). Summer: tilt towards Sun. Opposite in each hemisphere.</a:t>
-            </a:r>
-            <a:endParaRPr lang="en-US" sz="1100" dirty="0"/>
+              <a:rPr lang="en-US" sz="3200" b="1" dirty="0">
+                <a:solidFill>
+                  <a:srgbClr val="FFFFFF"/>
+                </a:solidFill>
+                <a:latin typeface="Georgia" pitchFamily="34" charset="0"/>
+                <a:ea typeface="Georgia" pitchFamily="34" charset="-122"/>
+                <a:cs typeface="Georgia" pitchFamily="34" charset="-120"/>
+              </a:rPr>
+              <a:t>Solar System</a:t>
+            </a:r>
+            <a:endParaRPr lang="en-US" sz="3200" dirty="0"/>
           </a:p>
         </p:txBody>
       </p:sp>
@@ -1862,7 +1999,47 @@
         <p:spPr>
           <a:xfrm>
             <a:off x="0" y="0"/>
-            <a:ext cx="9144000" cy="54864"/>
+            <a:ext cx="9144000" cy="822960"/>
+          </a:xfrm>
+          <a:prstGeom prst="rect">
+            <a:avLst/>
+          </a:prstGeom>
+          <a:solidFill>
+            <a:srgbClr val="FFFFFF"/>
+          </a:solidFill>
+          <a:ln/>
+        </p:spPr>
+      </p:sp>
+      <p:sp>
+        <p:nvSpPr>
+          <p:cNvPr id="3" name="Shape 1"/>
+          <p:cNvSpPr/>
+          <p:nvPr/>
+        </p:nvSpPr>
+        <p:spPr>
+          <a:xfrm>
+            <a:off x="0" y="804672"/>
+            <a:ext cx="9144000" cy="27432"/>
+          </a:xfrm>
+          <a:prstGeom prst="rect">
+            <a:avLst/>
+          </a:prstGeom>
+          <a:solidFill>
+            <a:srgbClr val="E5E2DC"/>
+          </a:solidFill>
+          <a:ln/>
+        </p:spPr>
+      </p:sp>
+      <p:sp>
+        <p:nvSpPr>
+          <p:cNvPr id="4" name="Shape 2"/>
+          <p:cNvSpPr/>
+          <p:nvPr/>
+        </p:nvSpPr>
+        <p:spPr>
+          <a:xfrm>
+            <a:off x="548640" y="201168"/>
+            <a:ext cx="54864" cy="420624"/>
           </a:xfrm>
           <a:prstGeom prst="rect">
             <a:avLst/>
@@ -1875,14 +2052,14 @@
       </p:sp>
       <p:sp>
         <p:nvSpPr>
-          <p:cNvPr id="3" name="Text 1"/>
-          <p:cNvSpPr/>
-          <p:nvPr/>
-        </p:nvSpPr>
-        <p:spPr>
-          <a:xfrm>
-            <a:off x="7772400" y="4709160"/>
-            <a:ext cx="1097280" cy="320040"/>
+          <p:cNvPr id="5" name="Text 3"/>
+          <p:cNvSpPr/>
+          <p:nvPr/>
+        </p:nvSpPr>
+        <p:spPr>
+          <a:xfrm>
+            <a:off x="777240" y="137160"/>
+            <a:ext cx="7772400" cy="548640"/>
           </a:xfrm>
           <a:prstGeom prst="rect">
             <a:avLst/>
@@ -1891,183 +2068,99 @@
           <a:ln/>
         </p:spPr>
         <p:txBody>
-          <a:bodyPr wrap="square" rtlCol="0" anchor="ctr"/>
-          <a:lstStyle/>
-          <a:p>
-            <a:pPr algn="r" indent="0" marL="0">
+          <a:bodyPr wrap="square" lIns="0" tIns="0" rIns="0" bIns="0" rtlCol="0" anchor="ctr"/>
+          <a:lstStyle/>
+          <a:p>
+            <a:pPr indent="0" marL="0">
               <a:buNone/>
             </a:pPr>
             <a:r>
-              <a:rPr lang="en-US" sz="900" dirty="0">
-                <a:solidFill>
-                  <a:srgbClr val="6B6660"/>
+              <a:rPr lang="en-US" sz="2000" b="1" dirty="0">
+                <a:solidFill>
+                  <a:srgbClr val="1B2A4A"/>
+                </a:solidFill>
+                <a:latin typeface="Georgia" pitchFamily="34" charset="0"/>
+                <a:ea typeface="Georgia" pitchFamily="34" charset="-122"/>
+                <a:cs typeface="Georgia" pitchFamily="34" charset="-120"/>
+              </a:rPr>
+              <a:t>Solar System Review</a:t>
+            </a:r>
+            <a:endParaRPr lang="en-US" sz="2000" dirty="0"/>
+          </a:p>
+        </p:txBody>
+      </p:sp>
+      <p:sp>
+        <p:nvSpPr>
+          <p:cNvPr id="6" name="Text 4"/>
+          <p:cNvSpPr/>
+          <p:nvPr/>
+        </p:nvSpPr>
+        <p:spPr>
+          <a:xfrm>
+            <a:off x="731520" y="1051560"/>
+            <a:ext cx="7680960" cy="3108960"/>
+          </a:xfrm>
+          <a:prstGeom prst="rect">
+            <a:avLst/>
+          </a:prstGeom>
+          <a:noFill/>
+          <a:ln/>
+        </p:spPr>
+        <p:txBody>
+          <a:bodyPr wrap="square" rtlCol="0" anchor="t"/>
+          <a:lstStyle/>
+          <a:p>
+            <a:pPr marL="342900" indent="-342900">
+              <a:spcAft>
+                <a:spcPts val="800"/>
+              </a:spcAft>
+              <a:buSzPct val="100000"/>
+              <a:buChar char="•"/>
+            </a:pPr>
+            <a:r>
+              <a:rPr lang="en-US" sz="1500" dirty="0">
+                <a:solidFill>
+                  <a:srgbClr val="3D3A36"/>
                 </a:solidFill>
                 <a:latin typeface="Calibri" pitchFamily="34" charset="0"/>
                 <a:ea typeface="Calibri" pitchFamily="34" charset="-122"/>
                 <a:cs typeface="Calibri" pitchFamily="34" charset="-120"/>
               </a:rPr>
-              <a:t>3 / 4</a:t>
-            </a:r>
-            <a:endParaRPr lang="en-US" sz="900" dirty="0"/>
-          </a:p>
-        </p:txBody>
-      </p:sp>
-      <p:sp>
-        <p:nvSpPr>
-          <p:cNvPr id="4" name="Text 2"/>
-          <p:cNvSpPr/>
-          <p:nvPr/>
-        </p:nvSpPr>
-        <p:spPr>
-          <a:xfrm>
-            <a:off x="457200" y="274320"/>
-            <a:ext cx="8229600" cy="640080"/>
-          </a:xfrm>
-          <a:prstGeom prst="rect">
-            <a:avLst/>
-          </a:prstGeom>
-          <a:noFill/>
-          <a:ln/>
-        </p:spPr>
-        <p:txBody>
-          <a:bodyPr wrap="square" rtlCol="0" anchor="ctr"/>
-          <a:lstStyle/>
-          <a:p>
-            <a:pPr indent="0" marL="0">
-              <a:buNone/>
-            </a:pPr>
-            <a:r>
-              <a:rPr lang="en-US" sz="2600" b="1" dirty="0">
-                <a:solidFill>
-                  <a:srgbClr val="1B2A4A"/>
-                </a:solidFill>
-                <a:latin typeface="Georgia" pitchFamily="34" charset="0"/>
-                <a:ea typeface="Georgia" pitchFamily="34" charset="-122"/>
-                <a:cs typeface="Georgia" pitchFamily="34" charset="-120"/>
-              </a:rPr>
-              <a:t>Space Exploration</a:t>
-            </a:r>
-            <a:endParaRPr lang="en-US" sz="2600" dirty="0"/>
-          </a:p>
-        </p:txBody>
-      </p:sp>
-      <p:sp>
-        <p:nvSpPr>
-          <p:cNvPr id="5" name="Shape 3"/>
-          <p:cNvSpPr/>
-          <p:nvPr/>
-        </p:nvSpPr>
-        <p:spPr>
-          <a:xfrm>
-            <a:off x="457200" y="1188720"/>
-            <a:ext cx="2560320" cy="1828800"/>
-          </a:xfrm>
-          <a:prstGeom prst="rect">
-            <a:avLst/>
-          </a:prstGeom>
-          <a:solidFill>
-            <a:srgbClr val="FFFFFF"/>
-          </a:solidFill>
-          <a:ln w="12700">
-            <a:solidFill>
-              <a:srgbClr val="E5E2DC"/>
-            </a:solidFill>
-            <a:prstDash val="solid"/>
-          </a:ln>
-          <a:effectLst>
-            <a:outerShdw sx="100000" sy="100000" kx="0" ky="0" algn="bl" rotWithShape="0" blurRad="50800" dist="25400" dir="8100000">
-              <a:srgbClr val="000000">
-                <a:alpha val="10000"/>
-              </a:srgbClr>
-            </a:outerShdw>
-          </a:effectLst>
-        </p:spPr>
-      </p:sp>
-      <p:sp>
-        <p:nvSpPr>
-          <p:cNvPr id="6" name="Shape 4"/>
-          <p:cNvSpPr/>
-          <p:nvPr/>
-        </p:nvSpPr>
-        <p:spPr>
-          <a:xfrm>
-            <a:off x="457200" y="1188720"/>
-            <a:ext cx="2560320" cy="54864"/>
-          </a:xfrm>
-          <a:prstGeom prst="rect">
-            <a:avLst/>
-          </a:prstGeom>
-          <a:solidFill>
-            <a:srgbClr val="2A9D8F"/>
-          </a:solidFill>
-          <a:ln/>
-        </p:spPr>
-      </p:sp>
-      <p:sp>
-        <p:nvSpPr>
-          <p:cNvPr id="7" name="Text 5"/>
-          <p:cNvSpPr/>
-          <p:nvPr/>
-        </p:nvSpPr>
-        <p:spPr>
-          <a:xfrm>
-            <a:off x="594360" y="1325880"/>
-            <a:ext cx="2286000" cy="365760"/>
-          </a:xfrm>
-          <a:prstGeom prst="rect">
-            <a:avLst/>
-          </a:prstGeom>
-          <a:noFill/>
-          <a:ln/>
-        </p:spPr>
-        <p:txBody>
-          <a:bodyPr wrap="square" rtlCol="0" anchor="ctr"/>
-          <a:lstStyle/>
-          <a:p>
-            <a:pPr indent="0" marL="0">
-              <a:buNone/>
-            </a:pPr>
-            <a:r>
-              <a:rPr lang="en-US" sz="1400" b="1" dirty="0">
-                <a:solidFill>
-                  <a:srgbClr val="1B2A4A"/>
+              <a:t>8 planets: Mercury, Venus, Earth, Mars (rocky) | Jupiter, Saturn, Uranus, Neptune (gas).</a:t>
+            </a:r>
+            <a:endParaRPr lang="en-US" sz="1500" dirty="0"/>
+          </a:p>
+          <a:p>
+            <a:pPr marL="342900" indent="-342900">
+              <a:spcAft>
+                <a:spcPts val="800"/>
+              </a:spcAft>
+              <a:buSzPct val="100000"/>
+              <a:buChar char="•"/>
+            </a:pPr>
+            <a:r>
+              <a:rPr lang="en-US" sz="1500" dirty="0">
+                <a:solidFill>
+                  <a:srgbClr val="3D3A36"/>
                 </a:solidFill>
                 <a:latin typeface="Calibri" pitchFamily="34" charset="0"/>
                 <a:ea typeface="Calibri" pitchFamily="34" charset="-122"/>
                 <a:cs typeface="Calibri" pitchFamily="34" charset="-120"/>
               </a:rPr>
-              <a:t>Milestones</a:t>
-            </a:r>
-            <a:endParaRPr lang="en-US" sz="1400" dirty="0"/>
-          </a:p>
-        </p:txBody>
-      </p:sp>
-      <p:sp>
-        <p:nvSpPr>
-          <p:cNvPr id="8" name="Text 6"/>
-          <p:cNvSpPr/>
-          <p:nvPr/>
-        </p:nvSpPr>
-        <p:spPr>
-          <a:xfrm>
-            <a:off x="594360" y="1737360"/>
-            <a:ext cx="2286000" cy="1097280"/>
-          </a:xfrm>
-          <a:prstGeom prst="rect">
-            <a:avLst/>
-          </a:prstGeom>
-          <a:noFill/>
-          <a:ln/>
-        </p:spPr>
-        <p:txBody>
-          <a:bodyPr wrap="square" rtlCol="0" anchor="t"/>
-          <a:lstStyle/>
-          <a:p>
-            <a:pPr indent="0" marL="0">
-              <a:buNone/>
-            </a:pPr>
-            <a:r>
-              <a:rPr lang="en-US" sz="1100" dirty="0">
+              <a:t>The Sun is a star — contains 99.8% of the solar system's mass.</a:t>
+            </a:r>
+            <a:endParaRPr lang="en-US" sz="1500" dirty="0"/>
+          </a:p>
+          <a:p>
+            <a:pPr marL="342900" indent="-342900">
+              <a:spcAft>
+                <a:spcPts val="800"/>
+              </a:spcAft>
+              <a:buSzPct val="100000"/>
+              <a:buChar char="•"/>
+            </a:pPr>
+            <a:r>
+              <a:rPr lang="en-US" sz="1500" dirty="0">
                 <a:solidFill>
                   <a:srgbClr val="3D3A36"/>
                 </a:solidFill>
@@ -2075,269 +2168,30 @@
                 <a:ea typeface="Calibri" pitchFamily="34" charset="-122"/>
                 <a:cs typeface="Calibri" pitchFamily="34" charset="-120"/>
               </a:rPr>
-              <a:t>Sputnik 1957. Moon landing 1969. ISS 1998–present. James Webb telescope 2022.</a:t>
-            </a:r>
-            <a:endParaRPr lang="en-US" sz="1100" dirty="0"/>
-          </a:p>
-        </p:txBody>
-      </p:sp>
-      <p:sp>
-        <p:nvSpPr>
-          <p:cNvPr id="9" name="Shape 7"/>
-          <p:cNvSpPr/>
-          <p:nvPr/>
-        </p:nvSpPr>
-        <p:spPr>
-          <a:xfrm>
-            <a:off x="3291840" y="1188720"/>
-            <a:ext cx="2560320" cy="1828800"/>
-          </a:xfrm>
-          <a:prstGeom prst="rect">
-            <a:avLst/>
-          </a:prstGeom>
-          <a:solidFill>
-            <a:srgbClr val="FFFFFF"/>
-          </a:solidFill>
-          <a:ln w="12700">
-            <a:solidFill>
-              <a:srgbClr val="E5E2DC"/>
-            </a:solidFill>
-            <a:prstDash val="solid"/>
-          </a:ln>
-          <a:effectLst>
-            <a:outerShdw sx="100000" sy="100000" kx="0" ky="0" algn="bl" rotWithShape="0" blurRad="50800" dist="25400" dir="8100000">
-              <a:srgbClr val="000000">
-                <a:alpha val="10000"/>
-              </a:srgbClr>
-            </a:outerShdw>
-          </a:effectLst>
-        </p:spPr>
-      </p:sp>
-      <p:sp>
-        <p:nvSpPr>
-          <p:cNvPr id="10" name="Shape 8"/>
-          <p:cNvSpPr/>
-          <p:nvPr/>
-        </p:nvSpPr>
-        <p:spPr>
-          <a:xfrm>
-            <a:off x="3291840" y="1188720"/>
-            <a:ext cx="2560320" cy="54864"/>
-          </a:xfrm>
-          <a:prstGeom prst="rect">
-            <a:avLst/>
-          </a:prstGeom>
-          <a:solidFill>
-            <a:srgbClr val="2A9D8F"/>
-          </a:solidFill>
-          <a:ln/>
-        </p:spPr>
-      </p:sp>
-      <p:sp>
-        <p:nvSpPr>
-          <p:cNvPr id="11" name="Text 9"/>
-          <p:cNvSpPr/>
-          <p:nvPr/>
-        </p:nvSpPr>
-        <p:spPr>
-          <a:xfrm>
-            <a:off x="3429000" y="1325880"/>
-            <a:ext cx="2286000" cy="365760"/>
-          </a:xfrm>
-          <a:prstGeom prst="rect">
-            <a:avLst/>
-          </a:prstGeom>
-          <a:noFill/>
-          <a:ln/>
-        </p:spPr>
-        <p:txBody>
-          <a:bodyPr wrap="square" rtlCol="0" anchor="ctr"/>
-          <a:lstStyle/>
-          <a:p>
-            <a:pPr indent="0" marL="0">
-              <a:buNone/>
-            </a:pPr>
-            <a:r>
-              <a:rPr lang="en-US" sz="1400" b="1" dirty="0">
-                <a:solidFill>
-                  <a:srgbClr val="1B2A4A"/>
+              <a:t>Gravity keeps planets in orbit. Farther planets orbit more slowly.</a:t>
+            </a:r>
+            <a:endParaRPr lang="en-US" sz="1500" dirty="0"/>
+          </a:p>
+          <a:p>
+            <a:pPr marL="342900" indent="-342900">
+              <a:spcAft>
+                <a:spcPts val="800"/>
+              </a:spcAft>
+              <a:buSzPct val="100000"/>
+              <a:buChar char="•"/>
+            </a:pPr>
+            <a:r>
+              <a:rPr lang="en-US" sz="1500" dirty="0">
+                <a:solidFill>
+                  <a:srgbClr val="3D3A36"/>
                 </a:solidFill>
                 <a:latin typeface="Calibri" pitchFamily="34" charset="0"/>
                 <a:ea typeface="Calibri" pitchFamily="34" charset="-122"/>
                 <a:cs typeface="Calibri" pitchFamily="34" charset="-120"/>
               </a:rPr>
-              <a:t>How We Explore</a:t>
-            </a:r>
-            <a:endParaRPr lang="en-US" sz="1400" dirty="0"/>
-          </a:p>
-        </p:txBody>
-      </p:sp>
-      <p:sp>
-        <p:nvSpPr>
-          <p:cNvPr id="12" name="Text 10"/>
-          <p:cNvSpPr/>
-          <p:nvPr/>
-        </p:nvSpPr>
-        <p:spPr>
-          <a:xfrm>
-            <a:off x="3429000" y="1737360"/>
-            <a:ext cx="2286000" cy="1097280"/>
-          </a:xfrm>
-          <a:prstGeom prst="rect">
-            <a:avLst/>
-          </a:prstGeom>
-          <a:noFill/>
-          <a:ln/>
-        </p:spPr>
-        <p:txBody>
-          <a:bodyPr wrap="square" rtlCol="0" anchor="t"/>
-          <a:lstStyle/>
-          <a:p>
-            <a:pPr indent="0" marL="0">
-              <a:buNone/>
-            </a:pPr>
-            <a:r>
-              <a:rPr lang="en-US" sz="1100" dirty="0">
-                <a:solidFill>
-                  <a:srgbClr val="3D3A36"/>
-                </a:solidFill>
-                <a:latin typeface="Calibri" pitchFamily="34" charset="0"/>
-                <a:ea typeface="Calibri" pitchFamily="34" charset="-122"/>
-                <a:cs typeface="Calibri" pitchFamily="34" charset="-120"/>
-              </a:rPr>
-              <a:t>Telescopes, probes, rovers, satellites, crewed missions. Each has different capabilities and limitations.</a:t>
-            </a:r>
-            <a:endParaRPr lang="en-US" sz="1100" dirty="0"/>
-          </a:p>
-        </p:txBody>
-      </p:sp>
-      <p:sp>
-        <p:nvSpPr>
-          <p:cNvPr id="13" name="Shape 11"/>
-          <p:cNvSpPr/>
-          <p:nvPr/>
-        </p:nvSpPr>
-        <p:spPr>
-          <a:xfrm>
-            <a:off x="6126480" y="1188720"/>
-            <a:ext cx="2560320" cy="1828800"/>
-          </a:xfrm>
-          <a:prstGeom prst="rect">
-            <a:avLst/>
-          </a:prstGeom>
-          <a:solidFill>
-            <a:srgbClr val="FFFFFF"/>
-          </a:solidFill>
-          <a:ln w="12700">
-            <a:solidFill>
-              <a:srgbClr val="E5E2DC"/>
-            </a:solidFill>
-            <a:prstDash val="solid"/>
-          </a:ln>
-          <a:effectLst>
-            <a:outerShdw sx="100000" sy="100000" kx="0" ky="0" algn="bl" rotWithShape="0" blurRad="50800" dist="25400" dir="8100000">
-              <a:srgbClr val="000000">
-                <a:alpha val="10000"/>
-              </a:srgbClr>
-            </a:outerShdw>
-          </a:effectLst>
-        </p:spPr>
-      </p:sp>
-      <p:sp>
-        <p:nvSpPr>
-          <p:cNvPr id="14" name="Shape 12"/>
-          <p:cNvSpPr/>
-          <p:nvPr/>
-        </p:nvSpPr>
-        <p:spPr>
-          <a:xfrm>
-            <a:off x="6126480" y="1188720"/>
-            <a:ext cx="2560320" cy="54864"/>
-          </a:xfrm>
-          <a:prstGeom prst="rect">
-            <a:avLst/>
-          </a:prstGeom>
-          <a:solidFill>
-            <a:srgbClr val="2A9D8F"/>
-          </a:solidFill>
-          <a:ln/>
-        </p:spPr>
-      </p:sp>
-      <p:sp>
-        <p:nvSpPr>
-          <p:cNvPr id="15" name="Text 13"/>
-          <p:cNvSpPr/>
-          <p:nvPr/>
-        </p:nvSpPr>
-        <p:spPr>
-          <a:xfrm>
-            <a:off x="6263640" y="1325880"/>
-            <a:ext cx="2286000" cy="365760"/>
-          </a:xfrm>
-          <a:prstGeom prst="rect">
-            <a:avLst/>
-          </a:prstGeom>
-          <a:noFill/>
-          <a:ln/>
-        </p:spPr>
-        <p:txBody>
-          <a:bodyPr wrap="square" rtlCol="0" anchor="ctr"/>
-          <a:lstStyle/>
-          <a:p>
-            <a:pPr indent="0" marL="0">
-              <a:buNone/>
-            </a:pPr>
-            <a:r>
-              <a:rPr lang="en-US" sz="1400" b="1" dirty="0">
-                <a:solidFill>
-                  <a:srgbClr val="1B2A4A"/>
-                </a:solidFill>
-                <a:latin typeface="Calibri" pitchFamily="34" charset="0"/>
-                <a:ea typeface="Calibri" pitchFamily="34" charset="-122"/>
-                <a:cs typeface="Calibri" pitchFamily="34" charset="-120"/>
-              </a:rPr>
-              <a:t>Future</a:t>
-            </a:r>
-            <a:endParaRPr lang="en-US" sz="1400" dirty="0"/>
-          </a:p>
-        </p:txBody>
-      </p:sp>
-      <p:sp>
-        <p:nvSpPr>
-          <p:cNvPr id="16" name="Text 14"/>
-          <p:cNvSpPr/>
-          <p:nvPr/>
-        </p:nvSpPr>
-        <p:spPr>
-          <a:xfrm>
-            <a:off x="6263640" y="1737360"/>
-            <a:ext cx="2286000" cy="1097280"/>
-          </a:xfrm>
-          <a:prstGeom prst="rect">
-            <a:avLst/>
-          </a:prstGeom>
-          <a:noFill/>
-          <a:ln/>
-        </p:spPr>
-        <p:txBody>
-          <a:bodyPr wrap="square" rtlCol="0" anchor="t"/>
-          <a:lstStyle/>
-          <a:p>
-            <a:pPr indent="0" marL="0">
-              <a:buNone/>
-            </a:pPr>
-            <a:r>
-              <a:rPr lang="en-US" sz="1100" dirty="0">
-                <a:solidFill>
-                  <a:srgbClr val="3D3A36"/>
-                </a:solidFill>
-                <a:latin typeface="Calibri" pitchFamily="34" charset="0"/>
-                <a:ea typeface="Calibri" pitchFamily="34" charset="-122"/>
-                <a:cs typeface="Calibri" pitchFamily="34" charset="-120"/>
-              </a:rPr>
-              <a:t>Artemis: Moon return. Mars missions 2030s. Reusable rockets. Search for extraterrestrial life.</a:t>
-            </a:r>
-            <a:endParaRPr lang="en-US" sz="1100" dirty="0"/>
+              <a:t>Also includes: dwarf planets, asteroids, comets, and 200+ moons.</a:t>
+            </a:r>
+            <a:endParaRPr lang="en-US" sz="1500" dirty="0"/>
           </a:p>
         </p:txBody>
       </p:sp>
@@ -2352,10 +2206,153 @@
 <file path=ppt/slides/slide4.xml><?xml version="1.0" encoding="utf-8"?>
 <p:sld xmlns:a="http://schemas.openxmlformats.org/drawingml/2006/main" xmlns:r="http://schemas.openxmlformats.org/officeDocument/2006/relationships" xmlns:p="http://schemas.openxmlformats.org/presentationml/2006/main">
   <p:cSld name="Slide 4">
+    <p:spTree>
+      <p:nvGrpSpPr>
+        <p:cNvPr id="1" name=""/>
+        <p:cNvGrpSpPr/>
+        <p:nvPr/>
+      </p:nvGrpSpPr>
+      <p:grpSpPr>
+        <a:xfrm>
+          <a:off x="0" y="0"/>
+          <a:ext cx="0" cy="0"/>
+          <a:chOff x="0" y="0"/>
+          <a:chExt cx="0" cy="0"/>
+        </a:xfrm>
+      </p:grpSpPr>
+      <p:sp>
+        <p:nvSpPr>
+          <p:cNvPr id="2" name="Shape 0"/>
+          <p:cNvSpPr/>
+          <p:nvPr/>
+        </p:nvSpPr>
+        <p:spPr>
+          <a:xfrm>
+            <a:off x="0" y="0"/>
+            <a:ext cx="9144000" cy="5143500"/>
+          </a:xfrm>
+          <a:prstGeom prst="rect">
+            <a:avLst/>
+          </a:prstGeom>
+          <a:solidFill>
+            <a:srgbClr val="1B2A4A"/>
+          </a:solidFill>
+          <a:ln/>
+        </p:spPr>
+      </p:sp>
+      <p:sp>
+        <p:nvSpPr>
+          <p:cNvPr id="3" name="Shape 1"/>
+          <p:cNvSpPr/>
+          <p:nvPr/>
+        </p:nvSpPr>
+        <p:spPr>
+          <a:xfrm>
+            <a:off x="731520" y="1828800"/>
+            <a:ext cx="73152" cy="1463040"/>
+          </a:xfrm>
+          <a:prstGeom prst="rect">
+            <a:avLst/>
+          </a:prstGeom>
+          <a:solidFill>
+            <a:srgbClr val="2A9D8F"/>
+          </a:solidFill>
+          <a:ln/>
+        </p:spPr>
+      </p:sp>
+      <p:sp>
+        <p:nvSpPr>
+          <p:cNvPr id="4" name="Text 2"/>
+          <p:cNvSpPr/>
+          <p:nvPr/>
+        </p:nvSpPr>
+        <p:spPr>
+          <a:xfrm>
+            <a:off x="1097280" y="1463040"/>
+            <a:ext cx="1097280" cy="1097280"/>
+          </a:xfrm>
+          <a:prstGeom prst="rect">
+            <a:avLst/>
+          </a:prstGeom>
+          <a:noFill/>
+          <a:ln/>
+        </p:spPr>
+        <p:txBody>
+          <a:bodyPr wrap="square" rtlCol="0" anchor="ctr"/>
+          <a:lstStyle/>
+          <a:p>
+            <a:pPr algn="l" indent="0" marL="0">
+              <a:buNone/>
+            </a:pPr>
+            <a:r>
+              <a:rPr lang="en-US" sz="4800" b="1" dirty="0">
+                <a:solidFill>
+                  <a:srgbClr val="2A9D8F"/>
+                </a:solidFill>
+                <a:latin typeface="Georgia" pitchFamily="34" charset="0"/>
+                <a:ea typeface="Georgia" pitchFamily="34" charset="-122"/>
+                <a:cs typeface="Georgia" pitchFamily="34" charset="-120"/>
+              </a:rPr>
+              <a:t>2</a:t>
+            </a:r>
+            <a:endParaRPr lang="en-US" sz="4800" dirty="0"/>
+          </a:p>
+        </p:txBody>
+      </p:sp>
+      <p:sp>
+        <p:nvSpPr>
+          <p:cNvPr id="5" name="Text 3"/>
+          <p:cNvSpPr/>
+          <p:nvPr/>
+        </p:nvSpPr>
+        <p:spPr>
+          <a:xfrm>
+            <a:off x="2194560" y="1920240"/>
+            <a:ext cx="5943600" cy="1097280"/>
+          </a:xfrm>
+          <a:prstGeom prst="rect">
+            <a:avLst/>
+          </a:prstGeom>
+          <a:noFill/>
+          <a:ln/>
+        </p:spPr>
+        <p:txBody>
+          <a:bodyPr wrap="square" rtlCol="0" anchor="ctr"/>
+          <a:lstStyle/>
+          <a:p>
+            <a:pPr indent="0" marL="0">
+              <a:buNone/>
+            </a:pPr>
+            <a:r>
+              <a:rPr lang="en-US" sz="3200" b="1" dirty="0">
+                <a:solidFill>
+                  <a:srgbClr val="FFFFFF"/>
+                </a:solidFill>
+                <a:latin typeface="Georgia" pitchFamily="34" charset="0"/>
+                <a:ea typeface="Georgia" pitchFamily="34" charset="-122"/>
+                <a:cs typeface="Georgia" pitchFamily="34" charset="-120"/>
+              </a:rPr>
+              <a:t>Earth, Moon &amp; Seasons</a:t>
+            </a:r>
+            <a:endParaRPr lang="en-US" sz="3200" dirty="0"/>
+          </a:p>
+        </p:txBody>
+      </p:sp>
+    </p:spTree>
+  </p:cSld>
+  <p:clrMapOvr>
+    <a:masterClrMapping/>
+  </p:clrMapOvr>
+</p:sld>
+</file>
+
+<file path=ppt/slides/slide5.xml><?xml version="1.0" encoding="utf-8"?>
+<p:sld xmlns:a="http://schemas.openxmlformats.org/drawingml/2006/main" xmlns:r="http://schemas.openxmlformats.org/officeDocument/2006/relationships" xmlns:p="http://schemas.openxmlformats.org/presentationml/2006/main">
+  <p:cSld name="Slide 5">
     <p:bg>
       <p:bgPr>
         <a:solidFill>
-          <a:srgbClr val="1B2A4A"/>
+          <a:srgbClr val="FAF8F5"/>
         </a:solidFill>
       </p:bgPr>
     </p:bg>
@@ -2382,27 +2379,67 @@
         <p:spPr>
           <a:xfrm>
             <a:off x="0" y="0"/>
-            <a:ext cx="109728" cy="5143500"/>
-          </a:xfrm>
-          <a:prstGeom prst="rect">
-            <a:avLst/>
-          </a:prstGeom>
-          <a:solidFill>
-            <a:srgbClr val="E9C46A"/>
-          </a:solidFill>
-          <a:ln/>
-        </p:spPr>
-      </p:sp>
-      <p:sp>
-        <p:nvSpPr>
-          <p:cNvPr id="3" name="Text 1"/>
-          <p:cNvSpPr/>
-          <p:nvPr/>
-        </p:nvSpPr>
-        <p:spPr>
-          <a:xfrm>
-            <a:off x="731520" y="457200"/>
-            <a:ext cx="7772400" cy="731520"/>
+            <a:ext cx="9144000" cy="822960"/>
+          </a:xfrm>
+          <a:prstGeom prst="rect">
+            <a:avLst/>
+          </a:prstGeom>
+          <a:solidFill>
+            <a:srgbClr val="FFFFFF"/>
+          </a:solidFill>
+          <a:ln/>
+        </p:spPr>
+      </p:sp>
+      <p:sp>
+        <p:nvSpPr>
+          <p:cNvPr id="3" name="Shape 1"/>
+          <p:cNvSpPr/>
+          <p:nvPr/>
+        </p:nvSpPr>
+        <p:spPr>
+          <a:xfrm>
+            <a:off x="0" y="804672"/>
+            <a:ext cx="9144000" cy="27432"/>
+          </a:xfrm>
+          <a:prstGeom prst="rect">
+            <a:avLst/>
+          </a:prstGeom>
+          <a:solidFill>
+            <a:srgbClr val="E5E2DC"/>
+          </a:solidFill>
+          <a:ln/>
+        </p:spPr>
+      </p:sp>
+      <p:sp>
+        <p:nvSpPr>
+          <p:cNvPr id="4" name="Shape 2"/>
+          <p:cNvSpPr/>
+          <p:nvPr/>
+        </p:nvSpPr>
+        <p:spPr>
+          <a:xfrm>
+            <a:off x="548640" y="201168"/>
+            <a:ext cx="54864" cy="420624"/>
+          </a:xfrm>
+          <a:prstGeom prst="rect">
+            <a:avLst/>
+          </a:prstGeom>
+          <a:solidFill>
+            <a:srgbClr val="2A9D8F"/>
+          </a:solidFill>
+          <a:ln/>
+        </p:spPr>
+      </p:sp>
+      <p:sp>
+        <p:nvSpPr>
+          <p:cNvPr id="5" name="Text 3"/>
+          <p:cNvSpPr/>
+          <p:nvPr/>
+        </p:nvSpPr>
+        <p:spPr>
+          <a:xfrm>
+            <a:off x="777240" y="137160"/>
+            <a:ext cx="7772400" cy="548640"/>
           </a:xfrm>
           <a:prstGeom prst="rect">
             <a:avLst/>
@@ -2411,37 +2448,37 @@
           <a:ln/>
         </p:spPr>
         <p:txBody>
-          <a:bodyPr wrap="square" rtlCol="0" anchor="ctr"/>
+          <a:bodyPr wrap="square" lIns="0" tIns="0" rIns="0" bIns="0" rtlCol="0" anchor="ctr"/>
           <a:lstStyle/>
           <a:p>
             <a:pPr indent="0" marL="0">
               <a:buNone/>
             </a:pPr>
             <a:r>
-              <a:rPr lang="en-US" sz="3200" b="1" dirty="0">
-                <a:solidFill>
-                  <a:srgbClr val="FFFFFF"/>
+              <a:rPr lang="en-US" sz="2000" b="1" dirty="0">
+                <a:solidFill>
+                  <a:srgbClr val="1B2A4A"/>
                 </a:solidFill>
                 <a:latin typeface="Georgia" pitchFamily="34" charset="0"/>
                 <a:ea typeface="Georgia" pitchFamily="34" charset="-122"/>
                 <a:cs typeface="Georgia" pitchFamily="34" charset="-120"/>
               </a:rPr>
-              <a:t>Key Takeaways</a:t>
-            </a:r>
-            <a:endParaRPr lang="en-US" sz="3200" dirty="0"/>
-          </a:p>
-        </p:txBody>
-      </p:sp>
-      <p:sp>
-        <p:nvSpPr>
-          <p:cNvPr id="4" name="Text 2"/>
-          <p:cNvSpPr/>
-          <p:nvPr/>
-        </p:nvSpPr>
-        <p:spPr>
-          <a:xfrm>
-            <a:off x="731520" y="1463040"/>
-            <a:ext cx="7772400" cy="3200400"/>
+              <a:t>Earth System Review</a:t>
+            </a:r>
+            <a:endParaRPr lang="en-US" sz="2000" dirty="0"/>
+          </a:p>
+        </p:txBody>
+      </p:sp>
+      <p:sp>
+        <p:nvSpPr>
+          <p:cNvPr id="6" name="Text 4"/>
+          <p:cNvSpPr/>
+          <p:nvPr/>
+        </p:nvSpPr>
+        <p:spPr>
+          <a:xfrm>
+            <a:off x="731520" y="1051560"/>
+            <a:ext cx="7680960" cy="3108960"/>
           </a:xfrm>
           <a:prstGeom prst="rect">
             <a:avLst/>
@@ -2455,7 +2492,7 @@
           <a:p>
             <a:pPr marL="342900" indent="-342900">
               <a:spcAft>
-                <a:spcPts val="1000"/>
+                <a:spcPts val="800"/>
               </a:spcAft>
               <a:buSzPct val="100000"/>
               <a:buChar char="•"/>
@@ -2463,20 +2500,20 @@
             <a:r>
               <a:rPr lang="en-US" sz="1500" dirty="0">
                 <a:solidFill>
-                  <a:srgbClr val="CADCFC"/>
+                  <a:srgbClr val="3D3A36"/>
                 </a:solidFill>
                 <a:latin typeface="Calibri" pitchFamily="34" charset="0"/>
                 <a:ea typeface="Calibri" pitchFamily="34" charset="-122"/>
                 <a:cs typeface="Calibri" pitchFamily="34" charset="-120"/>
               </a:rPr>
-              <a:t>8 planets: 4 inner rocky, 4 outer gas/ice giants</a:t>
+              <a:t>Day/night: caused by Earth's ROTATION (24 hours). NOT the Sun moving.</a:t>
             </a:r>
             <a:endParaRPr lang="en-US" sz="1500" dirty="0"/>
           </a:p>
           <a:p>
             <a:pPr marL="342900" indent="-342900">
               <a:spcAft>
-                <a:spcPts val="1000"/>
+                <a:spcPts val="800"/>
               </a:spcAft>
               <a:buSzPct val="100000"/>
               <a:buChar char="•"/>
@@ -2484,20 +2521,20 @@
             <a:r>
               <a:rPr lang="en-US" sz="1500" dirty="0">
                 <a:solidFill>
-                  <a:srgbClr val="CADCFC"/>
+                  <a:srgbClr val="3D3A36"/>
                 </a:solidFill>
                 <a:latin typeface="Calibri" pitchFamily="34" charset="0"/>
                 <a:ea typeface="Calibri" pitchFamily="34" charset="-122"/>
                 <a:cs typeface="Calibri" pitchFamily="34" charset="-120"/>
               </a:rPr>
-              <a:t>Day/night = rotation (24h); seasons = tilt (23.5°), NOT distance</a:t>
+              <a:t>Seasons: caused by Earth's 23.5° AXIAL TILT. NOT distance from Sun.</a:t>
             </a:r>
             <a:endParaRPr lang="en-US" sz="1500" dirty="0"/>
           </a:p>
           <a:p>
             <a:pPr marL="342900" indent="-342900">
               <a:spcAft>
-                <a:spcPts val="1000"/>
+                <a:spcPts val="800"/>
               </a:spcAft>
               <a:buSzPct val="100000"/>
               <a:buChar char="•"/>
@@ -2505,20 +2542,20 @@
             <a:r>
               <a:rPr lang="en-US" sz="1500" dirty="0">
                 <a:solidFill>
-                  <a:srgbClr val="CADCFC"/>
+                  <a:srgbClr val="3D3A36"/>
                 </a:solidFill>
                 <a:latin typeface="Calibri" pitchFamily="34" charset="0"/>
                 <a:ea typeface="Calibri" pitchFamily="34" charset="-122"/>
                 <a:cs typeface="Calibri" pitchFamily="34" charset="-120"/>
               </a:rPr>
-              <a:t>Moon phases cycle every 29.5 days</a:t>
+              <a:t>Moon phases: New → Waxing → Full → Waning → New (29.5 days).</a:t>
             </a:r>
             <a:endParaRPr lang="en-US" sz="1500" dirty="0"/>
           </a:p>
           <a:p>
             <a:pPr marL="342900" indent="-342900">
               <a:spcAft>
-                <a:spcPts val="1000"/>
+                <a:spcPts val="800"/>
               </a:spcAft>
               <a:buSzPct val="100000"/>
               <a:buChar char="•"/>
@@ -2526,20 +2563,20 @@
             <a:r>
               <a:rPr lang="en-US" sz="1500" dirty="0">
                 <a:solidFill>
-                  <a:srgbClr val="CADCFC"/>
+                  <a:srgbClr val="3D3A36"/>
                 </a:solidFill>
                 <a:latin typeface="Calibri" pitchFamily="34" charset="0"/>
                 <a:ea typeface="Calibri" pitchFamily="34" charset="-122"/>
                 <a:cs typeface="Calibri" pitchFamily="34" charset="-120"/>
               </a:rPr>
-              <a:t>Space milestones: Sputnik, Apollo 11, ISS, JWST</a:t>
+              <a:t>Tides: caused by the Moon's gravity pulling on Earth's oceans.</a:t>
             </a:r>
             <a:endParaRPr lang="en-US" sz="1500" dirty="0"/>
           </a:p>
           <a:p>
             <a:pPr marL="342900" indent="-342900">
               <a:spcAft>
-                <a:spcPts val="1000"/>
+                <a:spcPts val="800"/>
               </a:spcAft>
               <a:buSzPct val="100000"/>
               <a:buChar char="•"/>
@@ -2547,18 +2584,122 @@
             <a:r>
               <a:rPr lang="en-US" sz="1500" dirty="0">
                 <a:solidFill>
-                  <a:srgbClr val="CADCFC"/>
+                  <a:srgbClr val="3D3A36"/>
                 </a:solidFill>
                 <a:latin typeface="Calibri" pitchFamily="34" charset="0"/>
                 <a:ea typeface="Calibri" pitchFamily="34" charset="-122"/>
                 <a:cs typeface="Calibri" pitchFamily="34" charset="-120"/>
               </a:rPr>
-              <a:t>Future: Artemis Moon missions, Mars in 2030s, search for life</a:t>
+              <a:t>Eclipses: solar (Moon blocks Sun) or lunar (Earth's shadow on Moon).</a:t>
             </a:r>
             <a:endParaRPr lang="en-US" sz="1500" dirty="0"/>
           </a:p>
         </p:txBody>
       </p:sp>
+    </p:spTree>
+  </p:cSld>
+  <p:clrMapOvr>
+    <a:masterClrMapping/>
+  </p:clrMapOvr>
+</p:sld>
+</file>
+
+<file path=ppt/slides/slide6.xml><?xml version="1.0" encoding="utf-8"?>
+<p:sld xmlns:a="http://schemas.openxmlformats.org/drawingml/2006/main" xmlns:r="http://schemas.openxmlformats.org/officeDocument/2006/relationships" xmlns:p="http://schemas.openxmlformats.org/presentationml/2006/main">
+  <p:cSld name="Slide 6">
+    <p:spTree>
+      <p:nvGrpSpPr>
+        <p:cNvPr id="1" name=""/>
+        <p:cNvGrpSpPr/>
+        <p:nvPr/>
+      </p:nvGrpSpPr>
+      <p:grpSpPr>
+        <a:xfrm>
+          <a:off x="0" y="0"/>
+          <a:ext cx="0" cy="0"/>
+          <a:chOff x="0" y="0"/>
+          <a:chExt cx="0" cy="0"/>
+        </a:xfrm>
+      </p:grpSpPr>
+      <p:sp>
+        <p:nvSpPr>
+          <p:cNvPr id="2" name="Shape 0"/>
+          <p:cNvSpPr/>
+          <p:nvPr/>
+        </p:nvSpPr>
+        <p:spPr>
+          <a:xfrm>
+            <a:off x="0" y="0"/>
+            <a:ext cx="9144000" cy="5143500"/>
+          </a:xfrm>
+          <a:prstGeom prst="rect">
+            <a:avLst/>
+          </a:prstGeom>
+          <a:solidFill>
+            <a:srgbClr val="1B2A4A"/>
+          </a:solidFill>
+          <a:ln/>
+        </p:spPr>
+      </p:sp>
+      <p:sp>
+        <p:nvSpPr>
+          <p:cNvPr id="3" name="Shape 1"/>
+          <p:cNvSpPr/>
+          <p:nvPr/>
+        </p:nvSpPr>
+        <p:spPr>
+          <a:xfrm>
+            <a:off x="731520" y="1828800"/>
+            <a:ext cx="73152" cy="1463040"/>
+          </a:xfrm>
+          <a:prstGeom prst="rect">
+            <a:avLst/>
+          </a:prstGeom>
+          <a:solidFill>
+            <a:srgbClr val="2A9D8F"/>
+          </a:solidFill>
+          <a:ln/>
+        </p:spPr>
+      </p:sp>
+      <p:sp>
+        <p:nvSpPr>
+          <p:cNvPr id="4" name="Text 2"/>
+          <p:cNvSpPr/>
+          <p:nvPr/>
+        </p:nvSpPr>
+        <p:spPr>
+          <a:xfrm>
+            <a:off x="1097280" y="1463040"/>
+            <a:ext cx="1097280" cy="1097280"/>
+          </a:xfrm>
+          <a:prstGeom prst="rect">
+            <a:avLst/>
+          </a:prstGeom>
+          <a:noFill/>
+          <a:ln/>
+        </p:spPr>
+        <p:txBody>
+          <a:bodyPr wrap="square" rtlCol="0" anchor="ctr"/>
+          <a:lstStyle/>
+          <a:p>
+            <a:pPr algn="l" indent="0" marL="0">
+              <a:buNone/>
+            </a:pPr>
+            <a:r>
+              <a:rPr lang="en-US" sz="4800" b="1" dirty="0">
+                <a:solidFill>
+                  <a:srgbClr val="2A9D8F"/>
+                </a:solidFill>
+                <a:latin typeface="Georgia" pitchFamily="34" charset="0"/>
+                <a:ea typeface="Georgia" pitchFamily="34" charset="-122"/>
+                <a:cs typeface="Georgia" pitchFamily="34" charset="-120"/>
+              </a:rPr>
+              <a:t>3</a:t>
+            </a:r>
+            <a:endParaRPr lang="en-US" sz="4800" dirty="0"/>
+          </a:p>
+        </p:txBody>
+      </p:sp>
       <p:sp>
         <p:nvSpPr>
           <p:cNvPr id="5" name="Text 3"/>
@@ -2567,8 +2708,8 @@
         </p:nvSpPr>
         <p:spPr>
           <a:xfrm>
-            <a:off x="731520" y="4572000"/>
-            <a:ext cx="7772400" cy="365760"/>
+            <a:off x="2194560" y="1920240"/>
+            <a:ext cx="5943600" cy="1097280"/>
           </a:xfrm>
           <a:prstGeom prst="rect">
             <a:avLst/>
@@ -2584,17 +2725,1165 @@
               <a:buNone/>
             </a:pPr>
             <a:r>
-              <a:rPr lang="en-US" sz="1100" dirty="0">
-                <a:solidFill>
-                  <a:srgbClr val="E9C46A"/>
+              <a:rPr lang="en-US" sz="3200" b="1" dirty="0">
+                <a:solidFill>
+                  <a:srgbClr val="FFFFFF"/>
+                </a:solidFill>
+                <a:latin typeface="Georgia" pitchFamily="34" charset="0"/>
+                <a:ea typeface="Georgia" pitchFamily="34" charset="-122"/>
+                <a:cs typeface="Georgia" pitchFamily="34" charset="-120"/>
+              </a:rPr>
+              <a:t>Space Exploration</a:t>
+            </a:r>
+            <a:endParaRPr lang="en-US" sz="3200" dirty="0"/>
+          </a:p>
+        </p:txBody>
+      </p:sp>
+    </p:spTree>
+  </p:cSld>
+  <p:clrMapOvr>
+    <a:masterClrMapping/>
+  </p:clrMapOvr>
+</p:sld>
+</file>
+
+<file path=ppt/slides/slide7.xml><?xml version="1.0" encoding="utf-8"?>
+<p:sld xmlns:a="http://schemas.openxmlformats.org/drawingml/2006/main" xmlns:r="http://schemas.openxmlformats.org/officeDocument/2006/relationships" xmlns:p="http://schemas.openxmlformats.org/presentationml/2006/main">
+  <p:cSld name="Slide 7">
+    <p:bg>
+      <p:bgPr>
+        <a:solidFill>
+          <a:srgbClr val="FAF8F5"/>
+        </a:solidFill>
+      </p:bgPr>
+    </p:bg>
+    <p:spTree>
+      <p:nvGrpSpPr>
+        <p:cNvPr id="1" name=""/>
+        <p:cNvGrpSpPr/>
+        <p:nvPr/>
+      </p:nvGrpSpPr>
+      <p:grpSpPr>
+        <a:xfrm>
+          <a:off x="0" y="0"/>
+          <a:ext cx="0" cy="0"/>
+          <a:chOff x="0" y="0"/>
+          <a:chExt cx="0" cy="0"/>
+        </a:xfrm>
+      </p:grpSpPr>
+      <p:sp>
+        <p:nvSpPr>
+          <p:cNvPr id="2" name="Shape 0"/>
+          <p:cNvSpPr/>
+          <p:nvPr/>
+        </p:nvSpPr>
+        <p:spPr>
+          <a:xfrm>
+            <a:off x="0" y="0"/>
+            <a:ext cx="9144000" cy="822960"/>
+          </a:xfrm>
+          <a:prstGeom prst="rect">
+            <a:avLst/>
+          </a:prstGeom>
+          <a:solidFill>
+            <a:srgbClr val="FFFFFF"/>
+          </a:solidFill>
+          <a:ln/>
+        </p:spPr>
+      </p:sp>
+      <p:sp>
+        <p:nvSpPr>
+          <p:cNvPr id="3" name="Shape 1"/>
+          <p:cNvSpPr/>
+          <p:nvPr/>
+        </p:nvSpPr>
+        <p:spPr>
+          <a:xfrm>
+            <a:off x="0" y="804672"/>
+            <a:ext cx="9144000" cy="27432"/>
+          </a:xfrm>
+          <a:prstGeom prst="rect">
+            <a:avLst/>
+          </a:prstGeom>
+          <a:solidFill>
+            <a:srgbClr val="E5E2DC"/>
+          </a:solidFill>
+          <a:ln/>
+        </p:spPr>
+      </p:sp>
+      <p:sp>
+        <p:nvSpPr>
+          <p:cNvPr id="4" name="Shape 2"/>
+          <p:cNvSpPr/>
+          <p:nvPr/>
+        </p:nvSpPr>
+        <p:spPr>
+          <a:xfrm>
+            <a:off x="548640" y="201168"/>
+            <a:ext cx="54864" cy="420624"/>
+          </a:xfrm>
+          <a:prstGeom prst="rect">
+            <a:avLst/>
+          </a:prstGeom>
+          <a:solidFill>
+            <a:srgbClr val="2A9D8F"/>
+          </a:solidFill>
+          <a:ln/>
+        </p:spPr>
+      </p:sp>
+      <p:sp>
+        <p:nvSpPr>
+          <p:cNvPr id="5" name="Text 3"/>
+          <p:cNvSpPr/>
+          <p:nvPr/>
+        </p:nvSpPr>
+        <p:spPr>
+          <a:xfrm>
+            <a:off x="777240" y="137160"/>
+            <a:ext cx="7772400" cy="548640"/>
+          </a:xfrm>
+          <a:prstGeom prst="rect">
+            <a:avLst/>
+          </a:prstGeom>
+          <a:noFill/>
+          <a:ln/>
+        </p:spPr>
+        <p:txBody>
+          <a:bodyPr wrap="square" lIns="0" tIns="0" rIns="0" bIns="0" rtlCol="0" anchor="ctr"/>
+          <a:lstStyle/>
+          <a:p>
+            <a:pPr indent="0" marL="0">
+              <a:buNone/>
+            </a:pPr>
+            <a:r>
+              <a:rPr lang="en-US" sz="2000" b="1" dirty="0">
+                <a:solidFill>
+                  <a:srgbClr val="1B2A4A"/>
+                </a:solidFill>
+                <a:latin typeface="Georgia" pitchFamily="34" charset="0"/>
+                <a:ea typeface="Georgia" pitchFamily="34" charset="-122"/>
+                <a:cs typeface="Georgia" pitchFamily="34" charset="-120"/>
+              </a:rPr>
+              <a:t>Exploration Review</a:t>
+            </a:r>
+            <a:endParaRPr lang="en-US" sz="2000" dirty="0"/>
+          </a:p>
+        </p:txBody>
+      </p:sp>
+      <p:sp>
+        <p:nvSpPr>
+          <p:cNvPr id="6" name="Text 4"/>
+          <p:cNvSpPr/>
+          <p:nvPr/>
+        </p:nvSpPr>
+        <p:spPr>
+          <a:xfrm>
+            <a:off x="731520" y="1051560"/>
+            <a:ext cx="7680960" cy="3108960"/>
+          </a:xfrm>
+          <a:prstGeom prst="rect">
+            <a:avLst/>
+          </a:prstGeom>
+          <a:noFill/>
+          <a:ln/>
+        </p:spPr>
+        <p:txBody>
+          <a:bodyPr wrap="square" rtlCol="0" anchor="t"/>
+          <a:lstStyle/>
+          <a:p>
+            <a:pPr marL="342900" indent="-342900">
+              <a:spcAft>
+                <a:spcPts val="800"/>
+              </a:spcAft>
+              <a:buSzPct val="100000"/>
+              <a:buChar char="•"/>
+            </a:pPr>
+            <a:r>
+              <a:rPr lang="en-US" sz="1500" dirty="0">
+                <a:solidFill>
+                  <a:srgbClr val="3D3A36"/>
                 </a:solidFill>
                 <a:latin typeface="Calibri" pitchFamily="34" charset="0"/>
                 <a:ea typeface="Calibri" pitchFamily="34" charset="-122"/>
                 <a:cs typeface="Calibri" pitchFamily="34" charset="-120"/>
               </a:rPr>
+              <a:t>Methods: telescopes, satellites, probes, rovers, crewed missions.</a:t>
+            </a:r>
+            <a:endParaRPr lang="en-US" sz="1500" dirty="0"/>
+          </a:p>
+          <a:p>
+            <a:pPr marL="342900" indent="-342900">
+              <a:spcAft>
+                <a:spcPts val="800"/>
+              </a:spcAft>
+              <a:buSzPct val="100000"/>
+              <a:buChar char="•"/>
+            </a:pPr>
+            <a:r>
+              <a:rPr lang="en-US" sz="1500" dirty="0">
+                <a:solidFill>
+                  <a:srgbClr val="3D3A36"/>
+                </a:solidFill>
+                <a:latin typeface="Calibri" pitchFamily="34" charset="0"/>
+                <a:ea typeface="Calibri" pitchFamily="34" charset="-122"/>
+                <a:cs typeface="Calibri" pitchFamily="34" charset="-120"/>
+              </a:rPr>
+              <a:t>Key events: Sputnik (1957), Moon landing (1969), ISS (1998), JWST (2021).</a:t>
+            </a:r>
+            <a:endParaRPr lang="en-US" sz="1500" dirty="0"/>
+          </a:p>
+          <a:p>
+            <a:pPr marL="342900" indent="-342900">
+              <a:spcAft>
+                <a:spcPts val="800"/>
+              </a:spcAft>
+              <a:buSzPct val="100000"/>
+              <a:buChar char="•"/>
+            </a:pPr>
+            <a:r>
+              <a:rPr lang="en-US" sz="1500" dirty="0">
+                <a:solidFill>
+                  <a:srgbClr val="3D3A36"/>
+                </a:solidFill>
+                <a:latin typeface="Calibri" pitchFamily="34" charset="0"/>
+                <a:ea typeface="Calibri" pitchFamily="34" charset="-122"/>
+                <a:cs typeface="Calibri" pitchFamily="34" charset="-120"/>
+              </a:rPr>
+              <a:t>China: Zhurong rover on Mars (2021), Tiangong space station.</a:t>
+            </a:r>
+            <a:endParaRPr lang="en-US" sz="1500" dirty="0"/>
+          </a:p>
+          <a:p>
+            <a:pPr marL="342900" indent="-342900">
+              <a:spcAft>
+                <a:spcPts val="800"/>
+              </a:spcAft>
+              <a:buSzPct val="100000"/>
+              <a:buChar char="•"/>
+            </a:pPr>
+            <a:r>
+              <a:rPr lang="en-US" sz="1500" dirty="0">
+                <a:solidFill>
+                  <a:srgbClr val="3D3A36"/>
+                </a:solidFill>
+                <a:latin typeface="Calibri" pitchFamily="34" charset="0"/>
+                <a:ea typeface="Calibri" pitchFamily="34" charset="-122"/>
+                <a:cs typeface="Calibri" pitchFamily="34" charset="-120"/>
+              </a:rPr>
+              <a:t>Benefits: GPS, weather, medicine, climate research, inspiration.</a:t>
+            </a:r>
+            <a:endParaRPr lang="en-US" sz="1500" dirty="0"/>
+          </a:p>
+          <a:p>
+            <a:pPr marL="342900" indent="-342900">
+              <a:spcAft>
+                <a:spcPts val="800"/>
+              </a:spcAft>
+              <a:buSzPct val="100000"/>
+              <a:buChar char="•"/>
+            </a:pPr>
+            <a:r>
+              <a:rPr lang="en-US" sz="1500" dirty="0">
+                <a:solidFill>
+                  <a:srgbClr val="3D3A36"/>
+                </a:solidFill>
+                <a:latin typeface="Calibri" pitchFamily="34" charset="0"/>
+                <a:ea typeface="Calibri" pitchFamily="34" charset="-122"/>
+                <a:cs typeface="Calibri" pitchFamily="34" charset="-120"/>
+              </a:rPr>
+              <a:t>Challenges: cost, danger, space debris, ethical questions.</a:t>
+            </a:r>
+            <a:endParaRPr lang="en-US" sz="1500" dirty="0"/>
+          </a:p>
+        </p:txBody>
+      </p:sp>
+    </p:spTree>
+  </p:cSld>
+  <p:clrMapOvr>
+    <a:masterClrMapping/>
+  </p:clrMapOvr>
+</p:sld>
+</file>
+
+<file path=ppt/slides/slide8.xml><?xml version="1.0" encoding="utf-8"?>
+<p:sld xmlns:a="http://schemas.openxmlformats.org/drawingml/2006/main" xmlns:r="http://schemas.openxmlformats.org/officeDocument/2006/relationships" xmlns:p="http://schemas.openxmlformats.org/presentationml/2006/main">
+  <p:cSld name="Slide 8">
+    <p:bg>
+      <p:bgPr>
+        <a:solidFill>
+          <a:srgbClr val="FAF8F5"/>
+        </a:solidFill>
+      </p:bgPr>
+    </p:bg>
+    <p:spTree>
+      <p:nvGrpSpPr>
+        <p:cNvPr id="1" name=""/>
+        <p:cNvGrpSpPr/>
+        <p:nvPr/>
+      </p:nvGrpSpPr>
+      <p:grpSpPr>
+        <a:xfrm>
+          <a:off x="0" y="0"/>
+          <a:ext cx="0" cy="0"/>
+          <a:chOff x="0" y="0"/>
+          <a:chExt cx="0" cy="0"/>
+        </a:xfrm>
+      </p:grpSpPr>
+      <p:sp>
+        <p:nvSpPr>
+          <p:cNvPr id="2" name="Shape 0"/>
+          <p:cNvSpPr/>
+          <p:nvPr/>
+        </p:nvSpPr>
+        <p:spPr>
+          <a:xfrm>
+            <a:off x="0" y="0"/>
+            <a:ext cx="9144000" cy="822960"/>
+          </a:xfrm>
+          <a:prstGeom prst="rect">
+            <a:avLst/>
+          </a:prstGeom>
+          <a:solidFill>
+            <a:srgbClr val="FFFFFF"/>
+          </a:solidFill>
+          <a:ln/>
+        </p:spPr>
+      </p:sp>
+      <p:sp>
+        <p:nvSpPr>
+          <p:cNvPr id="3" name="Shape 1"/>
+          <p:cNvSpPr/>
+          <p:nvPr/>
+        </p:nvSpPr>
+        <p:spPr>
+          <a:xfrm>
+            <a:off x="0" y="804672"/>
+            <a:ext cx="9144000" cy="27432"/>
+          </a:xfrm>
+          <a:prstGeom prst="rect">
+            <a:avLst/>
+          </a:prstGeom>
+          <a:solidFill>
+            <a:srgbClr val="E5E2DC"/>
+          </a:solidFill>
+          <a:ln/>
+        </p:spPr>
+      </p:sp>
+      <p:sp>
+        <p:nvSpPr>
+          <p:cNvPr id="4" name="Shape 2"/>
+          <p:cNvSpPr/>
+          <p:nvPr/>
+        </p:nvSpPr>
+        <p:spPr>
+          <a:xfrm>
+            <a:off x="548640" y="201168"/>
+            <a:ext cx="54864" cy="420624"/>
+          </a:xfrm>
+          <a:prstGeom prst="rect">
+            <a:avLst/>
+          </a:prstGeom>
+          <a:solidFill>
+            <a:srgbClr val="2A9D8F"/>
+          </a:solidFill>
+          <a:ln/>
+        </p:spPr>
+      </p:sp>
+      <p:sp>
+        <p:nvSpPr>
+          <p:cNvPr id="5" name="Text 3"/>
+          <p:cNvSpPr/>
+          <p:nvPr/>
+        </p:nvSpPr>
+        <p:spPr>
+          <a:xfrm>
+            <a:off x="777240" y="137160"/>
+            <a:ext cx="7772400" cy="548640"/>
+          </a:xfrm>
+          <a:prstGeom prst="rect">
+            <a:avLst/>
+          </a:prstGeom>
+          <a:noFill/>
+          <a:ln/>
+        </p:spPr>
+        <p:txBody>
+          <a:bodyPr wrap="square" lIns="0" tIns="0" rIns="0" bIns="0" rtlCol="0" anchor="ctr"/>
+          <a:lstStyle/>
+          <a:p>
+            <a:pPr indent="0" marL="0">
+              <a:buNone/>
+            </a:pPr>
+            <a:r>
+              <a:rPr lang="en-US" sz="2000" b="1" dirty="0">
+                <a:solidFill>
+                  <a:srgbClr val="1B2A4A"/>
+                </a:solidFill>
+                <a:latin typeface="Georgia" pitchFamily="34" charset="0"/>
+                <a:ea typeface="Georgia" pitchFamily="34" charset="-122"/>
+                <a:cs typeface="Georgia" pitchFamily="34" charset="-120"/>
+              </a:rPr>
+              <a:t>Final Revision Checklist</a:t>
+            </a:r>
+            <a:endParaRPr lang="en-US" sz="2000" dirty="0"/>
+          </a:p>
+        </p:txBody>
+      </p:sp>
+      <p:sp>
+        <p:nvSpPr>
+          <p:cNvPr id="6" name="Shape 4"/>
+          <p:cNvSpPr/>
+          <p:nvPr/>
+        </p:nvSpPr>
+        <p:spPr>
+          <a:xfrm>
+            <a:off x="731520" y="1051560"/>
+            <a:ext cx="7680960" cy="438912"/>
+          </a:xfrm>
+          <a:prstGeom prst="rect">
+            <a:avLst/>
+          </a:prstGeom>
+          <a:solidFill>
+            <a:srgbClr val="FFFFFF"/>
+          </a:solidFill>
+          <a:ln/>
+        </p:spPr>
+      </p:sp>
+      <p:sp>
+        <p:nvSpPr>
+          <p:cNvPr id="7" name="Text 5"/>
+          <p:cNvSpPr/>
+          <p:nvPr/>
+        </p:nvSpPr>
+        <p:spPr>
+          <a:xfrm>
+            <a:off x="868680" y="1051560"/>
+            <a:ext cx="320040" cy="438912"/>
+          </a:xfrm>
+          <a:prstGeom prst="rect">
+            <a:avLst/>
+          </a:prstGeom>
+          <a:noFill/>
+          <a:ln/>
+        </p:spPr>
+        <p:txBody>
+          <a:bodyPr wrap="square" rtlCol="0" anchor="ctr"/>
+          <a:lstStyle/>
+          <a:p>
+            <a:pPr indent="0" marL="0">
+              <a:buNone/>
+            </a:pPr>
+            <a:r>
+              <a:rPr lang="en-US" sz="1400" dirty="0">
+                <a:solidFill>
+                  <a:srgbClr val="2A9D8F"/>
+                </a:solidFill>
+              </a:rPr>
+              <a:t>☐</a:t>
+            </a:r>
+            <a:endParaRPr lang="en-US" sz="1400" dirty="0"/>
+          </a:p>
+        </p:txBody>
+      </p:sp>
+      <p:sp>
+        <p:nvSpPr>
+          <p:cNvPr id="8" name="Text 6"/>
+          <p:cNvSpPr/>
+          <p:nvPr/>
+        </p:nvSpPr>
+        <p:spPr>
+          <a:xfrm>
+            <a:off x="1234440" y="1051560"/>
+            <a:ext cx="6949440" cy="438912"/>
+          </a:xfrm>
+          <a:prstGeom prst="rect">
+            <a:avLst/>
+          </a:prstGeom>
+          <a:noFill/>
+          <a:ln/>
+        </p:spPr>
+        <p:txBody>
+          <a:bodyPr wrap="square" rtlCol="0" anchor="ctr"/>
+          <a:lstStyle/>
+          <a:p>
+            <a:pPr indent="0" marL="0">
+              <a:buNone/>
+            </a:pPr>
+            <a:r>
+              <a:rPr lang="en-US" sz="1300" dirty="0">
+                <a:solidFill>
+                  <a:srgbClr val="3D3A36"/>
+                </a:solidFill>
+                <a:latin typeface="Calibri" pitchFamily="34" charset="0"/>
+                <a:ea typeface="Calibri" pitchFamily="34" charset="-122"/>
+                <a:cs typeface="Calibri" pitchFamily="34" charset="-120"/>
+              </a:rPr>
+              <a:t>8 planets in order — rocky vs gas giants</a:t>
+            </a:r>
+            <a:endParaRPr lang="en-US" sz="1300" dirty="0"/>
+          </a:p>
+        </p:txBody>
+      </p:sp>
+      <p:sp>
+        <p:nvSpPr>
+          <p:cNvPr id="9" name="Shape 7"/>
+          <p:cNvSpPr/>
+          <p:nvPr/>
+        </p:nvSpPr>
+        <p:spPr>
+          <a:xfrm>
+            <a:off x="731520" y="1554480"/>
+            <a:ext cx="7680960" cy="438912"/>
+          </a:xfrm>
+          <a:prstGeom prst="rect">
+            <a:avLst/>
+          </a:prstGeom>
+          <a:solidFill>
+            <a:srgbClr val="F8F6F3"/>
+          </a:solidFill>
+          <a:ln/>
+        </p:spPr>
+      </p:sp>
+      <p:sp>
+        <p:nvSpPr>
+          <p:cNvPr id="10" name="Text 8"/>
+          <p:cNvSpPr/>
+          <p:nvPr/>
+        </p:nvSpPr>
+        <p:spPr>
+          <a:xfrm>
+            <a:off x="868680" y="1554480"/>
+            <a:ext cx="320040" cy="438912"/>
+          </a:xfrm>
+          <a:prstGeom prst="rect">
+            <a:avLst/>
+          </a:prstGeom>
+          <a:noFill/>
+          <a:ln/>
+        </p:spPr>
+        <p:txBody>
+          <a:bodyPr wrap="square" rtlCol="0" anchor="ctr"/>
+          <a:lstStyle/>
+          <a:p>
+            <a:pPr indent="0" marL="0">
+              <a:buNone/>
+            </a:pPr>
+            <a:r>
+              <a:rPr lang="en-US" sz="1400" dirty="0">
+                <a:solidFill>
+                  <a:srgbClr val="2A9D8F"/>
+                </a:solidFill>
+              </a:rPr>
+              <a:t>☐</a:t>
+            </a:r>
+            <a:endParaRPr lang="en-US" sz="1400" dirty="0"/>
+          </a:p>
+        </p:txBody>
+      </p:sp>
+      <p:sp>
+        <p:nvSpPr>
+          <p:cNvPr id="11" name="Text 9"/>
+          <p:cNvSpPr/>
+          <p:nvPr/>
+        </p:nvSpPr>
+        <p:spPr>
+          <a:xfrm>
+            <a:off x="1234440" y="1554480"/>
+            <a:ext cx="6949440" cy="438912"/>
+          </a:xfrm>
+          <a:prstGeom prst="rect">
+            <a:avLst/>
+          </a:prstGeom>
+          <a:noFill/>
+          <a:ln/>
+        </p:spPr>
+        <p:txBody>
+          <a:bodyPr wrap="square" rtlCol="0" anchor="ctr"/>
+          <a:lstStyle/>
+          <a:p>
+            <a:pPr indent="0" marL="0">
+              <a:buNone/>
+            </a:pPr>
+            <a:r>
+              <a:rPr lang="en-US" sz="1300" dirty="0">
+                <a:solidFill>
+                  <a:srgbClr val="3D3A36"/>
+                </a:solidFill>
+                <a:latin typeface="Calibri" pitchFamily="34" charset="0"/>
+                <a:ea typeface="Calibri" pitchFamily="34" charset="-122"/>
+                <a:cs typeface="Calibri" pitchFamily="34" charset="-120"/>
+              </a:rPr>
+              <a:t>Day/night from rotation, seasons from axial tilt</a:t>
+            </a:r>
+            <a:endParaRPr lang="en-US" sz="1300" dirty="0"/>
+          </a:p>
+        </p:txBody>
+      </p:sp>
+      <p:sp>
+        <p:nvSpPr>
+          <p:cNvPr id="12" name="Shape 10"/>
+          <p:cNvSpPr/>
+          <p:nvPr/>
+        </p:nvSpPr>
+        <p:spPr>
+          <a:xfrm>
+            <a:off x="731520" y="2057400"/>
+            <a:ext cx="7680960" cy="438912"/>
+          </a:xfrm>
+          <a:prstGeom prst="rect">
+            <a:avLst/>
+          </a:prstGeom>
+          <a:solidFill>
+            <a:srgbClr val="FFFFFF"/>
+          </a:solidFill>
+          <a:ln/>
+        </p:spPr>
+      </p:sp>
+      <p:sp>
+        <p:nvSpPr>
+          <p:cNvPr id="13" name="Text 11"/>
+          <p:cNvSpPr/>
+          <p:nvPr/>
+        </p:nvSpPr>
+        <p:spPr>
+          <a:xfrm>
+            <a:off x="868680" y="2057400"/>
+            <a:ext cx="320040" cy="438912"/>
+          </a:xfrm>
+          <a:prstGeom prst="rect">
+            <a:avLst/>
+          </a:prstGeom>
+          <a:noFill/>
+          <a:ln/>
+        </p:spPr>
+        <p:txBody>
+          <a:bodyPr wrap="square" rtlCol="0" anchor="ctr"/>
+          <a:lstStyle/>
+          <a:p>
+            <a:pPr indent="0" marL="0">
+              <a:buNone/>
+            </a:pPr>
+            <a:r>
+              <a:rPr lang="en-US" sz="1400" dirty="0">
+                <a:solidFill>
+                  <a:srgbClr val="2A9D8F"/>
+                </a:solidFill>
+              </a:rPr>
+              <a:t>☐</a:t>
+            </a:r>
+            <a:endParaRPr lang="en-US" sz="1400" dirty="0"/>
+          </a:p>
+        </p:txBody>
+      </p:sp>
+      <p:sp>
+        <p:nvSpPr>
+          <p:cNvPr id="14" name="Text 12"/>
+          <p:cNvSpPr/>
+          <p:nvPr/>
+        </p:nvSpPr>
+        <p:spPr>
+          <a:xfrm>
+            <a:off x="1234440" y="2057400"/>
+            <a:ext cx="6949440" cy="438912"/>
+          </a:xfrm>
+          <a:prstGeom prst="rect">
+            <a:avLst/>
+          </a:prstGeom>
+          <a:noFill/>
+          <a:ln/>
+        </p:spPr>
+        <p:txBody>
+          <a:bodyPr wrap="square" rtlCol="0" anchor="ctr"/>
+          <a:lstStyle/>
+          <a:p>
+            <a:pPr indent="0" marL="0">
+              <a:buNone/>
+            </a:pPr>
+            <a:r>
+              <a:rPr lang="en-US" sz="1300" dirty="0">
+                <a:solidFill>
+                  <a:srgbClr val="3D3A36"/>
+                </a:solidFill>
+                <a:latin typeface="Calibri" pitchFamily="34" charset="0"/>
+                <a:ea typeface="Calibri" pitchFamily="34" charset="-122"/>
+                <a:cs typeface="Calibri" pitchFamily="34" charset="-120"/>
+              </a:rPr>
+              <a:t>Moon phases, eclipses, and tides</a:t>
+            </a:r>
+            <a:endParaRPr lang="en-US" sz="1300" dirty="0"/>
+          </a:p>
+        </p:txBody>
+      </p:sp>
+      <p:sp>
+        <p:nvSpPr>
+          <p:cNvPr id="15" name="Shape 13"/>
+          <p:cNvSpPr/>
+          <p:nvPr/>
+        </p:nvSpPr>
+        <p:spPr>
+          <a:xfrm>
+            <a:off x="731520" y="2560320"/>
+            <a:ext cx="7680960" cy="438912"/>
+          </a:xfrm>
+          <a:prstGeom prst="rect">
+            <a:avLst/>
+          </a:prstGeom>
+          <a:solidFill>
+            <a:srgbClr val="F8F6F3"/>
+          </a:solidFill>
+          <a:ln/>
+        </p:spPr>
+      </p:sp>
+      <p:sp>
+        <p:nvSpPr>
+          <p:cNvPr id="16" name="Text 14"/>
+          <p:cNvSpPr/>
+          <p:nvPr/>
+        </p:nvSpPr>
+        <p:spPr>
+          <a:xfrm>
+            <a:off x="868680" y="2560320"/>
+            <a:ext cx="320040" cy="438912"/>
+          </a:xfrm>
+          <a:prstGeom prst="rect">
+            <a:avLst/>
+          </a:prstGeom>
+          <a:noFill/>
+          <a:ln/>
+        </p:spPr>
+        <p:txBody>
+          <a:bodyPr wrap="square" rtlCol="0" anchor="ctr"/>
+          <a:lstStyle/>
+          <a:p>
+            <a:pPr indent="0" marL="0">
+              <a:buNone/>
+            </a:pPr>
+            <a:r>
+              <a:rPr lang="en-US" sz="1400" dirty="0">
+                <a:solidFill>
+                  <a:srgbClr val="2A9D8F"/>
+                </a:solidFill>
+              </a:rPr>
+              <a:t>☐</a:t>
+            </a:r>
+            <a:endParaRPr lang="en-US" sz="1400" dirty="0"/>
+          </a:p>
+        </p:txBody>
+      </p:sp>
+      <p:sp>
+        <p:nvSpPr>
+          <p:cNvPr id="17" name="Text 15"/>
+          <p:cNvSpPr/>
+          <p:nvPr/>
+        </p:nvSpPr>
+        <p:spPr>
+          <a:xfrm>
+            <a:off x="1234440" y="2560320"/>
+            <a:ext cx="6949440" cy="438912"/>
+          </a:xfrm>
+          <a:prstGeom prst="rect">
+            <a:avLst/>
+          </a:prstGeom>
+          <a:noFill/>
+          <a:ln/>
+        </p:spPr>
+        <p:txBody>
+          <a:bodyPr wrap="square" rtlCol="0" anchor="ctr"/>
+          <a:lstStyle/>
+          <a:p>
+            <a:pPr indent="0" marL="0">
+              <a:buNone/>
+            </a:pPr>
+            <a:r>
+              <a:rPr lang="en-US" sz="1300" dirty="0">
+                <a:solidFill>
+                  <a:srgbClr val="3D3A36"/>
+                </a:solidFill>
+                <a:latin typeface="Calibri" pitchFamily="34" charset="0"/>
+                <a:ea typeface="Calibri" pitchFamily="34" charset="-122"/>
+                <a:cs typeface="Calibri" pitchFamily="34" charset="-120"/>
+              </a:rPr>
+              <a:t>Methods and milestones of space exploration</a:t>
+            </a:r>
+            <a:endParaRPr lang="en-US" sz="1300" dirty="0"/>
+          </a:p>
+        </p:txBody>
+      </p:sp>
+      <p:sp>
+        <p:nvSpPr>
+          <p:cNvPr id="18" name="Shape 16"/>
+          <p:cNvSpPr/>
+          <p:nvPr/>
+        </p:nvSpPr>
+        <p:spPr>
+          <a:xfrm>
+            <a:off x="731520" y="3063240"/>
+            <a:ext cx="7680960" cy="438912"/>
+          </a:xfrm>
+          <a:prstGeom prst="rect">
+            <a:avLst/>
+          </a:prstGeom>
+          <a:solidFill>
+            <a:srgbClr val="FFFFFF"/>
+          </a:solidFill>
+          <a:ln/>
+        </p:spPr>
+      </p:sp>
+      <p:sp>
+        <p:nvSpPr>
+          <p:cNvPr id="19" name="Text 17"/>
+          <p:cNvSpPr/>
+          <p:nvPr/>
+        </p:nvSpPr>
+        <p:spPr>
+          <a:xfrm>
+            <a:off x="868680" y="3063240"/>
+            <a:ext cx="320040" cy="438912"/>
+          </a:xfrm>
+          <a:prstGeom prst="rect">
+            <a:avLst/>
+          </a:prstGeom>
+          <a:noFill/>
+          <a:ln/>
+        </p:spPr>
+        <p:txBody>
+          <a:bodyPr wrap="square" rtlCol="0" anchor="ctr"/>
+          <a:lstStyle/>
+          <a:p>
+            <a:pPr indent="0" marL="0">
+              <a:buNone/>
+            </a:pPr>
+            <a:r>
+              <a:rPr lang="en-US" sz="1400" dirty="0">
+                <a:solidFill>
+                  <a:srgbClr val="2A9D8F"/>
+                </a:solidFill>
+              </a:rPr>
+              <a:t>☐</a:t>
+            </a:r>
+            <a:endParaRPr lang="en-US" sz="1400" dirty="0"/>
+          </a:p>
+        </p:txBody>
+      </p:sp>
+      <p:sp>
+        <p:nvSpPr>
+          <p:cNvPr id="20" name="Text 18"/>
+          <p:cNvSpPr/>
+          <p:nvPr/>
+        </p:nvSpPr>
+        <p:spPr>
+          <a:xfrm>
+            <a:off x="1234440" y="3063240"/>
+            <a:ext cx="6949440" cy="438912"/>
+          </a:xfrm>
+          <a:prstGeom prst="rect">
+            <a:avLst/>
+          </a:prstGeom>
+          <a:noFill/>
+          <a:ln/>
+        </p:spPr>
+        <p:txBody>
+          <a:bodyPr wrap="square" rtlCol="0" anchor="ctr"/>
+          <a:lstStyle/>
+          <a:p>
+            <a:pPr indent="0" marL="0">
+              <a:buNone/>
+            </a:pPr>
+            <a:r>
+              <a:rPr lang="en-US" sz="1300" dirty="0">
+                <a:solidFill>
+                  <a:srgbClr val="3D3A36"/>
+                </a:solidFill>
+                <a:latin typeface="Calibri" pitchFamily="34" charset="0"/>
+                <a:ea typeface="Calibri" pitchFamily="34" charset="-122"/>
+                <a:cs typeface="Calibri" pitchFamily="34" charset="-120"/>
+              </a:rPr>
+              <a:t>Benefits and challenges of exploring space</a:t>
+            </a:r>
+            <a:endParaRPr lang="en-US" sz="1300" dirty="0"/>
+          </a:p>
+        </p:txBody>
+      </p:sp>
+      <p:sp>
+        <p:nvSpPr>
+          <p:cNvPr id="21" name="Shape 19"/>
+          <p:cNvSpPr/>
+          <p:nvPr/>
+        </p:nvSpPr>
+        <p:spPr>
+          <a:xfrm>
+            <a:off x="731520" y="3749040"/>
+            <a:ext cx="7680960" cy="594360"/>
+          </a:xfrm>
+          <a:prstGeom prst="rect">
+            <a:avLst/>
+          </a:prstGeom>
+          <a:solidFill>
+            <a:srgbClr val="E8F5F3"/>
+          </a:solidFill>
+          <a:ln/>
+          <a:effectLst>
+            <a:outerShdw sx="100000" sy="100000" kx="0" ky="0" algn="bl" rotWithShape="0" blurRad="50800" dist="25400" dir="8100000">
+              <a:srgbClr val="000000">
+                <a:alpha val="10000"/>
+              </a:srgbClr>
+            </a:outerShdw>
+          </a:effectLst>
+        </p:spPr>
+      </p:sp>
+      <p:sp>
+        <p:nvSpPr>
+          <p:cNvPr id="22" name="Text 20"/>
+          <p:cNvSpPr/>
+          <p:nvPr/>
+        </p:nvSpPr>
+        <p:spPr>
+          <a:xfrm>
+            <a:off x="914400" y="3749040"/>
+            <a:ext cx="7315200" cy="594360"/>
+          </a:xfrm>
+          <a:prstGeom prst="rect">
+            <a:avLst/>
+          </a:prstGeom>
+          <a:noFill/>
+          <a:ln/>
+        </p:spPr>
+        <p:txBody>
+          <a:bodyPr wrap="square" rtlCol="0" anchor="ctr"/>
+          <a:lstStyle/>
+          <a:p>
+            <a:pPr indent="0" marL="0">
+              <a:buNone/>
+            </a:pPr>
+            <a:r>
+              <a:rPr lang="en-US" sz="1200" b="1" dirty="0">
+                <a:solidFill>
+                  <a:srgbClr val="2A9D8F"/>
+                </a:solidFill>
+                <a:latin typeface="Calibri" pitchFamily="34" charset="0"/>
+                <a:ea typeface="Calibri" pitchFamily="34" charset="-122"/>
+                <a:cs typeface="Calibri" pitchFamily="34" charset="-120"/>
+              </a:rPr>
+              <a:t>Key Idea: </a:t>
+            </a:r>
+            <a:pPr indent="0" marL="0">
+              <a:buNone/>
+            </a:pPr>
+            <a:r>
+              <a:rPr lang="en-US" sz="1200" i="1" dirty="0">
+                <a:solidFill>
+                  <a:srgbClr val="3D3A36"/>
+                </a:solidFill>
+                <a:latin typeface="Calibri" pitchFamily="34" charset="0"/>
+                <a:ea typeface="Calibri" pitchFamily="34" charset="-122"/>
+                <a:cs typeface="Calibri" pitchFamily="34" charset="-120"/>
+              </a:rPr>
+              <a:t>Test yourself with the Self-Quiz and Review Games on mrzocchi.com.</a:t>
+            </a:r>
+            <a:endParaRPr lang="en-US" sz="1200" dirty="0"/>
+          </a:p>
+        </p:txBody>
+      </p:sp>
+    </p:spTree>
+  </p:cSld>
+  <p:clrMapOvr>
+    <a:masterClrMapping/>
+  </p:clrMapOvr>
+</p:sld>
+</file>
+
+<file path=ppt/slides/slide9.xml><?xml version="1.0" encoding="utf-8"?>
+<p:sld xmlns:a="http://schemas.openxmlformats.org/drawingml/2006/main" xmlns:r="http://schemas.openxmlformats.org/officeDocument/2006/relationships" xmlns:p="http://schemas.openxmlformats.org/presentationml/2006/main">
+  <p:cSld name="Slide 9">
+    <p:spTree>
+      <p:nvGrpSpPr>
+        <p:cNvPr id="1" name=""/>
+        <p:cNvGrpSpPr/>
+        <p:nvPr/>
+      </p:nvGrpSpPr>
+      <p:grpSpPr>
+        <a:xfrm>
+          <a:off x="0" y="0"/>
+          <a:ext cx="0" cy="0"/>
+          <a:chOff x="0" y="0"/>
+          <a:chExt cx="0" cy="0"/>
+        </a:xfrm>
+      </p:grpSpPr>
+      <p:sp>
+        <p:nvSpPr>
+          <p:cNvPr id="2" name="Shape 0"/>
+          <p:cNvSpPr/>
+          <p:nvPr/>
+        </p:nvSpPr>
+        <p:spPr>
+          <a:xfrm>
+            <a:off x="0" y="0"/>
+            <a:ext cx="9144000" cy="5143500"/>
+          </a:xfrm>
+          <a:prstGeom prst="rect">
+            <a:avLst/>
+          </a:prstGeom>
+          <a:solidFill>
+            <a:srgbClr val="1B2A4A"/>
+          </a:solidFill>
+          <a:ln/>
+        </p:spPr>
+      </p:sp>
+      <p:sp>
+        <p:nvSpPr>
+          <p:cNvPr id="3" name="Shape 1"/>
+          <p:cNvSpPr/>
+          <p:nvPr/>
+        </p:nvSpPr>
+        <p:spPr>
+          <a:xfrm>
+            <a:off x="0" y="4777740"/>
+            <a:ext cx="9144000" cy="365760"/>
+          </a:xfrm>
+          <a:prstGeom prst="rect">
+            <a:avLst/>
+          </a:prstGeom>
+          <a:solidFill>
+            <a:srgbClr val="2A9D8F"/>
+          </a:solidFill>
+          <a:ln/>
+        </p:spPr>
+      </p:sp>
+      <p:sp>
+        <p:nvSpPr>
+          <p:cNvPr id="4" name="Shape 2"/>
+          <p:cNvSpPr/>
+          <p:nvPr/>
+        </p:nvSpPr>
+        <p:spPr>
+          <a:xfrm>
+            <a:off x="-914400" y="-914400"/>
+            <a:ext cx="3657600" cy="3657600"/>
+          </a:xfrm>
+          <a:prstGeom prst="ellipse">
+            <a:avLst/>
+          </a:prstGeom>
+          <a:solidFill>
+            <a:srgbClr val="2A9D8F">
+              <a:alpha val="10000"/>
+            </a:srgbClr>
+          </a:solidFill>
+          <a:ln/>
+        </p:spPr>
+      </p:sp>
+      <p:sp>
+        <p:nvSpPr>
+          <p:cNvPr id="5" name="Text 3"/>
+          <p:cNvSpPr/>
+          <p:nvPr/>
+        </p:nvSpPr>
+        <p:spPr>
+          <a:xfrm>
+            <a:off x="731520" y="1463040"/>
+            <a:ext cx="7680960" cy="822960"/>
+          </a:xfrm>
+          <a:prstGeom prst="rect">
+            <a:avLst/>
+          </a:prstGeom>
+          <a:noFill/>
+          <a:ln/>
+        </p:spPr>
+        <p:txBody>
+          <a:bodyPr wrap="square" rtlCol="0" anchor="ctr"/>
+          <a:lstStyle/>
+          <a:p>
+            <a:pPr algn="ctr" indent="0" marL="0">
+              <a:buNone/>
+            </a:pPr>
+            <a:r>
+              <a:rPr lang="en-US" sz="3400" b="1" dirty="0">
+                <a:solidFill>
+                  <a:srgbClr val="FFFFFF"/>
+                </a:solidFill>
+                <a:latin typeface="Georgia" pitchFamily="34" charset="0"/>
+                <a:ea typeface="Georgia" pitchFamily="34" charset="-122"/>
+                <a:cs typeface="Georgia" pitchFamily="34" charset="-120"/>
+              </a:rPr>
+              <a:t>Review &amp; Practise</a:t>
+            </a:r>
+            <a:endParaRPr lang="en-US" sz="3400" dirty="0"/>
+          </a:p>
+        </p:txBody>
+      </p:sp>
+      <p:sp>
+        <p:nvSpPr>
+          <p:cNvPr id="6" name="Text 4"/>
+          <p:cNvSpPr/>
+          <p:nvPr/>
+        </p:nvSpPr>
+        <p:spPr>
+          <a:xfrm>
+            <a:off x="731520" y="2468880"/>
+            <a:ext cx="7680960" cy="457200"/>
+          </a:xfrm>
+          <a:prstGeom prst="rect">
+            <a:avLst/>
+          </a:prstGeom>
+          <a:noFill/>
+          <a:ln/>
+        </p:spPr>
+        <p:txBody>
+          <a:bodyPr wrap="square" rtlCol="0" anchor="ctr"/>
+          <a:lstStyle/>
+          <a:p>
+            <a:pPr algn="ctr" indent="0" marL="0">
+              <a:buNone/>
+            </a:pPr>
+            <a:r>
+              <a:rPr lang="en-US" sz="1800" dirty="0">
+                <a:solidFill>
+                  <a:srgbClr val="2A9D8F"/>
+                </a:solidFill>
+                <a:latin typeface="Calibri" pitchFamily="34" charset="0"/>
+                <a:ea typeface="Calibri" pitchFamily="34" charset="-122"/>
+                <a:cs typeface="Calibri" pitchFamily="34" charset="-120"/>
+              </a:rPr>
               <a:t>mrzocchi.com</a:t>
             </a:r>
-            <a:endParaRPr lang="en-US" sz="1100" dirty="0"/>
+            <a:endParaRPr lang="en-US" sz="1800" dirty="0"/>
+          </a:p>
+        </p:txBody>
+      </p:sp>
+      <p:sp>
+        <p:nvSpPr>
+          <p:cNvPr id="7" name="Text 5"/>
+          <p:cNvSpPr/>
+          <p:nvPr/>
+        </p:nvSpPr>
+        <p:spPr>
+          <a:xfrm>
+            <a:off x="731520" y="3108960"/>
+            <a:ext cx="7680960" cy="457200"/>
+          </a:xfrm>
+          <a:prstGeom prst="rect">
+            <a:avLst/>
+          </a:prstGeom>
+          <a:noFill/>
+          <a:ln/>
+        </p:spPr>
+        <p:txBody>
+          <a:bodyPr wrap="square" rtlCol="0" anchor="ctr"/>
+          <a:lstStyle/>
+          <a:p>
+            <a:pPr algn="ctr" indent="0" marL="0">
+              <a:buNone/>
+            </a:pPr>
+            <a:r>
+              <a:rPr lang="en-US" sz="1300" dirty="0">
+                <a:solidFill>
+                  <a:srgbClr val="9B9690"/>
+                </a:solidFill>
+                <a:latin typeface="Calibri" pitchFamily="34" charset="0"/>
+                <a:ea typeface="Calibri" pitchFamily="34" charset="-122"/>
+                <a:cs typeface="Calibri" pitchFamily="34" charset="-120"/>
+              </a:rPr>
+              <a:t>Use the Self-Quiz, Review Games, and Practice Builder to test yourself.</a:t>
+            </a:r>
+            <a:endParaRPr lang="en-US" sz="1300" dirty="0"/>
           </a:p>
         </p:txBody>
       </p:sp>

--- a/static/ppts/G6_Sci_T5_Full_Revision.pptx
+++ b/static/ppts/G6_Sci_T5_Full_Revision.pptx
@@ -13,13 +13,12 @@
     <p:sldId id="261" r:id="rId7"/>
     <p:sldId id="262" r:id="rId8"/>
     <p:sldId id="263" r:id="rId9"/>
-    <p:sldId id="264" r:id="rId10"/>
   </p:sldIdLst>
   <p:notesMasterIdLst>
-    <p:notesMasterId r:id="rId11"/>
+    <p:notesMasterId r:id="rId10"/>
   </p:notesMasterIdLst>
-  <p:sldSz cx="9144000" cy="5143500"/>
-  <p:notesSz cx="5143500" cy="9144000"/>
+  <p:sldSz cx="12192000" cy="6858000"/>
+  <p:notesSz cx="6858000" cy="12192000"/>
   <p:defaultTextStyle>
     <a:lvl1pPr marL="0" algn="l" defTabSz="914400" rtl="0" eaLnBrk="1" latinLnBrk="0" hangingPunct="1">
       <a:defRPr sz="1800" kern="1200">
@@ -1150,94 +1149,6 @@
             <a:fld id="{F7021451-1387-4CA6-816F-3879F97B5CBC}" type="slidenum">
               <a:rPr lang="en-US"/>
               <a:t>8</a:t>
-            </a:fld>
-            <a:endParaRPr lang="en-US"/>
-          </a:p>
-        </p:txBody>
-      </p:sp>
-    </p:spTree>
-    <p:extLst>
-      <p:ext uri="{BB962C8B-B14F-4D97-AF65-F5344CB8AC3E}">
-        <p14:creationId xmlns:p14="http://schemas.microsoft.com/office/powerpoint/2010/main" val="1024086991"/>
-      </p:ext>
-    </p:extLst>
-  </p:cSld>
-  <p:clrMapOvr>
-    <a:masterClrMapping/>
-  </p:clrMapOvr>
-</p:notes>
-</file>
-
-<file path=ppt/notesSlides/notesSlide9.xml><?xml version="1.0" encoding="utf-8"?>
-<p:notes xmlns:a="http://schemas.openxmlformats.org/drawingml/2006/main" xmlns:r="http://schemas.openxmlformats.org/officeDocument/2006/relationships" xmlns:p="http://schemas.openxmlformats.org/presentationml/2006/main">
-  <p:cSld>
-    <p:spTree>
-      <p:nvGrpSpPr>
-        <p:cNvPr id="1" name=""/>
-        <p:cNvGrpSpPr/>
-        <p:nvPr/>
-      </p:nvGrpSpPr>
-      <p:grpSpPr>
-        <a:xfrm>
-          <a:off x="0" y="0"/>
-          <a:ext cx="0" cy="0"/>
-          <a:chOff x="0" y="0"/>
-          <a:chExt cx="0" cy="0"/>
-        </a:xfrm>
-      </p:grpSpPr>
-      <p:sp>
-        <p:nvSpPr>
-          <p:cNvPr id="2" name="Slide Image Placeholder 1"/>
-          <p:cNvSpPr>
-            <a:spLocks noGrp="1" noRot="1" noChangeAspect="1"/>
-          </p:cNvSpPr>
-          <p:nvPr>
-            <p:ph type="sldImg"/>
-          </p:nvPr>
-        </p:nvSpPr>
-        <p:spPr/>
-      </p:sp>
-      <p:sp>
-        <p:nvSpPr>
-          <p:cNvPr id="3" name="Notes Placeholder 2"/>
-          <p:cNvSpPr>
-            <a:spLocks noGrp="1"/>
-          </p:cNvSpPr>
-          <p:nvPr>
-            <p:ph type="body" idx="1"/>
-          </p:nvPr>
-        </p:nvSpPr>
-        <p:spPr/>
-        <p:txBody>
-          <a:bodyPr/>
-          <a:lstStyle/>
-          <a:p>
-            <a:r>
-              <a:rPr lang="en-US" dirty="0"/>
-              <a:t/>
-            </a:r>
-            <a:endParaRPr lang="en-US" dirty="0"/>
-          </a:p>
-        </p:txBody>
-      </p:sp>
-      <p:sp>
-        <p:nvSpPr>
-          <p:cNvPr id="4" name="Slide Number Placeholder 3"/>
-          <p:cNvSpPr>
-            <a:spLocks noGrp="1"/>
-          </p:cNvSpPr>
-          <p:nvPr>
-            <p:ph type="sldNum" sz="quarter" idx="10"/>
-          </p:nvPr>
-        </p:nvSpPr>
-        <p:spPr/>
-        <p:txBody>
-          <a:bodyPr/>
-          <a:lstStyle/>
-          <a:p>
-            <a:fld id="{F7021451-1387-4CA6-816F-3879F97B5CBC}" type="slidenum">
-              <a:rPr lang="en-US"/>
-              <a:t>9</a:t>
             </a:fld>
             <a:endParaRPr lang="en-US"/>
           </a:p>
@@ -1566,6 +1477,13 @@
 <file path=ppt/slides/slide1.xml><?xml version="1.0" encoding="utf-8"?>
 <p:sld xmlns:a="http://schemas.openxmlformats.org/drawingml/2006/main" xmlns:r="http://schemas.openxmlformats.org/officeDocument/2006/relationships" xmlns:p="http://schemas.openxmlformats.org/presentationml/2006/main">
   <p:cSld name="Slide 1">
+    <p:bg>
+      <p:bgPr>
+        <a:solidFill>
+          <a:srgbClr val="2A9D8F"/>
+        </a:solidFill>
+      </p:bgPr>
+    </p:bg>
     <p:spTree>
       <p:nvGrpSpPr>
         <p:cNvPr id="1" name=""/>
@@ -1588,55 +1506,15 @@
         </p:nvSpPr>
         <p:spPr>
           <a:xfrm>
-            <a:off x="0" y="0"/>
-            <a:ext cx="9144000" cy="5143500"/>
-          </a:xfrm>
-          <a:prstGeom prst="rect">
+            <a:off x="7772400" y="-914400"/>
+            <a:ext cx="3657600" cy="3657600"/>
+          </a:xfrm>
+          <a:prstGeom prst="ellipse">
             <a:avLst/>
           </a:prstGeom>
           <a:solidFill>
-            <a:srgbClr val="1B2A4A"/>
-          </a:solidFill>
-          <a:ln/>
-        </p:spPr>
-      </p:sp>
-      <p:sp>
-        <p:nvSpPr>
-          <p:cNvPr id="3" name="Shape 1"/>
-          <p:cNvSpPr/>
-          <p:nvPr/>
-        </p:nvSpPr>
-        <p:spPr>
-          <a:xfrm>
-            <a:off x="0" y="4777740"/>
-            <a:ext cx="9144000" cy="365760"/>
-          </a:xfrm>
-          <a:prstGeom prst="rect">
-            <a:avLst/>
-          </a:prstGeom>
-          <a:solidFill>
-            <a:srgbClr val="2A9D8F"/>
-          </a:solidFill>
-          <a:ln/>
-        </p:spPr>
-      </p:sp>
-      <p:sp>
-        <p:nvSpPr>
-          <p:cNvPr id="4" name="Shape 2"/>
-          <p:cNvSpPr/>
-          <p:nvPr/>
-        </p:nvSpPr>
-        <p:spPr>
-          <a:xfrm>
-            <a:off x="6858000" y="-1371600"/>
-            <a:ext cx="4572000" cy="4572000"/>
-          </a:xfrm>
-          <a:prstGeom prst="ellipse">
-            <a:avLst/>
-          </a:prstGeom>
-          <a:solidFill>
-            <a:srgbClr val="2A9D8F">
-              <a:alpha val="12000"/>
+            <a:srgbClr val="FFFFFF">
+              <a:alpha val="8000"/>
             </a:srgbClr>
           </a:solidFill>
           <a:ln/>
@@ -1644,14 +1522,14 @@
       </p:sp>
       <p:sp>
         <p:nvSpPr>
-          <p:cNvPr id="5" name="Text 3"/>
+          <p:cNvPr id="3" name="Text 1"/>
           <p:cNvSpPr/>
           <p:nvPr/>
         </p:nvSpPr>
         <p:spPr>
           <a:xfrm>
-            <a:off x="731520" y="914400"/>
-            <a:ext cx="7680960" cy="457200"/>
+            <a:off x="731520" y="548640"/>
+            <a:ext cx="7315200" cy="365760"/>
           </a:xfrm>
           <a:prstGeom prst="rect">
             <a:avLst/>
@@ -1667,30 +1545,30 @@
               <a:buNone/>
             </a:pPr>
             <a:r>
-              <a:rPr lang="en-US" sz="1300" b="1" spc="500" kern="0" dirty="0">
+              <a:rPr lang="en-US" sz="1100" b="1" dirty="0">
                 <a:solidFill>
-                  <a:srgbClr val="2A9D8F"/>
+                  <a:srgbClr val="F2D68A"/>
                 </a:solidFill>
-                <a:latin typeface="Calibri" pitchFamily="34" charset="0"/>
-                <a:ea typeface="Calibri" pitchFamily="34" charset="-122"/>
-                <a:cs typeface="Calibri" pitchFamily="34" charset="-120"/>
+                <a:latin typeface="Arial" pitchFamily="34" charset="0"/>
+                <a:ea typeface="Arial" pitchFamily="34" charset="-122"/>
+                <a:cs typeface="Arial" pitchFamily="34" charset="-120"/>
               </a:rPr>
               <a:t>GRADE 6 SCIENCE</a:t>
             </a:r>
-            <a:endParaRPr lang="en-US" sz="1300" dirty="0"/>
-          </a:p>
-        </p:txBody>
-      </p:sp>
-      <p:sp>
-        <p:nvSpPr>
-          <p:cNvPr id="6" name="Text 4"/>
+            <a:endParaRPr lang="en-US" sz="1100" dirty="0"/>
+          </a:p>
+        </p:txBody>
+      </p:sp>
+      <p:sp>
+        <p:nvSpPr>
+          <p:cNvPr id="4" name="Text 2"/>
           <p:cNvSpPr/>
           <p:nvPr/>
         </p:nvSpPr>
         <p:spPr>
           <a:xfrm>
-            <a:off x="731520" y="1463040"/>
-            <a:ext cx="6858000" cy="1645920"/>
+            <a:off x="731520" y="1371600"/>
+            <a:ext cx="9144000" cy="1645920"/>
           </a:xfrm>
           <a:prstGeom prst="rect">
             <a:avLst/>
@@ -1699,14 +1577,17 @@
           <a:ln/>
         </p:spPr>
         <p:txBody>
-          <a:bodyPr wrap="square" rtlCol="0" anchor="t"/>
+          <a:bodyPr wrap="square" rtlCol="0" anchor="ctr"/>
           <a:lstStyle/>
           <a:p>
             <a:pPr indent="0" marL="0">
+              <a:lnSpc>
+                <a:spcPct val="110000"/>
+              </a:lnSpc>
               <a:buNone/>
             </a:pPr>
             <a:r>
-              <a:rPr lang="en-US" sz="3800" b="1" dirty="0">
+              <a:rPr lang="en-US" sz="3600" b="1" dirty="0">
                 <a:solidFill>
                   <a:srgbClr val="FFFFFF"/>
                 </a:solidFill>
@@ -1714,39 +1595,63 @@
                 <a:ea typeface="Georgia" pitchFamily="34" charset="-122"/>
                 <a:cs typeface="Georgia" pitchFamily="34" charset="-120"/>
               </a:rPr>
-              <a:t>Space</a:t>
-            </a:r>
-            <a:endParaRPr lang="en-US" sz="3800" dirty="0"/>
-          </a:p>
+              <a:t>Full Revision — Space Science</a:t>
+            </a:r>
+            <a:endParaRPr lang="en-US" sz="3600" dirty="0"/>
+          </a:p>
+        </p:txBody>
+      </p:sp>
+      <p:sp>
+        <p:nvSpPr>
+          <p:cNvPr id="5" name="Text 3"/>
+          <p:cNvSpPr/>
+          <p:nvPr/>
+        </p:nvSpPr>
+        <p:spPr>
+          <a:xfrm>
+            <a:off x="731520" y="3200400"/>
+            <a:ext cx="7315200" cy="548640"/>
+          </a:xfrm>
+          <a:prstGeom prst="rect">
+            <a:avLst/>
+          </a:prstGeom>
+          <a:noFill/>
+          <a:ln/>
+        </p:spPr>
+        <p:txBody>
+          <a:bodyPr wrap="square" rtlCol="0" anchor="ctr"/>
+          <a:lstStyle/>
           <a:p>
             <a:pPr indent="0" marL="0">
               <a:buNone/>
             </a:pPr>
             <a:r>
-              <a:rPr lang="en-US" sz="3800" b="1" dirty="0">
+              <a:rPr lang="en-US" sz="1600" dirty="0">
                 <a:solidFill>
-                  <a:srgbClr val="FFFFFF"/>
+                  <a:srgbClr val="FFFFFF">
+                    <a:alpha val="65000"/>
+                  </a:srgbClr>
                 </a:solidFill>
-                <a:latin typeface="Georgia" pitchFamily="34" charset="0"/>
-                <a:ea typeface="Georgia" pitchFamily="34" charset="-122"/>
-                <a:cs typeface="Georgia" pitchFamily="34" charset="-120"/>
+                <a:latin typeface="Arial" pitchFamily="34" charset="0"/>
+                <a:ea typeface="Arial" pitchFamily="34" charset="-122"/>
+                <a:cs typeface="Arial" pitchFamily="34" charset="-120"/>
               </a:rPr>
-              <a:t>Full Revision</a:t>
-            </a:r>
-            <a:endParaRPr lang="en-US" sz="3800" dirty="0"/>
-          </a:p>
-        </p:txBody>
-      </p:sp>
-      <p:sp>
-        <p:nvSpPr>
-          <p:cNvPr id="7" name="Text 5"/>
+              <a:t>Review all topics from Term 5</a:t>
+            </a:r>
+            <a:endParaRPr lang="en-US" sz="1600" dirty="0"/>
+          </a:p>
+        </p:txBody>
+      </p:sp>
+      <p:sp>
+        <p:nvSpPr>
+          <p:cNvPr id="6" name="Text 4"/>
           <p:cNvSpPr/>
           <p:nvPr/>
         </p:nvSpPr>
         <p:spPr>
           <a:xfrm>
-            <a:off x="731520" y="3200400"/>
-            <a:ext cx="6400800" cy="548640"/>
+            <a:off x="731520" y="4389120"/>
+            <a:ext cx="2743200" cy="320040"/>
           </a:xfrm>
           <a:prstGeom prst="rect">
             <a:avLst/>
@@ -1762,56 +1667,19 @@
               <a:buNone/>
             </a:pPr>
             <a:r>
-              <a:rPr lang="en-US" sz="1600" i="1" dirty="0">
+              <a:rPr lang="en-US" sz="1000" dirty="0">
                 <a:solidFill>
-                  <a:srgbClr val="9B9690"/>
+                  <a:srgbClr val="FFFFFF">
+                    <a:alpha val="40000"/>
+                  </a:srgbClr>
                 </a:solidFill>
-                <a:latin typeface="Calibri" pitchFamily="34" charset="0"/>
-                <a:ea typeface="Calibri" pitchFamily="34" charset="-122"/>
-                <a:cs typeface="Calibri" pitchFamily="34" charset="-120"/>
-              </a:rPr>
-              <a:t>Solar system, Earth–Sun–Moon, seasons, and exploration</a:t>
-            </a:r>
-            <a:endParaRPr lang="en-US" sz="1600" dirty="0"/>
-          </a:p>
-        </p:txBody>
-      </p:sp>
-      <p:sp>
-        <p:nvSpPr>
-          <p:cNvPr id="8" name="Text 6"/>
-          <p:cNvSpPr/>
-          <p:nvPr/>
-        </p:nvSpPr>
-        <p:spPr>
-          <a:xfrm>
-            <a:off x="731520" y="4297680"/>
-            <a:ext cx="2743200" cy="365760"/>
-          </a:xfrm>
-          <a:prstGeom prst="rect">
-            <a:avLst/>
-          </a:prstGeom>
-          <a:noFill/>
-          <a:ln/>
-        </p:spPr>
-        <p:txBody>
-          <a:bodyPr wrap="square" rtlCol="0" anchor="ctr"/>
-          <a:lstStyle/>
-          <a:p>
-            <a:pPr indent="0" marL="0">
-              <a:buNone/>
-            </a:pPr>
-            <a:r>
-              <a:rPr lang="en-US" sz="1100" dirty="0">
-                <a:solidFill>
-                  <a:srgbClr val="9B9690"/>
-                </a:solidFill>
-                <a:latin typeface="Calibri" pitchFamily="34" charset="0"/>
-                <a:ea typeface="Calibri" pitchFamily="34" charset="-122"/>
-                <a:cs typeface="Calibri" pitchFamily="34" charset="-120"/>
+                <a:latin typeface="Arial" pitchFamily="34" charset="0"/>
+                <a:ea typeface="Arial" pitchFamily="34" charset="-122"/>
+                <a:cs typeface="Arial" pitchFamily="34" charset="-120"/>
               </a:rPr>
               <a:t>mrzocchi.com</a:t>
             </a:r>
-            <a:endParaRPr lang="en-US" sz="1100" dirty="0"/>
+            <a:endParaRPr lang="en-US" sz="1000" dirty="0"/>
           </a:p>
         </p:txBody>
       </p:sp>
@@ -1826,6 +1694,13 @@
 <file path=ppt/slides/slide2.xml><?xml version="1.0" encoding="utf-8"?>
 <p:sld xmlns:a="http://schemas.openxmlformats.org/drawingml/2006/main" xmlns:r="http://schemas.openxmlformats.org/officeDocument/2006/relationships" xmlns:p="http://schemas.openxmlformats.org/presentationml/2006/main">
   <p:cSld name="Slide 2">
+    <p:bg>
+      <p:bgPr>
+        <a:solidFill>
+          <a:srgbClr val="111D35"/>
+        </a:solidFill>
+      </p:bgPr>
+    </p:bg>
     <p:spTree>
       <p:nvGrpSpPr>
         <p:cNvPr id="1" name=""/>
@@ -1842,54 +1717,14 @@
       </p:grpSpPr>
       <p:sp>
         <p:nvSpPr>
-          <p:cNvPr id="2" name="Shape 0"/>
+          <p:cNvPr id="2" name="Text 0"/>
           <p:cNvSpPr/>
           <p:nvPr/>
         </p:nvSpPr>
         <p:spPr>
           <a:xfrm>
-            <a:off x="0" y="0"/>
-            <a:ext cx="9144000" cy="5143500"/>
-          </a:xfrm>
-          <a:prstGeom prst="rect">
-            <a:avLst/>
-          </a:prstGeom>
-          <a:solidFill>
-            <a:srgbClr val="1B2A4A"/>
-          </a:solidFill>
-          <a:ln/>
-        </p:spPr>
-      </p:sp>
-      <p:sp>
-        <p:nvSpPr>
-          <p:cNvPr id="3" name="Shape 1"/>
-          <p:cNvSpPr/>
-          <p:nvPr/>
-        </p:nvSpPr>
-        <p:spPr>
-          <a:xfrm>
-            <a:off x="731520" y="1828800"/>
-            <a:ext cx="73152" cy="1463040"/>
-          </a:xfrm>
-          <a:prstGeom prst="rect">
-            <a:avLst/>
-          </a:prstGeom>
-          <a:solidFill>
-            <a:srgbClr val="2A9D8F"/>
-          </a:solidFill>
-          <a:ln/>
-        </p:spPr>
-      </p:sp>
-      <p:sp>
-        <p:nvSpPr>
-          <p:cNvPr id="4" name="Text 2"/>
-          <p:cNvSpPr/>
-          <p:nvPr/>
-        </p:nvSpPr>
-        <p:spPr>
-          <a:xfrm>
-            <a:off x="1097280" y="1463040"/>
-            <a:ext cx="1097280" cy="1097280"/>
+            <a:off x="731520" y="731520"/>
+            <a:ext cx="2286000" cy="1828800"/>
           </a:xfrm>
           <a:prstGeom prst="rect">
             <a:avLst/>
@@ -1901,34 +1736,36 @@
           <a:bodyPr wrap="square" rtlCol="0" anchor="ctr"/>
           <a:lstStyle/>
           <a:p>
-            <a:pPr algn="l" indent="0" marL="0">
+            <a:pPr indent="0" marL="0">
               <a:buNone/>
             </a:pPr>
             <a:r>
-              <a:rPr lang="en-US" sz="4800" b="1" dirty="0">
+              <a:rPr lang="en-US" sz="7200" b="1" dirty="0">
                 <a:solidFill>
-                  <a:srgbClr val="2A9D8F"/>
+                  <a:srgbClr val="2A9D8F">
+                    <a:alpha val="80000"/>
+                  </a:srgbClr>
                 </a:solidFill>
                 <a:latin typeface="Georgia" pitchFamily="34" charset="0"/>
                 <a:ea typeface="Georgia" pitchFamily="34" charset="-122"/>
                 <a:cs typeface="Georgia" pitchFamily="34" charset="-120"/>
               </a:rPr>
-              <a:t>1</a:t>
-            </a:r>
-            <a:endParaRPr lang="en-US" sz="4800" dirty="0"/>
-          </a:p>
-        </p:txBody>
-      </p:sp>
-      <p:sp>
-        <p:nvSpPr>
-          <p:cNvPr id="5" name="Text 3"/>
+              <a:t>01</a:t>
+            </a:r>
+            <a:endParaRPr lang="en-US" sz="7200" dirty="0"/>
+          </a:p>
+        </p:txBody>
+      </p:sp>
+      <p:sp>
+        <p:nvSpPr>
+          <p:cNvPr id="3" name="Text 1"/>
           <p:cNvSpPr/>
           <p:nvPr/>
         </p:nvSpPr>
         <p:spPr>
           <a:xfrm>
-            <a:off x="2194560" y="1920240"/>
-            <a:ext cx="5943600" cy="1097280"/>
+            <a:off x="731520" y="1828800"/>
+            <a:ext cx="9144000" cy="1097280"/>
           </a:xfrm>
           <a:prstGeom prst="rect">
             <a:avLst/>
@@ -1999,47 +1836,7 @@
         <p:spPr>
           <a:xfrm>
             <a:off x="0" y="0"/>
-            <a:ext cx="9144000" cy="822960"/>
-          </a:xfrm>
-          <a:prstGeom prst="rect">
-            <a:avLst/>
-          </a:prstGeom>
-          <a:solidFill>
-            <a:srgbClr val="FFFFFF"/>
-          </a:solidFill>
-          <a:ln/>
-        </p:spPr>
-      </p:sp>
-      <p:sp>
-        <p:nvSpPr>
-          <p:cNvPr id="3" name="Shape 1"/>
-          <p:cNvSpPr/>
-          <p:nvPr/>
-        </p:nvSpPr>
-        <p:spPr>
-          <a:xfrm>
-            <a:off x="0" y="804672"/>
-            <a:ext cx="9144000" cy="27432"/>
-          </a:xfrm>
-          <a:prstGeom prst="rect">
-            <a:avLst/>
-          </a:prstGeom>
-          <a:solidFill>
-            <a:srgbClr val="E5E2DC"/>
-          </a:solidFill>
-          <a:ln/>
-        </p:spPr>
-      </p:sp>
-      <p:sp>
-        <p:nvSpPr>
-          <p:cNvPr id="4" name="Shape 2"/>
-          <p:cNvSpPr/>
-          <p:nvPr/>
-        </p:nvSpPr>
-        <p:spPr>
-          <a:xfrm>
-            <a:off x="548640" y="201168"/>
-            <a:ext cx="54864" cy="420624"/>
+            <a:ext cx="73152" cy="5148072"/>
           </a:xfrm>
           <a:prstGeom prst="rect">
             <a:avLst/>
@@ -2052,14 +1849,14 @@
       </p:sp>
       <p:sp>
         <p:nvSpPr>
-          <p:cNvPr id="5" name="Text 3"/>
+          <p:cNvPr id="3" name="Text 1"/>
           <p:cNvSpPr/>
           <p:nvPr/>
         </p:nvSpPr>
         <p:spPr>
           <a:xfrm>
-            <a:off x="777240" y="137160"/>
-            <a:ext cx="7772400" cy="548640"/>
+            <a:off x="548640" y="274320"/>
+            <a:ext cx="9144000" cy="640080"/>
           </a:xfrm>
           <a:prstGeom prst="rect">
             <a:avLst/>
@@ -2068,14 +1865,14 @@
           <a:ln/>
         </p:spPr>
         <p:txBody>
-          <a:bodyPr wrap="square" lIns="0" tIns="0" rIns="0" bIns="0" rtlCol="0" anchor="ctr"/>
+          <a:bodyPr wrap="square" rtlCol="0" anchor="ctr"/>
           <a:lstStyle/>
           <a:p>
             <a:pPr indent="0" marL="0">
               <a:buNone/>
             </a:pPr>
             <a:r>
-              <a:rPr lang="en-US" sz="2000" b="1" dirty="0">
+              <a:rPr lang="en-US" sz="2400" b="1" dirty="0">
                 <a:solidFill>
                   <a:srgbClr val="1B2A4A"/>
                 </a:solidFill>
@@ -2083,22 +1880,42 @@
                 <a:ea typeface="Georgia" pitchFamily="34" charset="-122"/>
                 <a:cs typeface="Georgia" pitchFamily="34" charset="-120"/>
               </a:rPr>
-              <a:t>Solar System Review</a:t>
-            </a:r>
-            <a:endParaRPr lang="en-US" sz="2000" dirty="0"/>
-          </a:p>
-        </p:txBody>
-      </p:sp>
-      <p:sp>
-        <p:nvSpPr>
-          <p:cNvPr id="6" name="Text 4"/>
+              <a:t>Solar System Recap</a:t>
+            </a:r>
+            <a:endParaRPr lang="en-US" sz="2400" dirty="0"/>
+          </a:p>
+        </p:txBody>
+      </p:sp>
+      <p:sp>
+        <p:nvSpPr>
+          <p:cNvPr id="4" name="Shape 2"/>
           <p:cNvSpPr/>
           <p:nvPr/>
         </p:nvSpPr>
         <p:spPr>
           <a:xfrm>
-            <a:off x="731520" y="1051560"/>
-            <a:ext cx="7680960" cy="3108960"/>
+            <a:off x="548640" y="960120"/>
+            <a:ext cx="2286000" cy="36576"/>
+          </a:xfrm>
+          <a:prstGeom prst="rect">
+            <a:avLst/>
+          </a:prstGeom>
+          <a:solidFill>
+            <a:srgbClr val="2A9D8F"/>
+          </a:solidFill>
+          <a:ln/>
+        </p:spPr>
+      </p:sp>
+      <p:sp>
+        <p:nvSpPr>
+          <p:cNvPr id="5" name="Text 3"/>
+          <p:cNvSpPr/>
+          <p:nvPr/>
+        </p:nvSpPr>
+        <p:spPr>
+          <a:xfrm>
+            <a:off x="548640" y="1188720"/>
+            <a:ext cx="10058400" cy="3474720"/>
           </a:xfrm>
           <a:prstGeom prst="rect">
             <a:avLst/>
@@ -2110,86 +1927,46 @@
           <a:bodyPr wrap="square" rtlCol="0" anchor="t"/>
           <a:lstStyle/>
           <a:p>
-            <a:pPr marL="342900" indent="-342900">
+            <a:pPr>
+              <a:lnSpc>
+                <a:spcPct val="150000"/>
+              </a:lnSpc>
               <a:spcAft>
-                <a:spcPts val="800"/>
+                <a:spcPts val="600"/>
               </a:spcAft>
-              <a:buSzPct val="100000"/>
-              <a:buChar char="•"/>
             </a:pPr>
             <a:r>
               <a:rPr lang="en-US" sz="1500" dirty="0">
                 <a:solidFill>
                   <a:srgbClr val="3D3A36"/>
                 </a:solidFill>
-                <a:latin typeface="Calibri" pitchFamily="34" charset="0"/>
-                <a:ea typeface="Calibri" pitchFamily="34" charset="-122"/>
-                <a:cs typeface="Calibri" pitchFamily="34" charset="-120"/>
+                <a:latin typeface="Arial" pitchFamily="34" charset="0"/>
+                <a:ea typeface="Arial" pitchFamily="34" charset="-122"/>
+                <a:cs typeface="Arial" pitchFamily="34" charset="-120"/>
               </a:rPr>
-              <a:t>8 planets: Mercury, Venus, Earth, Mars (rocky) | Jupiter, Saturn, Uranus, Neptune (gas).</a:t>
+              <a:t>8 planets: Mercury, Venus, Earth, Mars, Jupiter, Saturn, Uranus, Neptune.</a:t>
             </a:r>
             <a:endParaRPr lang="en-US" sz="1500" dirty="0"/>
           </a:p>
           <a:p>
-            <a:pPr marL="342900" indent="-342900">
+            <a:pPr>
+              <a:lnSpc>
+                <a:spcPct val="150000"/>
+              </a:lnSpc>
               <a:spcAft>
-                <a:spcPts val="800"/>
+                <a:spcPts val="600"/>
               </a:spcAft>
-              <a:buSzPct val="100000"/>
-              <a:buChar char="•"/>
             </a:pPr>
             <a:r>
               <a:rPr lang="en-US" sz="1500" dirty="0">
                 <a:solidFill>
                   <a:srgbClr val="3D3A36"/>
                 </a:solidFill>
-                <a:latin typeface="Calibri" pitchFamily="34" charset="0"/>
-                <a:ea typeface="Calibri" pitchFamily="34" charset="-122"/>
-                <a:cs typeface="Calibri" pitchFamily="34" charset="-120"/>
+                <a:latin typeface="Arial" pitchFamily="34" charset="0"/>
+                <a:ea typeface="Arial" pitchFamily="34" charset="-122"/>
+                <a:cs typeface="Arial" pitchFamily="34" charset="-120"/>
               </a:rPr>
-              <a:t>The Sun is a star — contains 99.8% of the solar system's mass.</a:t>
-            </a:r>
-            <a:endParaRPr lang="en-US" sz="1500" dirty="0"/>
-          </a:p>
-          <a:p>
-            <a:pPr marL="342900" indent="-342900">
-              <a:spcAft>
-                <a:spcPts val="800"/>
-              </a:spcAft>
-              <a:buSzPct val="100000"/>
-              <a:buChar char="•"/>
-            </a:pPr>
-            <a:r>
-              <a:rPr lang="en-US" sz="1500" dirty="0">
-                <a:solidFill>
-                  <a:srgbClr val="3D3A36"/>
-                </a:solidFill>
-                <a:latin typeface="Calibri" pitchFamily="34" charset="0"/>
-                <a:ea typeface="Calibri" pitchFamily="34" charset="-122"/>
-                <a:cs typeface="Calibri" pitchFamily="34" charset="-120"/>
-              </a:rPr>
-              <a:t>Gravity keeps planets in orbit. Farther planets orbit more slowly.</a:t>
-            </a:r>
-            <a:endParaRPr lang="en-US" sz="1500" dirty="0"/>
-          </a:p>
-          <a:p>
-            <a:pPr marL="342900" indent="-342900">
-              <a:spcAft>
-                <a:spcPts val="800"/>
-              </a:spcAft>
-              <a:buSzPct val="100000"/>
-              <a:buChar char="•"/>
-            </a:pPr>
-            <a:r>
-              <a:rPr lang="en-US" sz="1500" dirty="0">
-                <a:solidFill>
-                  <a:srgbClr val="3D3A36"/>
-                </a:solidFill>
-                <a:latin typeface="Calibri" pitchFamily="34" charset="0"/>
-                <a:ea typeface="Calibri" pitchFamily="34" charset="-122"/>
-                <a:cs typeface="Calibri" pitchFamily="34" charset="-120"/>
-              </a:rPr>
-              <a:t>Also includes: dwarf planets, asteroids, comets, and 200+ moons.</a:t>
+              <a:t>Rocky planets (inner), Gas/ice giants (outer). Formed 4.6 billion years ago.</a:t>
             </a:r>
             <a:endParaRPr lang="en-US" sz="1500" dirty="0"/>
           </a:p>
@@ -2206,6 +1983,13 @@
 <file path=ppt/slides/slide4.xml><?xml version="1.0" encoding="utf-8"?>
 <p:sld xmlns:a="http://schemas.openxmlformats.org/drawingml/2006/main" xmlns:r="http://schemas.openxmlformats.org/officeDocument/2006/relationships" xmlns:p="http://schemas.openxmlformats.org/presentationml/2006/main">
   <p:cSld name="Slide 4">
+    <p:bg>
+      <p:bgPr>
+        <a:solidFill>
+          <a:srgbClr val="111D35"/>
+        </a:solidFill>
+      </p:bgPr>
+    </p:bg>
     <p:spTree>
       <p:nvGrpSpPr>
         <p:cNvPr id="1" name=""/>
@@ -2222,54 +2006,14 @@
       </p:grpSpPr>
       <p:sp>
         <p:nvSpPr>
-          <p:cNvPr id="2" name="Shape 0"/>
+          <p:cNvPr id="2" name="Text 0"/>
           <p:cNvSpPr/>
           <p:nvPr/>
         </p:nvSpPr>
         <p:spPr>
           <a:xfrm>
-            <a:off x="0" y="0"/>
-            <a:ext cx="9144000" cy="5143500"/>
-          </a:xfrm>
-          <a:prstGeom prst="rect">
-            <a:avLst/>
-          </a:prstGeom>
-          <a:solidFill>
-            <a:srgbClr val="1B2A4A"/>
-          </a:solidFill>
-          <a:ln/>
-        </p:spPr>
-      </p:sp>
-      <p:sp>
-        <p:nvSpPr>
-          <p:cNvPr id="3" name="Shape 1"/>
-          <p:cNvSpPr/>
-          <p:nvPr/>
-        </p:nvSpPr>
-        <p:spPr>
-          <a:xfrm>
-            <a:off x="731520" y="1828800"/>
-            <a:ext cx="73152" cy="1463040"/>
-          </a:xfrm>
-          <a:prstGeom prst="rect">
-            <a:avLst/>
-          </a:prstGeom>
-          <a:solidFill>
-            <a:srgbClr val="2A9D8F"/>
-          </a:solidFill>
-          <a:ln/>
-        </p:spPr>
-      </p:sp>
-      <p:sp>
-        <p:nvSpPr>
-          <p:cNvPr id="4" name="Text 2"/>
-          <p:cNvSpPr/>
-          <p:nvPr/>
-        </p:nvSpPr>
-        <p:spPr>
-          <a:xfrm>
-            <a:off x="1097280" y="1463040"/>
-            <a:ext cx="1097280" cy="1097280"/>
+            <a:off x="731520" y="731520"/>
+            <a:ext cx="2286000" cy="1828800"/>
           </a:xfrm>
           <a:prstGeom prst="rect">
             <a:avLst/>
@@ -2281,34 +2025,36 @@
           <a:bodyPr wrap="square" rtlCol="0" anchor="ctr"/>
           <a:lstStyle/>
           <a:p>
-            <a:pPr algn="l" indent="0" marL="0">
+            <a:pPr indent="0" marL="0">
               <a:buNone/>
             </a:pPr>
             <a:r>
-              <a:rPr lang="en-US" sz="4800" b="1" dirty="0">
+              <a:rPr lang="en-US" sz="7200" b="1" dirty="0">
                 <a:solidFill>
-                  <a:srgbClr val="2A9D8F"/>
+                  <a:srgbClr val="2A9D8F">
+                    <a:alpha val="80000"/>
+                  </a:srgbClr>
                 </a:solidFill>
                 <a:latin typeface="Georgia" pitchFamily="34" charset="0"/>
                 <a:ea typeface="Georgia" pitchFamily="34" charset="-122"/>
                 <a:cs typeface="Georgia" pitchFamily="34" charset="-120"/>
               </a:rPr>
-              <a:t>2</a:t>
-            </a:r>
-            <a:endParaRPr lang="en-US" sz="4800" dirty="0"/>
-          </a:p>
-        </p:txBody>
-      </p:sp>
-      <p:sp>
-        <p:nvSpPr>
-          <p:cNvPr id="5" name="Text 3"/>
+              <a:t>02</a:t>
+            </a:r>
+            <a:endParaRPr lang="en-US" sz="7200" dirty="0"/>
+          </a:p>
+        </p:txBody>
+      </p:sp>
+      <p:sp>
+        <p:nvSpPr>
+          <p:cNvPr id="3" name="Text 1"/>
           <p:cNvSpPr/>
           <p:nvPr/>
         </p:nvSpPr>
         <p:spPr>
           <a:xfrm>
-            <a:off x="2194560" y="1920240"/>
-            <a:ext cx="5943600" cy="1097280"/>
+            <a:off x="731520" y="1828800"/>
+            <a:ext cx="9144000" cy="1097280"/>
           </a:xfrm>
           <a:prstGeom prst="rect">
             <a:avLst/>
@@ -2332,7 +2078,7 @@
                 <a:ea typeface="Georgia" pitchFamily="34" charset="-122"/>
                 <a:cs typeface="Georgia" pitchFamily="34" charset="-120"/>
               </a:rPr>
-              <a:t>Earth, Moon &amp; Seasons</a:t>
+              <a:t>Earth, Moon &amp; Sun</a:t>
             </a:r>
             <a:endParaRPr lang="en-US" sz="3200" dirty="0"/>
           </a:p>
@@ -2379,47 +2125,7 @@
         <p:spPr>
           <a:xfrm>
             <a:off x="0" y="0"/>
-            <a:ext cx="9144000" cy="822960"/>
-          </a:xfrm>
-          <a:prstGeom prst="rect">
-            <a:avLst/>
-          </a:prstGeom>
-          <a:solidFill>
-            <a:srgbClr val="FFFFFF"/>
-          </a:solidFill>
-          <a:ln/>
-        </p:spPr>
-      </p:sp>
-      <p:sp>
-        <p:nvSpPr>
-          <p:cNvPr id="3" name="Shape 1"/>
-          <p:cNvSpPr/>
-          <p:nvPr/>
-        </p:nvSpPr>
-        <p:spPr>
-          <a:xfrm>
-            <a:off x="0" y="804672"/>
-            <a:ext cx="9144000" cy="27432"/>
-          </a:xfrm>
-          <a:prstGeom prst="rect">
-            <a:avLst/>
-          </a:prstGeom>
-          <a:solidFill>
-            <a:srgbClr val="E5E2DC"/>
-          </a:solidFill>
-          <a:ln/>
-        </p:spPr>
-      </p:sp>
-      <p:sp>
-        <p:nvSpPr>
-          <p:cNvPr id="4" name="Shape 2"/>
-          <p:cNvSpPr/>
-          <p:nvPr/>
-        </p:nvSpPr>
-        <p:spPr>
-          <a:xfrm>
-            <a:off x="548640" y="201168"/>
-            <a:ext cx="54864" cy="420624"/>
+            <a:ext cx="73152" cy="5148072"/>
           </a:xfrm>
           <a:prstGeom prst="rect">
             <a:avLst/>
@@ -2432,14 +2138,14 @@
       </p:sp>
       <p:sp>
         <p:nvSpPr>
-          <p:cNvPr id="5" name="Text 3"/>
+          <p:cNvPr id="3" name="Text 1"/>
           <p:cNvSpPr/>
           <p:nvPr/>
         </p:nvSpPr>
         <p:spPr>
           <a:xfrm>
-            <a:off x="777240" y="137160"/>
-            <a:ext cx="7772400" cy="548640"/>
+            <a:off x="548640" y="274320"/>
+            <a:ext cx="9144000" cy="640080"/>
           </a:xfrm>
           <a:prstGeom prst="rect">
             <a:avLst/>
@@ -2448,14 +2154,14 @@
           <a:ln/>
         </p:spPr>
         <p:txBody>
-          <a:bodyPr wrap="square" lIns="0" tIns="0" rIns="0" bIns="0" rtlCol="0" anchor="ctr"/>
+          <a:bodyPr wrap="square" rtlCol="0" anchor="ctr"/>
           <a:lstStyle/>
           <a:p>
             <a:pPr indent="0" marL="0">
               <a:buNone/>
             </a:pPr>
             <a:r>
-              <a:rPr lang="en-US" sz="2000" b="1" dirty="0">
+              <a:rPr lang="en-US" sz="2400" b="1" dirty="0">
                 <a:solidFill>
                   <a:srgbClr val="1B2A4A"/>
                 </a:solidFill>
@@ -2463,22 +2169,42 @@
                 <a:ea typeface="Georgia" pitchFamily="34" charset="-122"/>
                 <a:cs typeface="Georgia" pitchFamily="34" charset="-120"/>
               </a:rPr>
-              <a:t>Earth System Review</a:t>
-            </a:r>
-            <a:endParaRPr lang="en-US" sz="2000" dirty="0"/>
-          </a:p>
-        </p:txBody>
-      </p:sp>
-      <p:sp>
-        <p:nvSpPr>
-          <p:cNvPr id="6" name="Text 4"/>
+              <a:t>Earth-Moon-Sun Recap</a:t>
+            </a:r>
+            <a:endParaRPr lang="en-US" sz="2400" dirty="0"/>
+          </a:p>
+        </p:txBody>
+      </p:sp>
+      <p:sp>
+        <p:nvSpPr>
+          <p:cNvPr id="4" name="Shape 2"/>
           <p:cNvSpPr/>
           <p:nvPr/>
         </p:nvSpPr>
         <p:spPr>
           <a:xfrm>
-            <a:off x="731520" y="1051560"/>
-            <a:ext cx="7680960" cy="3108960"/>
+            <a:off x="548640" y="960120"/>
+            <a:ext cx="2286000" cy="36576"/>
+          </a:xfrm>
+          <a:prstGeom prst="rect">
+            <a:avLst/>
+          </a:prstGeom>
+          <a:solidFill>
+            <a:srgbClr val="2A9D8F"/>
+          </a:solidFill>
+          <a:ln/>
+        </p:spPr>
+      </p:sp>
+      <p:sp>
+        <p:nvSpPr>
+          <p:cNvPr id="5" name="Text 3"/>
+          <p:cNvSpPr/>
+          <p:nvPr/>
+        </p:nvSpPr>
+        <p:spPr>
+          <a:xfrm>
+            <a:off x="548640" y="1188720"/>
+            <a:ext cx="10058400" cy="3474720"/>
           </a:xfrm>
           <a:prstGeom prst="rect">
             <a:avLst/>
@@ -2490,107 +2216,68 @@
           <a:bodyPr wrap="square" rtlCol="0" anchor="t"/>
           <a:lstStyle/>
           <a:p>
-            <a:pPr marL="342900" indent="-342900">
+            <a:pPr>
+              <a:lnSpc>
+                <a:spcPct val="150000"/>
+              </a:lnSpc>
               <a:spcAft>
-                <a:spcPts val="800"/>
+                <a:spcPts val="600"/>
               </a:spcAft>
-              <a:buSzPct val="100000"/>
-              <a:buChar char="•"/>
             </a:pPr>
             <a:r>
               <a:rPr lang="en-US" sz="1500" dirty="0">
                 <a:solidFill>
                   <a:srgbClr val="3D3A36"/>
                 </a:solidFill>
-                <a:latin typeface="Calibri" pitchFamily="34" charset="0"/>
-                <a:ea typeface="Calibri" pitchFamily="34" charset="-122"/>
-                <a:cs typeface="Calibri" pitchFamily="34" charset="-120"/>
+                <a:latin typeface="Arial" pitchFamily="34" charset="0"/>
+                <a:ea typeface="Arial" pitchFamily="34" charset="-122"/>
+                <a:cs typeface="Arial" pitchFamily="34" charset="-120"/>
               </a:rPr>
-              <a:t>Day/night: caused by Earth's ROTATION (24 hours). NOT the Sun moving.</a:t>
+              <a:t>Earth orbits Sun (365.25 days). Moon orbits Earth (27.3 days).</a:t>
             </a:r>
             <a:endParaRPr lang="en-US" sz="1500" dirty="0"/>
           </a:p>
           <a:p>
-            <a:pPr marL="342900" indent="-342900">
+            <a:pPr>
+              <a:lnSpc>
+                <a:spcPct val="150000"/>
+              </a:lnSpc>
               <a:spcAft>
-                <a:spcPts val="800"/>
+                <a:spcPts val="600"/>
               </a:spcAft>
-              <a:buSzPct val="100000"/>
-              <a:buChar char="•"/>
             </a:pPr>
             <a:r>
               <a:rPr lang="en-US" sz="1500" dirty="0">
                 <a:solidFill>
                   <a:srgbClr val="3D3A36"/>
                 </a:solidFill>
-                <a:latin typeface="Calibri" pitchFamily="34" charset="0"/>
-                <a:ea typeface="Calibri" pitchFamily="34" charset="-122"/>
-                <a:cs typeface="Calibri" pitchFamily="34" charset="-120"/>
+                <a:latin typeface="Arial" pitchFamily="34" charset="0"/>
+                <a:ea typeface="Arial" pitchFamily="34" charset="-122"/>
+                <a:cs typeface="Arial" pitchFamily="34" charset="-120"/>
               </a:rPr>
-              <a:t>Seasons: caused by Earth's 23.5° AXIAL TILT. NOT distance from Sun.</a:t>
+              <a:t>Day/night: Earth rotates every 24 hours. Seasons: 23.5° axial tilt.</a:t>
             </a:r>
             <a:endParaRPr lang="en-US" sz="1500" dirty="0"/>
           </a:p>
           <a:p>
-            <a:pPr marL="342900" indent="-342900">
+            <a:pPr>
+              <a:lnSpc>
+                <a:spcPct val="150000"/>
+              </a:lnSpc>
               <a:spcAft>
-                <a:spcPts val="800"/>
+                <a:spcPts val="600"/>
               </a:spcAft>
-              <a:buSzPct val="100000"/>
-              <a:buChar char="•"/>
             </a:pPr>
             <a:r>
               <a:rPr lang="en-US" sz="1500" dirty="0">
                 <a:solidFill>
                   <a:srgbClr val="3D3A36"/>
                 </a:solidFill>
-                <a:latin typeface="Calibri" pitchFamily="34" charset="0"/>
-                <a:ea typeface="Calibri" pitchFamily="34" charset="-122"/>
-                <a:cs typeface="Calibri" pitchFamily="34" charset="-120"/>
+                <a:latin typeface="Arial" pitchFamily="34" charset="0"/>
+                <a:ea typeface="Arial" pitchFamily="34" charset="-122"/>
+                <a:cs typeface="Arial" pitchFamily="34" charset="-120"/>
               </a:rPr>
-              <a:t>Moon phases: New → Waxing → Full → Waning → New (29.5 days).</a:t>
-            </a:r>
-            <a:endParaRPr lang="en-US" sz="1500" dirty="0"/>
-          </a:p>
-          <a:p>
-            <a:pPr marL="342900" indent="-342900">
-              <a:spcAft>
-                <a:spcPts val="800"/>
-              </a:spcAft>
-              <a:buSzPct val="100000"/>
-              <a:buChar char="•"/>
-            </a:pPr>
-            <a:r>
-              <a:rPr lang="en-US" sz="1500" dirty="0">
-                <a:solidFill>
-                  <a:srgbClr val="3D3A36"/>
-                </a:solidFill>
-                <a:latin typeface="Calibri" pitchFamily="34" charset="0"/>
-                <a:ea typeface="Calibri" pitchFamily="34" charset="-122"/>
-                <a:cs typeface="Calibri" pitchFamily="34" charset="-120"/>
-              </a:rPr>
-              <a:t>Tides: caused by the Moon's gravity pulling on Earth's oceans.</a:t>
-            </a:r>
-            <a:endParaRPr lang="en-US" sz="1500" dirty="0"/>
-          </a:p>
-          <a:p>
-            <a:pPr marL="342900" indent="-342900">
-              <a:spcAft>
-                <a:spcPts val="800"/>
-              </a:spcAft>
-              <a:buSzPct val="100000"/>
-              <a:buChar char="•"/>
-            </a:pPr>
-            <a:r>
-              <a:rPr lang="en-US" sz="1500" dirty="0">
-                <a:solidFill>
-                  <a:srgbClr val="3D3A36"/>
-                </a:solidFill>
-                <a:latin typeface="Calibri" pitchFamily="34" charset="0"/>
-                <a:ea typeface="Calibri" pitchFamily="34" charset="-122"/>
-                <a:cs typeface="Calibri" pitchFamily="34" charset="-120"/>
-              </a:rPr>
-              <a:t>Eclipses: solar (Moon blocks Sun) or lunar (Earth's shadow on Moon).</a:t>
+              <a:t>Moon phases: New → Crescent → Quarter → Gibbous → Full.</a:t>
             </a:r>
             <a:endParaRPr lang="en-US" sz="1500" dirty="0"/>
           </a:p>
@@ -2607,6 +2294,13 @@
 <file path=ppt/slides/slide6.xml><?xml version="1.0" encoding="utf-8"?>
 <p:sld xmlns:a="http://schemas.openxmlformats.org/drawingml/2006/main" xmlns:r="http://schemas.openxmlformats.org/officeDocument/2006/relationships" xmlns:p="http://schemas.openxmlformats.org/presentationml/2006/main">
   <p:cSld name="Slide 6">
+    <p:bg>
+      <p:bgPr>
+        <a:solidFill>
+          <a:srgbClr val="111D35"/>
+        </a:solidFill>
+      </p:bgPr>
+    </p:bg>
     <p:spTree>
       <p:nvGrpSpPr>
         <p:cNvPr id="1" name=""/>
@@ -2623,54 +2317,14 @@
       </p:grpSpPr>
       <p:sp>
         <p:nvSpPr>
-          <p:cNvPr id="2" name="Shape 0"/>
+          <p:cNvPr id="2" name="Text 0"/>
           <p:cNvSpPr/>
           <p:nvPr/>
         </p:nvSpPr>
         <p:spPr>
           <a:xfrm>
-            <a:off x="0" y="0"/>
-            <a:ext cx="9144000" cy="5143500"/>
-          </a:xfrm>
-          <a:prstGeom prst="rect">
-            <a:avLst/>
-          </a:prstGeom>
-          <a:solidFill>
-            <a:srgbClr val="1B2A4A"/>
-          </a:solidFill>
-          <a:ln/>
-        </p:spPr>
-      </p:sp>
-      <p:sp>
-        <p:nvSpPr>
-          <p:cNvPr id="3" name="Shape 1"/>
-          <p:cNvSpPr/>
-          <p:nvPr/>
-        </p:nvSpPr>
-        <p:spPr>
-          <a:xfrm>
-            <a:off x="731520" y="1828800"/>
-            <a:ext cx="73152" cy="1463040"/>
-          </a:xfrm>
-          <a:prstGeom prst="rect">
-            <a:avLst/>
-          </a:prstGeom>
-          <a:solidFill>
-            <a:srgbClr val="2A9D8F"/>
-          </a:solidFill>
-          <a:ln/>
-        </p:spPr>
-      </p:sp>
-      <p:sp>
-        <p:nvSpPr>
-          <p:cNvPr id="4" name="Text 2"/>
-          <p:cNvSpPr/>
-          <p:nvPr/>
-        </p:nvSpPr>
-        <p:spPr>
-          <a:xfrm>
-            <a:off x="1097280" y="1463040"/>
-            <a:ext cx="1097280" cy="1097280"/>
+            <a:off x="731520" y="731520"/>
+            <a:ext cx="2286000" cy="1828800"/>
           </a:xfrm>
           <a:prstGeom prst="rect">
             <a:avLst/>
@@ -2682,34 +2336,36 @@
           <a:bodyPr wrap="square" rtlCol="0" anchor="ctr"/>
           <a:lstStyle/>
           <a:p>
-            <a:pPr algn="l" indent="0" marL="0">
+            <a:pPr indent="0" marL="0">
               <a:buNone/>
             </a:pPr>
             <a:r>
-              <a:rPr lang="en-US" sz="4800" b="1" dirty="0">
+              <a:rPr lang="en-US" sz="7200" b="1" dirty="0">
                 <a:solidFill>
-                  <a:srgbClr val="2A9D8F"/>
+                  <a:srgbClr val="2A9D8F">
+                    <a:alpha val="80000"/>
+                  </a:srgbClr>
                 </a:solidFill>
                 <a:latin typeface="Georgia" pitchFamily="34" charset="0"/>
                 <a:ea typeface="Georgia" pitchFamily="34" charset="-122"/>
                 <a:cs typeface="Georgia" pitchFamily="34" charset="-120"/>
               </a:rPr>
-              <a:t>3</a:t>
-            </a:r>
-            <a:endParaRPr lang="en-US" sz="4800" dirty="0"/>
-          </a:p>
-        </p:txBody>
-      </p:sp>
-      <p:sp>
-        <p:nvSpPr>
-          <p:cNvPr id="5" name="Text 3"/>
+              <a:t>03</a:t>
+            </a:r>
+            <a:endParaRPr lang="en-US" sz="7200" dirty="0"/>
+          </a:p>
+        </p:txBody>
+      </p:sp>
+      <p:sp>
+        <p:nvSpPr>
+          <p:cNvPr id="3" name="Text 1"/>
           <p:cNvSpPr/>
           <p:nvPr/>
         </p:nvSpPr>
         <p:spPr>
           <a:xfrm>
-            <a:off x="2194560" y="1920240"/>
-            <a:ext cx="5943600" cy="1097280"/>
+            <a:off x="731520" y="1828800"/>
+            <a:ext cx="9144000" cy="1097280"/>
           </a:xfrm>
           <a:prstGeom prst="rect">
             <a:avLst/>
@@ -2780,47 +2436,7 @@
         <p:spPr>
           <a:xfrm>
             <a:off x="0" y="0"/>
-            <a:ext cx="9144000" cy="822960"/>
-          </a:xfrm>
-          <a:prstGeom prst="rect">
-            <a:avLst/>
-          </a:prstGeom>
-          <a:solidFill>
-            <a:srgbClr val="FFFFFF"/>
-          </a:solidFill>
-          <a:ln/>
-        </p:spPr>
-      </p:sp>
-      <p:sp>
-        <p:nvSpPr>
-          <p:cNvPr id="3" name="Shape 1"/>
-          <p:cNvSpPr/>
-          <p:nvPr/>
-        </p:nvSpPr>
-        <p:spPr>
-          <a:xfrm>
-            <a:off x="0" y="804672"/>
-            <a:ext cx="9144000" cy="27432"/>
-          </a:xfrm>
-          <a:prstGeom prst="rect">
-            <a:avLst/>
-          </a:prstGeom>
-          <a:solidFill>
-            <a:srgbClr val="E5E2DC"/>
-          </a:solidFill>
-          <a:ln/>
-        </p:spPr>
-      </p:sp>
-      <p:sp>
-        <p:nvSpPr>
-          <p:cNvPr id="4" name="Shape 2"/>
-          <p:cNvSpPr/>
-          <p:nvPr/>
-        </p:nvSpPr>
-        <p:spPr>
-          <a:xfrm>
-            <a:off x="548640" y="201168"/>
-            <a:ext cx="54864" cy="420624"/>
+            <a:ext cx="73152" cy="5148072"/>
           </a:xfrm>
           <a:prstGeom prst="rect">
             <a:avLst/>
@@ -2833,14 +2449,14 @@
       </p:sp>
       <p:sp>
         <p:nvSpPr>
-          <p:cNvPr id="5" name="Text 3"/>
+          <p:cNvPr id="3" name="Text 1"/>
           <p:cNvSpPr/>
           <p:nvPr/>
         </p:nvSpPr>
         <p:spPr>
           <a:xfrm>
-            <a:off x="777240" y="137160"/>
-            <a:ext cx="7772400" cy="548640"/>
+            <a:off x="548640" y="274320"/>
+            <a:ext cx="9144000" cy="640080"/>
           </a:xfrm>
           <a:prstGeom prst="rect">
             <a:avLst/>
@@ -2849,14 +2465,14 @@
           <a:ln/>
         </p:spPr>
         <p:txBody>
-          <a:bodyPr wrap="square" lIns="0" tIns="0" rIns="0" bIns="0" rtlCol="0" anchor="ctr"/>
+          <a:bodyPr wrap="square" rtlCol="0" anchor="ctr"/>
           <a:lstStyle/>
           <a:p>
             <a:pPr indent="0" marL="0">
               <a:buNone/>
             </a:pPr>
             <a:r>
-              <a:rPr lang="en-US" sz="2000" b="1" dirty="0">
+              <a:rPr lang="en-US" sz="2400" b="1" dirty="0">
                 <a:solidFill>
                   <a:srgbClr val="1B2A4A"/>
                 </a:solidFill>
@@ -2864,22 +2480,42 @@
                 <a:ea typeface="Georgia" pitchFamily="34" charset="-122"/>
                 <a:cs typeface="Georgia" pitchFamily="34" charset="-120"/>
               </a:rPr>
-              <a:t>Exploration Review</a:t>
-            </a:r>
-            <a:endParaRPr lang="en-US" sz="2000" dirty="0"/>
-          </a:p>
-        </p:txBody>
-      </p:sp>
-      <p:sp>
-        <p:nvSpPr>
-          <p:cNvPr id="6" name="Text 4"/>
+              <a:t>Space Exploration Recap</a:t>
+            </a:r>
+            <a:endParaRPr lang="en-US" sz="2400" dirty="0"/>
+          </a:p>
+        </p:txBody>
+      </p:sp>
+      <p:sp>
+        <p:nvSpPr>
+          <p:cNvPr id="4" name="Shape 2"/>
           <p:cNvSpPr/>
           <p:nvPr/>
         </p:nvSpPr>
         <p:spPr>
           <a:xfrm>
-            <a:off x="731520" y="1051560"/>
-            <a:ext cx="7680960" cy="3108960"/>
+            <a:off x="548640" y="960120"/>
+            <a:ext cx="2286000" cy="36576"/>
+          </a:xfrm>
+          <a:prstGeom prst="rect">
+            <a:avLst/>
+          </a:prstGeom>
+          <a:solidFill>
+            <a:srgbClr val="2A9D8F"/>
+          </a:solidFill>
+          <a:ln/>
+        </p:spPr>
+      </p:sp>
+      <p:sp>
+        <p:nvSpPr>
+          <p:cNvPr id="5" name="Text 3"/>
+          <p:cNvSpPr/>
+          <p:nvPr/>
+        </p:nvSpPr>
+        <p:spPr>
+          <a:xfrm>
+            <a:off x="548640" y="1188720"/>
+            <a:ext cx="10058400" cy="3474720"/>
           </a:xfrm>
           <a:prstGeom prst="rect">
             <a:avLst/>
@@ -2891,107 +2527,68 @@
           <a:bodyPr wrap="square" rtlCol="0" anchor="t"/>
           <a:lstStyle/>
           <a:p>
-            <a:pPr marL="342900" indent="-342900">
+            <a:pPr>
+              <a:lnSpc>
+                <a:spcPct val="150000"/>
+              </a:lnSpc>
               <a:spcAft>
-                <a:spcPts val="800"/>
+                <a:spcPts val="600"/>
               </a:spcAft>
-              <a:buSzPct val="100000"/>
-              <a:buChar char="•"/>
             </a:pPr>
             <a:r>
               <a:rPr lang="en-US" sz="1500" dirty="0">
                 <a:solidFill>
                   <a:srgbClr val="3D3A36"/>
                 </a:solidFill>
-                <a:latin typeface="Calibri" pitchFamily="34" charset="0"/>
-                <a:ea typeface="Calibri" pitchFamily="34" charset="-122"/>
-                <a:cs typeface="Calibri" pitchFamily="34" charset="-120"/>
+                <a:latin typeface="Arial" pitchFamily="34" charset="0"/>
+                <a:ea typeface="Arial" pitchFamily="34" charset="-122"/>
+                <a:cs typeface="Arial" pitchFamily="34" charset="-120"/>
               </a:rPr>
-              <a:t>Methods: telescopes, satellites, probes, rovers, crewed missions.</a:t>
+              <a:t>Key milestones: Sputnik, Gagarin, Apollo 11, Yang Liwei, Zhurong.</a:t>
             </a:r>
             <a:endParaRPr lang="en-US" sz="1500" dirty="0"/>
           </a:p>
           <a:p>
-            <a:pPr marL="342900" indent="-342900">
+            <a:pPr>
+              <a:lnSpc>
+                <a:spcPct val="150000"/>
+              </a:lnSpc>
               <a:spcAft>
-                <a:spcPts val="800"/>
+                <a:spcPts val="600"/>
               </a:spcAft>
-              <a:buSzPct val="100000"/>
-              <a:buChar char="•"/>
             </a:pPr>
             <a:r>
               <a:rPr lang="en-US" sz="1500" dirty="0">
                 <a:solidFill>
                   <a:srgbClr val="3D3A36"/>
                 </a:solidFill>
-                <a:latin typeface="Calibri" pitchFamily="34" charset="0"/>
-                <a:ea typeface="Calibri" pitchFamily="34" charset="-122"/>
-                <a:cs typeface="Calibri" pitchFamily="34" charset="-120"/>
+                <a:latin typeface="Arial" pitchFamily="34" charset="0"/>
+                <a:ea typeface="Arial" pitchFamily="34" charset="-122"/>
+                <a:cs typeface="Arial" pitchFamily="34" charset="-120"/>
               </a:rPr>
-              <a:t>Key events: Sputnik (1957), Moon landing (1969), ISS (1998), JWST (2021).</a:t>
+              <a:t>Benefits: satellites, technology, climate understanding.</a:t>
             </a:r>
             <a:endParaRPr lang="en-US" sz="1500" dirty="0"/>
           </a:p>
           <a:p>
-            <a:pPr marL="342900" indent="-342900">
+            <a:pPr>
+              <a:lnSpc>
+                <a:spcPct val="150000"/>
+              </a:lnSpc>
               <a:spcAft>
-                <a:spcPts val="800"/>
+                <a:spcPts val="600"/>
               </a:spcAft>
-              <a:buSzPct val="100000"/>
-              <a:buChar char="•"/>
             </a:pPr>
             <a:r>
               <a:rPr lang="en-US" sz="1500" dirty="0">
                 <a:solidFill>
                   <a:srgbClr val="3D3A36"/>
                 </a:solidFill>
-                <a:latin typeface="Calibri" pitchFamily="34" charset="0"/>
-                <a:ea typeface="Calibri" pitchFamily="34" charset="-122"/>
-                <a:cs typeface="Calibri" pitchFamily="34" charset="-120"/>
+                <a:latin typeface="Arial" pitchFamily="34" charset="0"/>
+                <a:ea typeface="Arial" pitchFamily="34" charset="-122"/>
+                <a:cs typeface="Arial" pitchFamily="34" charset="-120"/>
               </a:rPr>
-              <a:t>China: Zhurong rover on Mars (2021), Tiangong space station.</a:t>
-            </a:r>
-            <a:endParaRPr lang="en-US" sz="1500" dirty="0"/>
-          </a:p>
-          <a:p>
-            <a:pPr marL="342900" indent="-342900">
-              <a:spcAft>
-                <a:spcPts val="800"/>
-              </a:spcAft>
-              <a:buSzPct val="100000"/>
-              <a:buChar char="•"/>
-            </a:pPr>
-            <a:r>
-              <a:rPr lang="en-US" sz="1500" dirty="0">
-                <a:solidFill>
-                  <a:srgbClr val="3D3A36"/>
-                </a:solidFill>
-                <a:latin typeface="Calibri" pitchFamily="34" charset="0"/>
-                <a:ea typeface="Calibri" pitchFamily="34" charset="-122"/>
-                <a:cs typeface="Calibri" pitchFamily="34" charset="-120"/>
-              </a:rPr>
-              <a:t>Benefits: GPS, weather, medicine, climate research, inspiration.</a:t>
-            </a:r>
-            <a:endParaRPr lang="en-US" sz="1500" dirty="0"/>
-          </a:p>
-          <a:p>
-            <a:pPr marL="342900" indent="-342900">
-              <a:spcAft>
-                <a:spcPts val="800"/>
-              </a:spcAft>
-              <a:buSzPct val="100000"/>
-              <a:buChar char="•"/>
-            </a:pPr>
-            <a:r>
-              <a:rPr lang="en-US" sz="1500" dirty="0">
-                <a:solidFill>
-                  <a:srgbClr val="3D3A36"/>
-                </a:solidFill>
-                <a:latin typeface="Calibri" pitchFamily="34" charset="0"/>
-                <a:ea typeface="Calibri" pitchFamily="34" charset="-122"/>
-                <a:cs typeface="Calibri" pitchFamily="34" charset="-120"/>
-              </a:rPr>
-              <a:t>Challenges: cost, danger, space debris, ethical questions.</a:t>
+              <a:t>China: Tianhe station, Chang'e Moon missions, BeiDou navigation.</a:t>
             </a:r>
             <a:endParaRPr lang="en-US" sz="1500" dirty="0"/>
           </a:p>
@@ -3011,7 +2608,7 @@
     <p:bg>
       <p:bgPr>
         <a:solidFill>
-          <a:srgbClr val="FAF8F5"/>
+          <a:srgbClr val="111D35"/>
         </a:solidFill>
       </p:bgPr>
     </p:bg>
@@ -3031,74 +2628,14 @@
       </p:grpSpPr>
       <p:sp>
         <p:nvSpPr>
-          <p:cNvPr id="2" name="Shape 0"/>
+          <p:cNvPr id="2" name="Text 0"/>
           <p:cNvSpPr/>
           <p:nvPr/>
         </p:nvSpPr>
         <p:spPr>
           <a:xfrm>
-            <a:off x="0" y="0"/>
-            <a:ext cx="9144000" cy="822960"/>
-          </a:xfrm>
-          <a:prstGeom prst="rect">
-            <a:avLst/>
-          </a:prstGeom>
-          <a:solidFill>
-            <a:srgbClr val="FFFFFF"/>
-          </a:solidFill>
-          <a:ln/>
-        </p:spPr>
-      </p:sp>
-      <p:sp>
-        <p:nvSpPr>
-          <p:cNvPr id="3" name="Shape 1"/>
-          <p:cNvSpPr/>
-          <p:nvPr/>
-        </p:nvSpPr>
-        <p:spPr>
-          <a:xfrm>
-            <a:off x="0" y="804672"/>
-            <a:ext cx="9144000" cy="27432"/>
-          </a:xfrm>
-          <a:prstGeom prst="rect">
-            <a:avLst/>
-          </a:prstGeom>
-          <a:solidFill>
-            <a:srgbClr val="E5E2DC"/>
-          </a:solidFill>
-          <a:ln/>
-        </p:spPr>
-      </p:sp>
-      <p:sp>
-        <p:nvSpPr>
-          <p:cNvPr id="4" name="Shape 2"/>
-          <p:cNvSpPr/>
-          <p:nvPr/>
-        </p:nvSpPr>
-        <p:spPr>
-          <a:xfrm>
-            <a:off x="548640" y="201168"/>
-            <a:ext cx="54864" cy="420624"/>
-          </a:xfrm>
-          <a:prstGeom prst="rect">
-            <a:avLst/>
-          </a:prstGeom>
-          <a:solidFill>
-            <a:srgbClr val="2A9D8F"/>
-          </a:solidFill>
-          <a:ln/>
-        </p:spPr>
-      </p:sp>
-      <p:sp>
-        <p:nvSpPr>
-          <p:cNvPr id="5" name="Text 3"/>
-          <p:cNvSpPr/>
-          <p:nvPr/>
-        </p:nvSpPr>
-        <p:spPr>
-          <a:xfrm>
-            <a:off x="777240" y="137160"/>
-            <a:ext cx="7772400" cy="548640"/>
+            <a:off x="731520" y="1371600"/>
+            <a:ext cx="9144000" cy="914400"/>
           </a:xfrm>
           <a:prstGeom prst="rect">
             <a:avLst/>
@@ -3107,695 +2644,14 @@
           <a:ln/>
         </p:spPr>
         <p:txBody>
-          <a:bodyPr wrap="square" lIns="0" tIns="0" rIns="0" bIns="0" rtlCol="0" anchor="ctr"/>
+          <a:bodyPr wrap="square" rtlCol="0" anchor="ctr"/>
           <a:lstStyle/>
           <a:p>
             <a:pPr indent="0" marL="0">
               <a:buNone/>
             </a:pPr>
             <a:r>
-              <a:rPr lang="en-US" sz="2000" b="1" dirty="0">
-                <a:solidFill>
-                  <a:srgbClr val="1B2A4A"/>
-                </a:solidFill>
-                <a:latin typeface="Georgia" pitchFamily="34" charset="0"/>
-                <a:ea typeface="Georgia" pitchFamily="34" charset="-122"/>
-                <a:cs typeface="Georgia" pitchFamily="34" charset="-120"/>
-              </a:rPr>
-              <a:t>Final Revision Checklist</a:t>
-            </a:r>
-            <a:endParaRPr lang="en-US" sz="2000" dirty="0"/>
-          </a:p>
-        </p:txBody>
-      </p:sp>
-      <p:sp>
-        <p:nvSpPr>
-          <p:cNvPr id="6" name="Shape 4"/>
-          <p:cNvSpPr/>
-          <p:nvPr/>
-        </p:nvSpPr>
-        <p:spPr>
-          <a:xfrm>
-            <a:off x="731520" y="1051560"/>
-            <a:ext cx="7680960" cy="438912"/>
-          </a:xfrm>
-          <a:prstGeom prst="rect">
-            <a:avLst/>
-          </a:prstGeom>
-          <a:solidFill>
-            <a:srgbClr val="FFFFFF"/>
-          </a:solidFill>
-          <a:ln/>
-        </p:spPr>
-      </p:sp>
-      <p:sp>
-        <p:nvSpPr>
-          <p:cNvPr id="7" name="Text 5"/>
-          <p:cNvSpPr/>
-          <p:nvPr/>
-        </p:nvSpPr>
-        <p:spPr>
-          <a:xfrm>
-            <a:off x="868680" y="1051560"/>
-            <a:ext cx="320040" cy="438912"/>
-          </a:xfrm>
-          <a:prstGeom prst="rect">
-            <a:avLst/>
-          </a:prstGeom>
-          <a:noFill/>
-          <a:ln/>
-        </p:spPr>
-        <p:txBody>
-          <a:bodyPr wrap="square" rtlCol="0" anchor="ctr"/>
-          <a:lstStyle/>
-          <a:p>
-            <a:pPr indent="0" marL="0">
-              <a:buNone/>
-            </a:pPr>
-            <a:r>
-              <a:rPr lang="en-US" sz="1400" dirty="0">
-                <a:solidFill>
-                  <a:srgbClr val="2A9D8F"/>
-                </a:solidFill>
-              </a:rPr>
-              <a:t>☐</a:t>
-            </a:r>
-            <a:endParaRPr lang="en-US" sz="1400" dirty="0"/>
-          </a:p>
-        </p:txBody>
-      </p:sp>
-      <p:sp>
-        <p:nvSpPr>
-          <p:cNvPr id="8" name="Text 6"/>
-          <p:cNvSpPr/>
-          <p:nvPr/>
-        </p:nvSpPr>
-        <p:spPr>
-          <a:xfrm>
-            <a:off x="1234440" y="1051560"/>
-            <a:ext cx="6949440" cy="438912"/>
-          </a:xfrm>
-          <a:prstGeom prst="rect">
-            <a:avLst/>
-          </a:prstGeom>
-          <a:noFill/>
-          <a:ln/>
-        </p:spPr>
-        <p:txBody>
-          <a:bodyPr wrap="square" rtlCol="0" anchor="ctr"/>
-          <a:lstStyle/>
-          <a:p>
-            <a:pPr indent="0" marL="0">
-              <a:buNone/>
-            </a:pPr>
-            <a:r>
-              <a:rPr lang="en-US" sz="1300" dirty="0">
-                <a:solidFill>
-                  <a:srgbClr val="3D3A36"/>
-                </a:solidFill>
-                <a:latin typeface="Calibri" pitchFamily="34" charset="0"/>
-                <a:ea typeface="Calibri" pitchFamily="34" charset="-122"/>
-                <a:cs typeface="Calibri" pitchFamily="34" charset="-120"/>
-              </a:rPr>
-              <a:t>8 planets in order — rocky vs gas giants</a:t>
-            </a:r>
-            <a:endParaRPr lang="en-US" sz="1300" dirty="0"/>
-          </a:p>
-        </p:txBody>
-      </p:sp>
-      <p:sp>
-        <p:nvSpPr>
-          <p:cNvPr id="9" name="Shape 7"/>
-          <p:cNvSpPr/>
-          <p:nvPr/>
-        </p:nvSpPr>
-        <p:spPr>
-          <a:xfrm>
-            <a:off x="731520" y="1554480"/>
-            <a:ext cx="7680960" cy="438912"/>
-          </a:xfrm>
-          <a:prstGeom prst="rect">
-            <a:avLst/>
-          </a:prstGeom>
-          <a:solidFill>
-            <a:srgbClr val="F8F6F3"/>
-          </a:solidFill>
-          <a:ln/>
-        </p:spPr>
-      </p:sp>
-      <p:sp>
-        <p:nvSpPr>
-          <p:cNvPr id="10" name="Text 8"/>
-          <p:cNvSpPr/>
-          <p:nvPr/>
-        </p:nvSpPr>
-        <p:spPr>
-          <a:xfrm>
-            <a:off x="868680" y="1554480"/>
-            <a:ext cx="320040" cy="438912"/>
-          </a:xfrm>
-          <a:prstGeom prst="rect">
-            <a:avLst/>
-          </a:prstGeom>
-          <a:noFill/>
-          <a:ln/>
-        </p:spPr>
-        <p:txBody>
-          <a:bodyPr wrap="square" rtlCol="0" anchor="ctr"/>
-          <a:lstStyle/>
-          <a:p>
-            <a:pPr indent="0" marL="0">
-              <a:buNone/>
-            </a:pPr>
-            <a:r>
-              <a:rPr lang="en-US" sz="1400" dirty="0">
-                <a:solidFill>
-                  <a:srgbClr val="2A9D8F"/>
-                </a:solidFill>
-              </a:rPr>
-              <a:t>☐</a:t>
-            </a:r>
-            <a:endParaRPr lang="en-US" sz="1400" dirty="0"/>
-          </a:p>
-        </p:txBody>
-      </p:sp>
-      <p:sp>
-        <p:nvSpPr>
-          <p:cNvPr id="11" name="Text 9"/>
-          <p:cNvSpPr/>
-          <p:nvPr/>
-        </p:nvSpPr>
-        <p:spPr>
-          <a:xfrm>
-            <a:off x="1234440" y="1554480"/>
-            <a:ext cx="6949440" cy="438912"/>
-          </a:xfrm>
-          <a:prstGeom prst="rect">
-            <a:avLst/>
-          </a:prstGeom>
-          <a:noFill/>
-          <a:ln/>
-        </p:spPr>
-        <p:txBody>
-          <a:bodyPr wrap="square" rtlCol="0" anchor="ctr"/>
-          <a:lstStyle/>
-          <a:p>
-            <a:pPr indent="0" marL="0">
-              <a:buNone/>
-            </a:pPr>
-            <a:r>
-              <a:rPr lang="en-US" sz="1300" dirty="0">
-                <a:solidFill>
-                  <a:srgbClr val="3D3A36"/>
-                </a:solidFill>
-                <a:latin typeface="Calibri" pitchFamily="34" charset="0"/>
-                <a:ea typeface="Calibri" pitchFamily="34" charset="-122"/>
-                <a:cs typeface="Calibri" pitchFamily="34" charset="-120"/>
-              </a:rPr>
-              <a:t>Day/night from rotation, seasons from axial tilt</a:t>
-            </a:r>
-            <a:endParaRPr lang="en-US" sz="1300" dirty="0"/>
-          </a:p>
-        </p:txBody>
-      </p:sp>
-      <p:sp>
-        <p:nvSpPr>
-          <p:cNvPr id="12" name="Shape 10"/>
-          <p:cNvSpPr/>
-          <p:nvPr/>
-        </p:nvSpPr>
-        <p:spPr>
-          <a:xfrm>
-            <a:off x="731520" y="2057400"/>
-            <a:ext cx="7680960" cy="438912"/>
-          </a:xfrm>
-          <a:prstGeom prst="rect">
-            <a:avLst/>
-          </a:prstGeom>
-          <a:solidFill>
-            <a:srgbClr val="FFFFFF"/>
-          </a:solidFill>
-          <a:ln/>
-        </p:spPr>
-      </p:sp>
-      <p:sp>
-        <p:nvSpPr>
-          <p:cNvPr id="13" name="Text 11"/>
-          <p:cNvSpPr/>
-          <p:nvPr/>
-        </p:nvSpPr>
-        <p:spPr>
-          <a:xfrm>
-            <a:off x="868680" y="2057400"/>
-            <a:ext cx="320040" cy="438912"/>
-          </a:xfrm>
-          <a:prstGeom prst="rect">
-            <a:avLst/>
-          </a:prstGeom>
-          <a:noFill/>
-          <a:ln/>
-        </p:spPr>
-        <p:txBody>
-          <a:bodyPr wrap="square" rtlCol="0" anchor="ctr"/>
-          <a:lstStyle/>
-          <a:p>
-            <a:pPr indent="0" marL="0">
-              <a:buNone/>
-            </a:pPr>
-            <a:r>
-              <a:rPr lang="en-US" sz="1400" dirty="0">
-                <a:solidFill>
-                  <a:srgbClr val="2A9D8F"/>
-                </a:solidFill>
-              </a:rPr>
-              <a:t>☐</a:t>
-            </a:r>
-            <a:endParaRPr lang="en-US" sz="1400" dirty="0"/>
-          </a:p>
-        </p:txBody>
-      </p:sp>
-      <p:sp>
-        <p:nvSpPr>
-          <p:cNvPr id="14" name="Text 12"/>
-          <p:cNvSpPr/>
-          <p:nvPr/>
-        </p:nvSpPr>
-        <p:spPr>
-          <a:xfrm>
-            <a:off x="1234440" y="2057400"/>
-            <a:ext cx="6949440" cy="438912"/>
-          </a:xfrm>
-          <a:prstGeom prst="rect">
-            <a:avLst/>
-          </a:prstGeom>
-          <a:noFill/>
-          <a:ln/>
-        </p:spPr>
-        <p:txBody>
-          <a:bodyPr wrap="square" rtlCol="0" anchor="ctr"/>
-          <a:lstStyle/>
-          <a:p>
-            <a:pPr indent="0" marL="0">
-              <a:buNone/>
-            </a:pPr>
-            <a:r>
-              <a:rPr lang="en-US" sz="1300" dirty="0">
-                <a:solidFill>
-                  <a:srgbClr val="3D3A36"/>
-                </a:solidFill>
-                <a:latin typeface="Calibri" pitchFamily="34" charset="0"/>
-                <a:ea typeface="Calibri" pitchFamily="34" charset="-122"/>
-                <a:cs typeface="Calibri" pitchFamily="34" charset="-120"/>
-              </a:rPr>
-              <a:t>Moon phases, eclipses, and tides</a:t>
-            </a:r>
-            <a:endParaRPr lang="en-US" sz="1300" dirty="0"/>
-          </a:p>
-        </p:txBody>
-      </p:sp>
-      <p:sp>
-        <p:nvSpPr>
-          <p:cNvPr id="15" name="Shape 13"/>
-          <p:cNvSpPr/>
-          <p:nvPr/>
-        </p:nvSpPr>
-        <p:spPr>
-          <a:xfrm>
-            <a:off x="731520" y="2560320"/>
-            <a:ext cx="7680960" cy="438912"/>
-          </a:xfrm>
-          <a:prstGeom prst="rect">
-            <a:avLst/>
-          </a:prstGeom>
-          <a:solidFill>
-            <a:srgbClr val="F8F6F3"/>
-          </a:solidFill>
-          <a:ln/>
-        </p:spPr>
-      </p:sp>
-      <p:sp>
-        <p:nvSpPr>
-          <p:cNvPr id="16" name="Text 14"/>
-          <p:cNvSpPr/>
-          <p:nvPr/>
-        </p:nvSpPr>
-        <p:spPr>
-          <a:xfrm>
-            <a:off x="868680" y="2560320"/>
-            <a:ext cx="320040" cy="438912"/>
-          </a:xfrm>
-          <a:prstGeom prst="rect">
-            <a:avLst/>
-          </a:prstGeom>
-          <a:noFill/>
-          <a:ln/>
-        </p:spPr>
-        <p:txBody>
-          <a:bodyPr wrap="square" rtlCol="0" anchor="ctr"/>
-          <a:lstStyle/>
-          <a:p>
-            <a:pPr indent="0" marL="0">
-              <a:buNone/>
-            </a:pPr>
-            <a:r>
-              <a:rPr lang="en-US" sz="1400" dirty="0">
-                <a:solidFill>
-                  <a:srgbClr val="2A9D8F"/>
-                </a:solidFill>
-              </a:rPr>
-              <a:t>☐</a:t>
-            </a:r>
-            <a:endParaRPr lang="en-US" sz="1400" dirty="0"/>
-          </a:p>
-        </p:txBody>
-      </p:sp>
-      <p:sp>
-        <p:nvSpPr>
-          <p:cNvPr id="17" name="Text 15"/>
-          <p:cNvSpPr/>
-          <p:nvPr/>
-        </p:nvSpPr>
-        <p:spPr>
-          <a:xfrm>
-            <a:off x="1234440" y="2560320"/>
-            <a:ext cx="6949440" cy="438912"/>
-          </a:xfrm>
-          <a:prstGeom prst="rect">
-            <a:avLst/>
-          </a:prstGeom>
-          <a:noFill/>
-          <a:ln/>
-        </p:spPr>
-        <p:txBody>
-          <a:bodyPr wrap="square" rtlCol="0" anchor="ctr"/>
-          <a:lstStyle/>
-          <a:p>
-            <a:pPr indent="0" marL="0">
-              <a:buNone/>
-            </a:pPr>
-            <a:r>
-              <a:rPr lang="en-US" sz="1300" dirty="0">
-                <a:solidFill>
-                  <a:srgbClr val="3D3A36"/>
-                </a:solidFill>
-                <a:latin typeface="Calibri" pitchFamily="34" charset="0"/>
-                <a:ea typeface="Calibri" pitchFamily="34" charset="-122"/>
-                <a:cs typeface="Calibri" pitchFamily="34" charset="-120"/>
-              </a:rPr>
-              <a:t>Methods and milestones of space exploration</a:t>
-            </a:r>
-            <a:endParaRPr lang="en-US" sz="1300" dirty="0"/>
-          </a:p>
-        </p:txBody>
-      </p:sp>
-      <p:sp>
-        <p:nvSpPr>
-          <p:cNvPr id="18" name="Shape 16"/>
-          <p:cNvSpPr/>
-          <p:nvPr/>
-        </p:nvSpPr>
-        <p:spPr>
-          <a:xfrm>
-            <a:off x="731520" y="3063240"/>
-            <a:ext cx="7680960" cy="438912"/>
-          </a:xfrm>
-          <a:prstGeom prst="rect">
-            <a:avLst/>
-          </a:prstGeom>
-          <a:solidFill>
-            <a:srgbClr val="FFFFFF"/>
-          </a:solidFill>
-          <a:ln/>
-        </p:spPr>
-      </p:sp>
-      <p:sp>
-        <p:nvSpPr>
-          <p:cNvPr id="19" name="Text 17"/>
-          <p:cNvSpPr/>
-          <p:nvPr/>
-        </p:nvSpPr>
-        <p:spPr>
-          <a:xfrm>
-            <a:off x="868680" y="3063240"/>
-            <a:ext cx="320040" cy="438912"/>
-          </a:xfrm>
-          <a:prstGeom prst="rect">
-            <a:avLst/>
-          </a:prstGeom>
-          <a:noFill/>
-          <a:ln/>
-        </p:spPr>
-        <p:txBody>
-          <a:bodyPr wrap="square" rtlCol="0" anchor="ctr"/>
-          <a:lstStyle/>
-          <a:p>
-            <a:pPr indent="0" marL="0">
-              <a:buNone/>
-            </a:pPr>
-            <a:r>
-              <a:rPr lang="en-US" sz="1400" dirty="0">
-                <a:solidFill>
-                  <a:srgbClr val="2A9D8F"/>
-                </a:solidFill>
-              </a:rPr>
-              <a:t>☐</a:t>
-            </a:r>
-            <a:endParaRPr lang="en-US" sz="1400" dirty="0"/>
-          </a:p>
-        </p:txBody>
-      </p:sp>
-      <p:sp>
-        <p:nvSpPr>
-          <p:cNvPr id="20" name="Text 18"/>
-          <p:cNvSpPr/>
-          <p:nvPr/>
-        </p:nvSpPr>
-        <p:spPr>
-          <a:xfrm>
-            <a:off x="1234440" y="3063240"/>
-            <a:ext cx="6949440" cy="438912"/>
-          </a:xfrm>
-          <a:prstGeom prst="rect">
-            <a:avLst/>
-          </a:prstGeom>
-          <a:noFill/>
-          <a:ln/>
-        </p:spPr>
-        <p:txBody>
-          <a:bodyPr wrap="square" rtlCol="0" anchor="ctr"/>
-          <a:lstStyle/>
-          <a:p>
-            <a:pPr indent="0" marL="0">
-              <a:buNone/>
-            </a:pPr>
-            <a:r>
-              <a:rPr lang="en-US" sz="1300" dirty="0">
-                <a:solidFill>
-                  <a:srgbClr val="3D3A36"/>
-                </a:solidFill>
-                <a:latin typeface="Calibri" pitchFamily="34" charset="0"/>
-                <a:ea typeface="Calibri" pitchFamily="34" charset="-122"/>
-                <a:cs typeface="Calibri" pitchFamily="34" charset="-120"/>
-              </a:rPr>
-              <a:t>Benefits and challenges of exploring space</a:t>
-            </a:r>
-            <a:endParaRPr lang="en-US" sz="1300" dirty="0"/>
-          </a:p>
-        </p:txBody>
-      </p:sp>
-      <p:sp>
-        <p:nvSpPr>
-          <p:cNvPr id="21" name="Shape 19"/>
-          <p:cNvSpPr/>
-          <p:nvPr/>
-        </p:nvSpPr>
-        <p:spPr>
-          <a:xfrm>
-            <a:off x="731520" y="3749040"/>
-            <a:ext cx="7680960" cy="594360"/>
-          </a:xfrm>
-          <a:prstGeom prst="rect">
-            <a:avLst/>
-          </a:prstGeom>
-          <a:solidFill>
-            <a:srgbClr val="E8F5F3"/>
-          </a:solidFill>
-          <a:ln/>
-          <a:effectLst>
-            <a:outerShdw sx="100000" sy="100000" kx="0" ky="0" algn="bl" rotWithShape="0" blurRad="50800" dist="25400" dir="8100000">
-              <a:srgbClr val="000000">
-                <a:alpha val="10000"/>
-              </a:srgbClr>
-            </a:outerShdw>
-          </a:effectLst>
-        </p:spPr>
-      </p:sp>
-      <p:sp>
-        <p:nvSpPr>
-          <p:cNvPr id="22" name="Text 20"/>
-          <p:cNvSpPr/>
-          <p:nvPr/>
-        </p:nvSpPr>
-        <p:spPr>
-          <a:xfrm>
-            <a:off x="914400" y="3749040"/>
-            <a:ext cx="7315200" cy="594360"/>
-          </a:xfrm>
-          <a:prstGeom prst="rect">
-            <a:avLst/>
-          </a:prstGeom>
-          <a:noFill/>
-          <a:ln/>
-        </p:spPr>
-        <p:txBody>
-          <a:bodyPr wrap="square" rtlCol="0" anchor="ctr"/>
-          <a:lstStyle/>
-          <a:p>
-            <a:pPr indent="0" marL="0">
-              <a:buNone/>
-            </a:pPr>
-            <a:r>
-              <a:rPr lang="en-US" sz="1200" b="1" dirty="0">
-                <a:solidFill>
-                  <a:srgbClr val="2A9D8F"/>
-                </a:solidFill>
-                <a:latin typeface="Calibri" pitchFamily="34" charset="0"/>
-                <a:ea typeface="Calibri" pitchFamily="34" charset="-122"/>
-                <a:cs typeface="Calibri" pitchFamily="34" charset="-120"/>
-              </a:rPr>
-              <a:t>Key Idea: </a:t>
-            </a:r>
-            <a:pPr indent="0" marL="0">
-              <a:buNone/>
-            </a:pPr>
-            <a:r>
-              <a:rPr lang="en-US" sz="1200" i="1" dirty="0">
-                <a:solidFill>
-                  <a:srgbClr val="3D3A36"/>
-                </a:solidFill>
-                <a:latin typeface="Calibri" pitchFamily="34" charset="0"/>
-                <a:ea typeface="Calibri" pitchFamily="34" charset="-122"/>
-                <a:cs typeface="Calibri" pitchFamily="34" charset="-120"/>
-              </a:rPr>
-              <a:t>Test yourself with the Self-Quiz and Review Games on mrzocchi.com.</a:t>
-            </a:r>
-            <a:endParaRPr lang="en-US" sz="1200" dirty="0"/>
-          </a:p>
-        </p:txBody>
-      </p:sp>
-    </p:spTree>
-  </p:cSld>
-  <p:clrMapOvr>
-    <a:masterClrMapping/>
-  </p:clrMapOvr>
-</p:sld>
-</file>
-
-<file path=ppt/slides/slide9.xml><?xml version="1.0" encoding="utf-8"?>
-<p:sld xmlns:a="http://schemas.openxmlformats.org/drawingml/2006/main" xmlns:r="http://schemas.openxmlformats.org/officeDocument/2006/relationships" xmlns:p="http://schemas.openxmlformats.org/presentationml/2006/main">
-  <p:cSld name="Slide 9">
-    <p:spTree>
-      <p:nvGrpSpPr>
-        <p:cNvPr id="1" name=""/>
-        <p:cNvGrpSpPr/>
-        <p:nvPr/>
-      </p:nvGrpSpPr>
-      <p:grpSpPr>
-        <a:xfrm>
-          <a:off x="0" y="0"/>
-          <a:ext cx="0" cy="0"/>
-          <a:chOff x="0" y="0"/>
-          <a:chExt cx="0" cy="0"/>
-        </a:xfrm>
-      </p:grpSpPr>
-      <p:sp>
-        <p:nvSpPr>
-          <p:cNvPr id="2" name="Shape 0"/>
-          <p:cNvSpPr/>
-          <p:nvPr/>
-        </p:nvSpPr>
-        <p:spPr>
-          <a:xfrm>
-            <a:off x="0" y="0"/>
-            <a:ext cx="9144000" cy="5143500"/>
-          </a:xfrm>
-          <a:prstGeom prst="rect">
-            <a:avLst/>
-          </a:prstGeom>
-          <a:solidFill>
-            <a:srgbClr val="1B2A4A"/>
-          </a:solidFill>
-          <a:ln/>
-        </p:spPr>
-      </p:sp>
-      <p:sp>
-        <p:nvSpPr>
-          <p:cNvPr id="3" name="Shape 1"/>
-          <p:cNvSpPr/>
-          <p:nvPr/>
-        </p:nvSpPr>
-        <p:spPr>
-          <a:xfrm>
-            <a:off x="0" y="4777740"/>
-            <a:ext cx="9144000" cy="365760"/>
-          </a:xfrm>
-          <a:prstGeom prst="rect">
-            <a:avLst/>
-          </a:prstGeom>
-          <a:solidFill>
-            <a:srgbClr val="2A9D8F"/>
-          </a:solidFill>
-          <a:ln/>
-        </p:spPr>
-      </p:sp>
-      <p:sp>
-        <p:nvSpPr>
-          <p:cNvPr id="4" name="Shape 2"/>
-          <p:cNvSpPr/>
-          <p:nvPr/>
-        </p:nvSpPr>
-        <p:spPr>
-          <a:xfrm>
-            <a:off x="-914400" y="-914400"/>
-            <a:ext cx="3657600" cy="3657600"/>
-          </a:xfrm>
-          <a:prstGeom prst="ellipse">
-            <a:avLst/>
-          </a:prstGeom>
-          <a:solidFill>
-            <a:srgbClr val="2A9D8F">
-              <a:alpha val="10000"/>
-            </a:srgbClr>
-          </a:solidFill>
-          <a:ln/>
-        </p:spPr>
-      </p:sp>
-      <p:sp>
-        <p:nvSpPr>
-          <p:cNvPr id="5" name="Text 3"/>
-          <p:cNvSpPr/>
-          <p:nvPr/>
-        </p:nvSpPr>
-        <p:spPr>
-          <a:xfrm>
-            <a:off x="731520" y="1463040"/>
-            <a:ext cx="7680960" cy="822960"/>
-          </a:xfrm>
-          <a:prstGeom prst="rect">
-            <a:avLst/>
-          </a:prstGeom>
-          <a:noFill/>
-          <a:ln/>
-        </p:spPr>
-        <p:txBody>
-          <a:bodyPr wrap="square" rtlCol="0" anchor="ctr"/>
-          <a:lstStyle/>
-          <a:p>
-            <a:pPr algn="ctr" indent="0" marL="0">
-              <a:buNone/>
-            </a:pPr>
-            <a:r>
-              <a:rPr lang="en-US" sz="3400" b="1" dirty="0">
+              <a:rPr lang="en-US" sz="3200" b="1" dirty="0">
                 <a:solidFill>
                   <a:srgbClr val="FFFFFF"/>
                 </a:solidFill>
@@ -3805,20 +2661,20 @@
               </a:rPr>
               <a:t>Review &amp; Practise</a:t>
             </a:r>
-            <a:endParaRPr lang="en-US" sz="3400" dirty="0"/>
-          </a:p>
-        </p:txBody>
-      </p:sp>
-      <p:sp>
-        <p:nvSpPr>
-          <p:cNvPr id="6" name="Text 4"/>
+            <a:endParaRPr lang="en-US" sz="3200" dirty="0"/>
+          </a:p>
+        </p:txBody>
+      </p:sp>
+      <p:sp>
+        <p:nvSpPr>
+          <p:cNvPr id="3" name="Text 1"/>
           <p:cNvSpPr/>
           <p:nvPr/>
         </p:nvSpPr>
         <p:spPr>
           <a:xfrm>
-            <a:off x="731520" y="2468880"/>
-            <a:ext cx="7680960" cy="457200"/>
+            <a:off x="731520" y="2377440"/>
+            <a:ext cx="7315200" cy="548640"/>
           </a:xfrm>
           <a:prstGeom prst="rect">
             <a:avLst/>
@@ -3830,60 +2686,62 @@
           <a:bodyPr wrap="square" rtlCol="0" anchor="ctr"/>
           <a:lstStyle/>
           <a:p>
-            <a:pPr algn="ctr" indent="0" marL="0">
+            <a:pPr indent="0" marL="0">
               <a:buNone/>
             </a:pPr>
             <a:r>
-              <a:rPr lang="en-US" sz="1800" dirty="0">
+              <a:rPr lang="en-US" sz="1500" dirty="0">
                 <a:solidFill>
-                  <a:srgbClr val="2A9D8F"/>
+                  <a:srgbClr val="FFFFFF">
+                    <a:alpha val="60000"/>
+                  </a:srgbClr>
                 </a:solidFill>
-                <a:latin typeface="Calibri" pitchFamily="34" charset="0"/>
-                <a:ea typeface="Calibri" pitchFamily="34" charset="-122"/>
-                <a:cs typeface="Calibri" pitchFamily="34" charset="-120"/>
+                <a:latin typeface="Arial" pitchFamily="34" charset="0"/>
+                <a:ea typeface="Arial" pitchFamily="34" charset="-122"/>
+                <a:cs typeface="Arial" pitchFamily="34" charset="-120"/>
+              </a:rPr>
+              <a:t>Use the Self-Quiz, Review Games, and Practice Builder to test yourself.</a:t>
+            </a:r>
+            <a:endParaRPr lang="en-US" sz="1500" dirty="0"/>
+          </a:p>
+        </p:txBody>
+      </p:sp>
+      <p:sp>
+        <p:nvSpPr>
+          <p:cNvPr id="4" name="Text 2"/>
+          <p:cNvSpPr/>
+          <p:nvPr/>
+        </p:nvSpPr>
+        <p:spPr>
+          <a:xfrm>
+            <a:off x="731520" y="3291840"/>
+            <a:ext cx="3657600" cy="457200"/>
+          </a:xfrm>
+          <a:prstGeom prst="rect">
+            <a:avLst/>
+          </a:prstGeom>
+          <a:noFill/>
+          <a:ln/>
+        </p:spPr>
+        <p:txBody>
+          <a:bodyPr wrap="square" rtlCol="0" anchor="ctr"/>
+          <a:lstStyle/>
+          <a:p>
+            <a:pPr indent="0" marL="0">
+              <a:buNone/>
+            </a:pPr>
+            <a:r>
+              <a:rPr lang="en-US" sz="1800" b="1" dirty="0">
+                <a:solidFill>
+                  <a:srgbClr val="E9C46A"/>
+                </a:solidFill>
+                <a:latin typeface="Georgia" pitchFamily="34" charset="0"/>
+                <a:ea typeface="Georgia" pitchFamily="34" charset="-122"/>
+                <a:cs typeface="Georgia" pitchFamily="34" charset="-120"/>
               </a:rPr>
               <a:t>mrzocchi.com</a:t>
             </a:r>
             <a:endParaRPr lang="en-US" sz="1800" dirty="0"/>
-          </a:p>
-        </p:txBody>
-      </p:sp>
-      <p:sp>
-        <p:nvSpPr>
-          <p:cNvPr id="7" name="Text 5"/>
-          <p:cNvSpPr/>
-          <p:nvPr/>
-        </p:nvSpPr>
-        <p:spPr>
-          <a:xfrm>
-            <a:off x="731520" y="3108960"/>
-            <a:ext cx="7680960" cy="457200"/>
-          </a:xfrm>
-          <a:prstGeom prst="rect">
-            <a:avLst/>
-          </a:prstGeom>
-          <a:noFill/>
-          <a:ln/>
-        </p:spPr>
-        <p:txBody>
-          <a:bodyPr wrap="square" rtlCol="0" anchor="ctr"/>
-          <a:lstStyle/>
-          <a:p>
-            <a:pPr algn="ctr" indent="0" marL="0">
-              <a:buNone/>
-            </a:pPr>
-            <a:r>
-              <a:rPr lang="en-US" sz="1300" dirty="0">
-                <a:solidFill>
-                  <a:srgbClr val="9B9690"/>
-                </a:solidFill>
-                <a:latin typeface="Calibri" pitchFamily="34" charset="0"/>
-                <a:ea typeface="Calibri" pitchFamily="34" charset="-122"/>
-                <a:cs typeface="Calibri" pitchFamily="34" charset="-120"/>
-              </a:rPr>
-              <a:t>Use the Self-Quiz, Review Games, and Practice Builder to test yourself.</a:t>
-            </a:r>
-            <a:endParaRPr lang="en-US" sz="1300" dirty="0"/>
           </a:p>
         </p:txBody>
       </p:sp>
